--- a/public/fun/pack/pptx/review/보장점검양식_08_가족점검_처마밑제비집.pptx
+++ b/public/fun/pack/pptx/review/보장점검양식_08_가족점검_처마밑제비집.pptx
@@ -3347,7 +3347,7 @@
             <a:r>
               <a:rPr sz="3600" b="1" i="0">
                 <a:solidFill>
-                  <a:srgbClr val="16263B"/>
+                  <a:srgbClr val="1D4072"/>
                 </a:solidFill>
               </a:rPr>
               <a:t>우리 보험 점검 시간</a:t>
@@ -3385,7 +3385,7 @@
             <a:r>
               <a:rPr sz="1700" b="0" i="1">
                 <a:solidFill>
-                  <a:srgbClr val="16263B"/>
+                  <a:srgbClr val="1D4072"/>
                 </a:solidFill>
               </a:rPr>
               <a:t>아이 이름으로 된 보험도 같이 적습니다</a:t>
@@ -3460,7 +3460,7 @@
     <p:bg>
       <p:bgPr>
         <a:solidFill>
-          <a:srgbClr val="F0F4F9"/>
+          <a:srgbClr val="F3F7FC"/>
         </a:solidFill>
         <a:effectLst/>
       </p:bgPr>
@@ -3490,7 +3490,7 @@
             </a:avLst>
           </a:prstGeom>
           <a:solidFill>
-            <a:srgbClr val="D1DEF0"/>
+            <a:srgbClr val="D4E3F7"/>
           </a:solidFill>
           <a:ln>
             <a:noFill/>
@@ -3534,7 +3534,7 @@
             <a:r>
               <a:rPr sz="3000" b="1" i="0">
                 <a:solidFill>
-                  <a:srgbClr val="16263B"/>
+                  <a:srgbClr val="1D4072"/>
                 </a:solidFill>
               </a:rPr>
               <a:t>점검 대상 현황</a:t>
@@ -3586,30 +3586,30 @@
                   <a:tcPr anchor="ctr" marL="73152" marR="73152">
                     <a:lnL w="9525" cap="flat" cmpd="sng" algn="ctr">
                       <a:solidFill>
-                        <a:srgbClr val="2A476F"/>
+                        <a:srgbClr val="4981D0"/>
                       </a:solidFill>
                       <a:prstDash val="solid"/>
                     </a:lnL>
                     <a:lnR w="9525" cap="flat" cmpd="sng" algn="ctr">
                       <a:solidFill>
-                        <a:srgbClr val="2A476F"/>
+                        <a:srgbClr val="4981D0"/>
                       </a:solidFill>
                       <a:prstDash val="solid"/>
                     </a:lnR>
                     <a:lnT w="9525" cap="flat" cmpd="sng" algn="ctr">
                       <a:solidFill>
-                        <a:srgbClr val="2A476F"/>
+                        <a:srgbClr val="4981D0"/>
                       </a:solidFill>
                       <a:prstDash val="solid"/>
                     </a:lnT>
                     <a:lnB w="9525" cap="flat" cmpd="sng" algn="ctr">
                       <a:solidFill>
-                        <a:srgbClr val="2A476F"/>
+                        <a:srgbClr val="4981D0"/>
                       </a:solidFill>
                       <a:prstDash val="solid"/>
                     </a:lnB>
                     <a:solidFill>
-                      <a:srgbClr val="2A476F"/>
+                      <a:srgbClr val="4981D0"/>
                     </a:solidFill>
                   </a:tcPr>
                 </a:tc>
@@ -3632,30 +3632,30 @@
                   <a:tcPr anchor="ctr" marL="73152" marR="73152">
                     <a:lnL w="9525" cap="flat" cmpd="sng" algn="ctr">
                       <a:solidFill>
-                        <a:srgbClr val="2A476F"/>
+                        <a:srgbClr val="4981D0"/>
                       </a:solidFill>
                       <a:prstDash val="solid"/>
                     </a:lnL>
                     <a:lnR w="9525" cap="flat" cmpd="sng" algn="ctr">
                       <a:solidFill>
-                        <a:srgbClr val="2A476F"/>
+                        <a:srgbClr val="4981D0"/>
                       </a:solidFill>
                       <a:prstDash val="solid"/>
                     </a:lnR>
                     <a:lnT w="9525" cap="flat" cmpd="sng" algn="ctr">
                       <a:solidFill>
-                        <a:srgbClr val="2A476F"/>
+                        <a:srgbClr val="4981D0"/>
                       </a:solidFill>
                       <a:prstDash val="solid"/>
                     </a:lnT>
                     <a:lnB w="9525" cap="flat" cmpd="sng" algn="ctr">
                       <a:solidFill>
-                        <a:srgbClr val="2A476F"/>
+                        <a:srgbClr val="4981D0"/>
                       </a:solidFill>
                       <a:prstDash val="solid"/>
                     </a:lnB>
                     <a:solidFill>
-                      <a:srgbClr val="2A476F"/>
+                      <a:srgbClr val="4981D0"/>
                     </a:solidFill>
                   </a:tcPr>
                 </a:tc>
@@ -3678,30 +3678,30 @@
                   <a:tcPr anchor="ctr" marL="73152" marR="73152">
                     <a:lnL w="9525" cap="flat" cmpd="sng" algn="ctr">
                       <a:solidFill>
-                        <a:srgbClr val="2A476F"/>
+                        <a:srgbClr val="4981D0"/>
                       </a:solidFill>
                       <a:prstDash val="solid"/>
                     </a:lnL>
                     <a:lnR w="9525" cap="flat" cmpd="sng" algn="ctr">
                       <a:solidFill>
-                        <a:srgbClr val="2A476F"/>
+                        <a:srgbClr val="4981D0"/>
                       </a:solidFill>
                       <a:prstDash val="solid"/>
                     </a:lnR>
                     <a:lnT w="9525" cap="flat" cmpd="sng" algn="ctr">
                       <a:solidFill>
-                        <a:srgbClr val="2A476F"/>
+                        <a:srgbClr val="4981D0"/>
                       </a:solidFill>
                       <a:prstDash val="solid"/>
                     </a:lnT>
                     <a:lnB w="9525" cap="flat" cmpd="sng" algn="ctr">
                       <a:solidFill>
-                        <a:srgbClr val="2A476F"/>
+                        <a:srgbClr val="4981D0"/>
                       </a:solidFill>
                       <a:prstDash val="solid"/>
                     </a:lnB>
                     <a:solidFill>
-                      <a:srgbClr val="2A476F"/>
+                      <a:srgbClr val="4981D0"/>
                     </a:solidFill>
                   </a:tcPr>
                 </a:tc>
@@ -3724,30 +3724,30 @@
                   <a:tcPr anchor="ctr" marL="73152" marR="73152">
                     <a:lnL w="9525" cap="flat" cmpd="sng" algn="ctr">
                       <a:solidFill>
-                        <a:srgbClr val="2A476F"/>
+                        <a:srgbClr val="4981D0"/>
                       </a:solidFill>
                       <a:prstDash val="solid"/>
                     </a:lnL>
                     <a:lnR w="9525" cap="flat" cmpd="sng" algn="ctr">
                       <a:solidFill>
-                        <a:srgbClr val="2A476F"/>
+                        <a:srgbClr val="4981D0"/>
                       </a:solidFill>
                       <a:prstDash val="solid"/>
                     </a:lnR>
                     <a:lnT w="9525" cap="flat" cmpd="sng" algn="ctr">
                       <a:solidFill>
-                        <a:srgbClr val="2A476F"/>
+                        <a:srgbClr val="4981D0"/>
                       </a:solidFill>
                       <a:prstDash val="solid"/>
                     </a:lnT>
                     <a:lnB w="9525" cap="flat" cmpd="sng" algn="ctr">
                       <a:solidFill>
-                        <a:srgbClr val="2A476F"/>
+                        <a:srgbClr val="4981D0"/>
                       </a:solidFill>
                       <a:prstDash val="solid"/>
                     </a:lnB>
                     <a:solidFill>
-                      <a:srgbClr val="2A476F"/>
+                      <a:srgbClr val="4981D0"/>
                     </a:solidFill>
                   </a:tcPr>
                 </a:tc>
@@ -3762,7 +3762,7 @@
                       <a:r>
                         <a:rPr sz="1600" b="1">
                           <a:solidFill>
-                            <a:srgbClr val="16263B"/>
+                            <a:srgbClr val="1D4072"/>
                           </a:solidFill>
                         </a:rPr>
                         <a:t>이름</a:t>
@@ -3772,30 +3772,30 @@
                   <a:tcPr anchor="ctr" marL="73152" marR="73152">
                     <a:lnL w="9525" cap="flat" cmpd="sng" algn="ctr">
                       <a:solidFill>
-                        <a:srgbClr val="D1DEF0"/>
+                        <a:srgbClr val="D4E3F7"/>
                       </a:solidFill>
                       <a:prstDash val="solid"/>
                     </a:lnL>
                     <a:lnR w="9525" cap="flat" cmpd="sng" algn="ctr">
                       <a:solidFill>
-                        <a:srgbClr val="D1DEF0"/>
+                        <a:srgbClr val="D4E3F7"/>
                       </a:solidFill>
                       <a:prstDash val="solid"/>
                     </a:lnR>
                     <a:lnT w="9525" cap="flat" cmpd="sng" algn="ctr">
                       <a:solidFill>
-                        <a:srgbClr val="D1DEF0"/>
+                        <a:srgbClr val="D4E3F7"/>
                       </a:solidFill>
                       <a:prstDash val="solid"/>
                     </a:lnT>
                     <a:lnB w="9525" cap="flat" cmpd="sng" algn="ctr">
                       <a:solidFill>
-                        <a:srgbClr val="D1DEF0"/>
+                        <a:srgbClr val="D4E3F7"/>
                       </a:solidFill>
                       <a:prstDash val="solid"/>
                     </a:lnB>
                     <a:solidFill>
-                      <a:srgbClr val="D1DEF0"/>
+                      <a:srgbClr val="D4E3F7"/>
                     </a:solidFill>
                   </a:tcPr>
                 </a:tc>
@@ -3818,25 +3818,25 @@
                   <a:tcPr anchor="ctr" marL="73152" marR="73152">
                     <a:lnL w="9525" cap="flat" cmpd="sng" algn="ctr">
                       <a:solidFill>
-                        <a:srgbClr val="D1DEF0"/>
+                        <a:srgbClr val="D4E3F7"/>
                       </a:solidFill>
                       <a:prstDash val="solid"/>
                     </a:lnL>
                     <a:lnR w="9525" cap="flat" cmpd="sng" algn="ctr">
                       <a:solidFill>
-                        <a:srgbClr val="D1DEF0"/>
+                        <a:srgbClr val="D4E3F7"/>
                       </a:solidFill>
                       <a:prstDash val="solid"/>
                     </a:lnR>
                     <a:lnT w="9525" cap="flat" cmpd="sng" algn="ctr">
                       <a:solidFill>
-                        <a:srgbClr val="D1DEF0"/>
+                        <a:srgbClr val="D4E3F7"/>
                       </a:solidFill>
                       <a:prstDash val="solid"/>
                     </a:lnT>
                     <a:lnB w="9525" cap="flat" cmpd="sng" algn="ctr">
                       <a:solidFill>
-                        <a:srgbClr val="D1DEF0"/>
+                        <a:srgbClr val="D4E3F7"/>
                       </a:solidFill>
                       <a:prstDash val="solid"/>
                     </a:lnB>
@@ -3864,25 +3864,25 @@
                   <a:tcPr anchor="ctr" marL="73152" marR="73152">
                     <a:lnL w="9525" cap="flat" cmpd="sng" algn="ctr">
                       <a:solidFill>
-                        <a:srgbClr val="D1DEF0"/>
+                        <a:srgbClr val="D4E3F7"/>
                       </a:solidFill>
                       <a:prstDash val="solid"/>
                     </a:lnL>
                     <a:lnR w="9525" cap="flat" cmpd="sng" algn="ctr">
                       <a:solidFill>
-                        <a:srgbClr val="D1DEF0"/>
+                        <a:srgbClr val="D4E3F7"/>
                       </a:solidFill>
                       <a:prstDash val="solid"/>
                     </a:lnR>
                     <a:lnT w="9525" cap="flat" cmpd="sng" algn="ctr">
                       <a:solidFill>
-                        <a:srgbClr val="D1DEF0"/>
+                        <a:srgbClr val="D4E3F7"/>
                       </a:solidFill>
                       <a:prstDash val="solid"/>
                     </a:lnT>
                     <a:lnB w="9525" cap="flat" cmpd="sng" algn="ctr">
                       <a:solidFill>
-                        <a:srgbClr val="D1DEF0"/>
+                        <a:srgbClr val="D4E3F7"/>
                       </a:solidFill>
                       <a:prstDash val="solid"/>
                     </a:lnB>
@@ -3910,25 +3910,25 @@
                   <a:tcPr anchor="ctr" marL="73152" marR="73152">
                     <a:lnL w="9525" cap="flat" cmpd="sng" algn="ctr">
                       <a:solidFill>
-                        <a:srgbClr val="D1DEF0"/>
+                        <a:srgbClr val="D4E3F7"/>
                       </a:solidFill>
                       <a:prstDash val="solid"/>
                     </a:lnL>
                     <a:lnR w="9525" cap="flat" cmpd="sng" algn="ctr">
                       <a:solidFill>
-                        <a:srgbClr val="D1DEF0"/>
+                        <a:srgbClr val="D4E3F7"/>
                       </a:solidFill>
                       <a:prstDash val="solid"/>
                     </a:lnR>
                     <a:lnT w="9525" cap="flat" cmpd="sng" algn="ctr">
                       <a:solidFill>
-                        <a:srgbClr val="D1DEF0"/>
+                        <a:srgbClr val="D4E3F7"/>
                       </a:solidFill>
                       <a:prstDash val="solid"/>
                     </a:lnT>
                     <a:lnB w="9525" cap="flat" cmpd="sng" algn="ctr">
                       <a:solidFill>
-                        <a:srgbClr val="D1DEF0"/>
+                        <a:srgbClr val="D4E3F7"/>
                       </a:solidFill>
                       <a:prstDash val="solid"/>
                     </a:lnB>
@@ -3948,7 +3948,7 @@
                       <a:r>
                         <a:rPr sz="1600" b="1">
                           <a:solidFill>
-                            <a:srgbClr val="16263B"/>
+                            <a:srgbClr val="1D4072"/>
                           </a:solidFill>
                         </a:rPr>
                         <a:t>나이</a:t>
@@ -3958,30 +3958,30 @@
                   <a:tcPr anchor="ctr" marL="73152" marR="73152">
                     <a:lnL w="9525" cap="flat" cmpd="sng" algn="ctr">
                       <a:solidFill>
-                        <a:srgbClr val="D1DEF0"/>
+                        <a:srgbClr val="D4E3F7"/>
                       </a:solidFill>
                       <a:prstDash val="solid"/>
                     </a:lnL>
                     <a:lnR w="9525" cap="flat" cmpd="sng" algn="ctr">
                       <a:solidFill>
-                        <a:srgbClr val="D1DEF0"/>
+                        <a:srgbClr val="D4E3F7"/>
                       </a:solidFill>
                       <a:prstDash val="solid"/>
                     </a:lnR>
                     <a:lnT w="9525" cap="flat" cmpd="sng" algn="ctr">
                       <a:solidFill>
-                        <a:srgbClr val="D1DEF0"/>
+                        <a:srgbClr val="D4E3F7"/>
                       </a:solidFill>
                       <a:prstDash val="solid"/>
                     </a:lnT>
                     <a:lnB w="9525" cap="flat" cmpd="sng" algn="ctr">
                       <a:solidFill>
-                        <a:srgbClr val="D1DEF0"/>
+                        <a:srgbClr val="D4E3F7"/>
                       </a:solidFill>
                       <a:prstDash val="solid"/>
                     </a:lnB>
                     <a:solidFill>
-                      <a:srgbClr val="D1DEF0"/>
+                      <a:srgbClr val="D4E3F7"/>
                     </a:solidFill>
                   </a:tcPr>
                 </a:tc>
@@ -4004,30 +4004,30 @@
                   <a:tcPr anchor="ctr" marL="73152" marR="73152">
                     <a:lnL w="9525" cap="flat" cmpd="sng" algn="ctr">
                       <a:solidFill>
-                        <a:srgbClr val="D1DEF0"/>
+                        <a:srgbClr val="D4E3F7"/>
                       </a:solidFill>
                       <a:prstDash val="solid"/>
                     </a:lnL>
                     <a:lnR w="9525" cap="flat" cmpd="sng" algn="ctr">
                       <a:solidFill>
-                        <a:srgbClr val="D1DEF0"/>
+                        <a:srgbClr val="D4E3F7"/>
                       </a:solidFill>
                       <a:prstDash val="solid"/>
                     </a:lnR>
                     <a:lnT w="9525" cap="flat" cmpd="sng" algn="ctr">
                       <a:solidFill>
-                        <a:srgbClr val="D1DEF0"/>
+                        <a:srgbClr val="D4E3F7"/>
                       </a:solidFill>
                       <a:prstDash val="solid"/>
                     </a:lnT>
                     <a:lnB w="9525" cap="flat" cmpd="sng" algn="ctr">
                       <a:solidFill>
-                        <a:srgbClr val="D1DEF0"/>
+                        <a:srgbClr val="D4E3F7"/>
                       </a:solidFill>
                       <a:prstDash val="solid"/>
                     </a:lnB>
                     <a:solidFill>
-                      <a:srgbClr val="F0F4F9"/>
+                      <a:srgbClr val="F3F7FC"/>
                     </a:solidFill>
                   </a:tcPr>
                 </a:tc>
@@ -4050,30 +4050,30 @@
                   <a:tcPr anchor="ctr" marL="73152" marR="73152">
                     <a:lnL w="9525" cap="flat" cmpd="sng" algn="ctr">
                       <a:solidFill>
-                        <a:srgbClr val="D1DEF0"/>
+                        <a:srgbClr val="D4E3F7"/>
                       </a:solidFill>
                       <a:prstDash val="solid"/>
                     </a:lnL>
                     <a:lnR w="9525" cap="flat" cmpd="sng" algn="ctr">
                       <a:solidFill>
-                        <a:srgbClr val="D1DEF0"/>
+                        <a:srgbClr val="D4E3F7"/>
                       </a:solidFill>
                       <a:prstDash val="solid"/>
                     </a:lnR>
                     <a:lnT w="9525" cap="flat" cmpd="sng" algn="ctr">
                       <a:solidFill>
-                        <a:srgbClr val="D1DEF0"/>
+                        <a:srgbClr val="D4E3F7"/>
                       </a:solidFill>
                       <a:prstDash val="solid"/>
                     </a:lnT>
                     <a:lnB w="9525" cap="flat" cmpd="sng" algn="ctr">
                       <a:solidFill>
-                        <a:srgbClr val="D1DEF0"/>
+                        <a:srgbClr val="D4E3F7"/>
                       </a:solidFill>
                       <a:prstDash val="solid"/>
                     </a:lnB>
                     <a:solidFill>
-                      <a:srgbClr val="F0F4F9"/>
+                      <a:srgbClr val="F3F7FC"/>
                     </a:solidFill>
                   </a:tcPr>
                 </a:tc>
@@ -4096,30 +4096,30 @@
                   <a:tcPr anchor="ctr" marL="73152" marR="73152">
                     <a:lnL w="9525" cap="flat" cmpd="sng" algn="ctr">
                       <a:solidFill>
-                        <a:srgbClr val="D1DEF0"/>
+                        <a:srgbClr val="D4E3F7"/>
                       </a:solidFill>
                       <a:prstDash val="solid"/>
                     </a:lnL>
                     <a:lnR w="9525" cap="flat" cmpd="sng" algn="ctr">
                       <a:solidFill>
-                        <a:srgbClr val="D1DEF0"/>
+                        <a:srgbClr val="D4E3F7"/>
                       </a:solidFill>
                       <a:prstDash val="solid"/>
                     </a:lnR>
                     <a:lnT w="9525" cap="flat" cmpd="sng" algn="ctr">
                       <a:solidFill>
-                        <a:srgbClr val="D1DEF0"/>
+                        <a:srgbClr val="D4E3F7"/>
                       </a:solidFill>
                       <a:prstDash val="solid"/>
                     </a:lnT>
                     <a:lnB w="9525" cap="flat" cmpd="sng" algn="ctr">
                       <a:solidFill>
-                        <a:srgbClr val="D1DEF0"/>
+                        <a:srgbClr val="D4E3F7"/>
                       </a:solidFill>
                       <a:prstDash val="solid"/>
                     </a:lnB>
                     <a:solidFill>
-                      <a:srgbClr val="F0F4F9"/>
+                      <a:srgbClr val="F3F7FC"/>
                     </a:solidFill>
                   </a:tcPr>
                 </a:tc>
@@ -4134,7 +4134,7 @@
                       <a:r>
                         <a:rPr sz="1600" b="1">
                           <a:solidFill>
-                            <a:srgbClr val="16263B"/>
+                            <a:srgbClr val="1D4072"/>
                           </a:solidFill>
                         </a:rPr>
                         <a:t>직업·학교</a:t>
@@ -4144,30 +4144,30 @@
                   <a:tcPr anchor="ctr" marL="73152" marR="73152">
                     <a:lnL w="9525" cap="flat" cmpd="sng" algn="ctr">
                       <a:solidFill>
-                        <a:srgbClr val="D1DEF0"/>
+                        <a:srgbClr val="D4E3F7"/>
                       </a:solidFill>
                       <a:prstDash val="solid"/>
                     </a:lnL>
                     <a:lnR w="9525" cap="flat" cmpd="sng" algn="ctr">
                       <a:solidFill>
-                        <a:srgbClr val="D1DEF0"/>
+                        <a:srgbClr val="D4E3F7"/>
                       </a:solidFill>
                       <a:prstDash val="solid"/>
                     </a:lnR>
                     <a:lnT w="9525" cap="flat" cmpd="sng" algn="ctr">
                       <a:solidFill>
-                        <a:srgbClr val="D1DEF0"/>
+                        <a:srgbClr val="D4E3F7"/>
                       </a:solidFill>
                       <a:prstDash val="solid"/>
                     </a:lnT>
                     <a:lnB w="9525" cap="flat" cmpd="sng" algn="ctr">
                       <a:solidFill>
-                        <a:srgbClr val="D1DEF0"/>
+                        <a:srgbClr val="D4E3F7"/>
                       </a:solidFill>
                       <a:prstDash val="solid"/>
                     </a:lnB>
                     <a:solidFill>
-                      <a:srgbClr val="D1DEF0"/>
+                      <a:srgbClr val="D4E3F7"/>
                     </a:solidFill>
                   </a:tcPr>
                 </a:tc>
@@ -4190,25 +4190,25 @@
                   <a:tcPr anchor="ctr" marL="73152" marR="73152">
                     <a:lnL w="9525" cap="flat" cmpd="sng" algn="ctr">
                       <a:solidFill>
-                        <a:srgbClr val="D1DEF0"/>
+                        <a:srgbClr val="D4E3F7"/>
                       </a:solidFill>
                       <a:prstDash val="solid"/>
                     </a:lnL>
                     <a:lnR w="9525" cap="flat" cmpd="sng" algn="ctr">
                       <a:solidFill>
-                        <a:srgbClr val="D1DEF0"/>
+                        <a:srgbClr val="D4E3F7"/>
                       </a:solidFill>
                       <a:prstDash val="solid"/>
                     </a:lnR>
                     <a:lnT w="9525" cap="flat" cmpd="sng" algn="ctr">
                       <a:solidFill>
-                        <a:srgbClr val="D1DEF0"/>
+                        <a:srgbClr val="D4E3F7"/>
                       </a:solidFill>
                       <a:prstDash val="solid"/>
                     </a:lnT>
                     <a:lnB w="9525" cap="flat" cmpd="sng" algn="ctr">
                       <a:solidFill>
-                        <a:srgbClr val="D1DEF0"/>
+                        <a:srgbClr val="D4E3F7"/>
                       </a:solidFill>
                       <a:prstDash val="solid"/>
                     </a:lnB>
@@ -4236,25 +4236,25 @@
                   <a:tcPr anchor="ctr" marL="73152" marR="73152">
                     <a:lnL w="9525" cap="flat" cmpd="sng" algn="ctr">
                       <a:solidFill>
-                        <a:srgbClr val="D1DEF0"/>
+                        <a:srgbClr val="D4E3F7"/>
                       </a:solidFill>
                       <a:prstDash val="solid"/>
                     </a:lnL>
                     <a:lnR w="9525" cap="flat" cmpd="sng" algn="ctr">
                       <a:solidFill>
-                        <a:srgbClr val="D1DEF0"/>
+                        <a:srgbClr val="D4E3F7"/>
                       </a:solidFill>
                       <a:prstDash val="solid"/>
                     </a:lnR>
                     <a:lnT w="9525" cap="flat" cmpd="sng" algn="ctr">
                       <a:solidFill>
-                        <a:srgbClr val="D1DEF0"/>
+                        <a:srgbClr val="D4E3F7"/>
                       </a:solidFill>
                       <a:prstDash val="solid"/>
                     </a:lnT>
                     <a:lnB w="9525" cap="flat" cmpd="sng" algn="ctr">
                       <a:solidFill>
-                        <a:srgbClr val="D1DEF0"/>
+                        <a:srgbClr val="D4E3F7"/>
                       </a:solidFill>
                       <a:prstDash val="solid"/>
                     </a:lnB>
@@ -4282,25 +4282,25 @@
                   <a:tcPr anchor="ctr" marL="73152" marR="73152">
                     <a:lnL w="9525" cap="flat" cmpd="sng" algn="ctr">
                       <a:solidFill>
-                        <a:srgbClr val="D1DEF0"/>
+                        <a:srgbClr val="D4E3F7"/>
                       </a:solidFill>
                       <a:prstDash val="solid"/>
                     </a:lnL>
                     <a:lnR w="9525" cap="flat" cmpd="sng" algn="ctr">
                       <a:solidFill>
-                        <a:srgbClr val="D1DEF0"/>
+                        <a:srgbClr val="D4E3F7"/>
                       </a:solidFill>
                       <a:prstDash val="solid"/>
                     </a:lnR>
                     <a:lnT w="9525" cap="flat" cmpd="sng" algn="ctr">
                       <a:solidFill>
-                        <a:srgbClr val="D1DEF0"/>
+                        <a:srgbClr val="D4E3F7"/>
                       </a:solidFill>
                       <a:prstDash val="solid"/>
                     </a:lnT>
                     <a:lnB w="9525" cap="flat" cmpd="sng" algn="ctr">
                       <a:solidFill>
-                        <a:srgbClr val="D1DEF0"/>
+                        <a:srgbClr val="D4E3F7"/>
                       </a:solidFill>
                       <a:prstDash val="solid"/>
                     </a:lnB>
@@ -4320,7 +4320,7 @@
                       <a:r>
                         <a:rPr sz="1600" b="1">
                           <a:solidFill>
-                            <a:srgbClr val="16263B"/>
+                            <a:srgbClr val="1D4072"/>
                           </a:solidFill>
                         </a:rPr>
                         <a:t>메모</a:t>
@@ -4330,30 +4330,30 @@
                   <a:tcPr anchor="ctr" marL="73152" marR="73152">
                     <a:lnL w="9525" cap="flat" cmpd="sng" algn="ctr">
                       <a:solidFill>
-                        <a:srgbClr val="D1DEF0"/>
+                        <a:srgbClr val="D4E3F7"/>
                       </a:solidFill>
                       <a:prstDash val="solid"/>
                     </a:lnL>
                     <a:lnR w="9525" cap="flat" cmpd="sng" algn="ctr">
                       <a:solidFill>
-                        <a:srgbClr val="D1DEF0"/>
+                        <a:srgbClr val="D4E3F7"/>
                       </a:solidFill>
                       <a:prstDash val="solid"/>
                     </a:lnR>
                     <a:lnT w="9525" cap="flat" cmpd="sng" algn="ctr">
                       <a:solidFill>
-                        <a:srgbClr val="D1DEF0"/>
+                        <a:srgbClr val="D4E3F7"/>
                       </a:solidFill>
                       <a:prstDash val="solid"/>
                     </a:lnT>
                     <a:lnB w="9525" cap="flat" cmpd="sng" algn="ctr">
                       <a:solidFill>
-                        <a:srgbClr val="D1DEF0"/>
+                        <a:srgbClr val="D4E3F7"/>
                       </a:solidFill>
                       <a:prstDash val="solid"/>
                     </a:lnB>
                     <a:solidFill>
-                      <a:srgbClr val="D1DEF0"/>
+                      <a:srgbClr val="D4E3F7"/>
                     </a:solidFill>
                   </a:tcPr>
                 </a:tc>
@@ -4376,30 +4376,30 @@
                   <a:tcPr anchor="ctr" marL="73152" marR="73152">
                     <a:lnL w="9525" cap="flat" cmpd="sng" algn="ctr">
                       <a:solidFill>
-                        <a:srgbClr val="D1DEF0"/>
+                        <a:srgbClr val="D4E3F7"/>
                       </a:solidFill>
                       <a:prstDash val="solid"/>
                     </a:lnL>
                     <a:lnR w="9525" cap="flat" cmpd="sng" algn="ctr">
                       <a:solidFill>
-                        <a:srgbClr val="D1DEF0"/>
+                        <a:srgbClr val="D4E3F7"/>
                       </a:solidFill>
                       <a:prstDash val="solid"/>
                     </a:lnR>
                     <a:lnT w="9525" cap="flat" cmpd="sng" algn="ctr">
                       <a:solidFill>
-                        <a:srgbClr val="D1DEF0"/>
+                        <a:srgbClr val="D4E3F7"/>
                       </a:solidFill>
                       <a:prstDash val="solid"/>
                     </a:lnT>
                     <a:lnB w="9525" cap="flat" cmpd="sng" algn="ctr">
                       <a:solidFill>
-                        <a:srgbClr val="D1DEF0"/>
+                        <a:srgbClr val="D4E3F7"/>
                       </a:solidFill>
                       <a:prstDash val="solid"/>
                     </a:lnB>
                     <a:solidFill>
-                      <a:srgbClr val="F0F4F9"/>
+                      <a:srgbClr val="F3F7FC"/>
                     </a:solidFill>
                   </a:tcPr>
                 </a:tc>
@@ -4422,30 +4422,30 @@
                   <a:tcPr anchor="ctr" marL="73152" marR="73152">
                     <a:lnL w="9525" cap="flat" cmpd="sng" algn="ctr">
                       <a:solidFill>
-                        <a:srgbClr val="D1DEF0"/>
+                        <a:srgbClr val="D4E3F7"/>
                       </a:solidFill>
                       <a:prstDash val="solid"/>
                     </a:lnL>
                     <a:lnR w="9525" cap="flat" cmpd="sng" algn="ctr">
                       <a:solidFill>
-                        <a:srgbClr val="D1DEF0"/>
+                        <a:srgbClr val="D4E3F7"/>
                       </a:solidFill>
                       <a:prstDash val="solid"/>
                     </a:lnR>
                     <a:lnT w="9525" cap="flat" cmpd="sng" algn="ctr">
                       <a:solidFill>
-                        <a:srgbClr val="D1DEF0"/>
+                        <a:srgbClr val="D4E3F7"/>
                       </a:solidFill>
                       <a:prstDash val="solid"/>
                     </a:lnT>
                     <a:lnB w="9525" cap="flat" cmpd="sng" algn="ctr">
                       <a:solidFill>
-                        <a:srgbClr val="D1DEF0"/>
+                        <a:srgbClr val="D4E3F7"/>
                       </a:solidFill>
                       <a:prstDash val="solid"/>
                     </a:lnB>
                     <a:solidFill>
-                      <a:srgbClr val="F0F4F9"/>
+                      <a:srgbClr val="F3F7FC"/>
                     </a:solidFill>
                   </a:tcPr>
                 </a:tc>
@@ -4468,30 +4468,30 @@
                   <a:tcPr anchor="ctr" marL="73152" marR="73152">
                     <a:lnL w="9525" cap="flat" cmpd="sng" algn="ctr">
                       <a:solidFill>
-                        <a:srgbClr val="D1DEF0"/>
+                        <a:srgbClr val="D4E3F7"/>
                       </a:solidFill>
                       <a:prstDash val="solid"/>
                     </a:lnL>
                     <a:lnR w="9525" cap="flat" cmpd="sng" algn="ctr">
                       <a:solidFill>
-                        <a:srgbClr val="D1DEF0"/>
+                        <a:srgbClr val="D4E3F7"/>
                       </a:solidFill>
                       <a:prstDash val="solid"/>
                     </a:lnR>
                     <a:lnT w="9525" cap="flat" cmpd="sng" algn="ctr">
                       <a:solidFill>
-                        <a:srgbClr val="D1DEF0"/>
+                        <a:srgbClr val="D4E3F7"/>
                       </a:solidFill>
                       <a:prstDash val="solid"/>
                     </a:lnT>
                     <a:lnB w="9525" cap="flat" cmpd="sng" algn="ctr">
                       <a:solidFill>
-                        <a:srgbClr val="D1DEF0"/>
+                        <a:srgbClr val="D4E3F7"/>
                       </a:solidFill>
                       <a:prstDash val="solid"/>
                     </a:lnB>
                     <a:solidFill>
-                      <a:srgbClr val="F0F4F9"/>
+                      <a:srgbClr val="F3F7FC"/>
                     </a:solidFill>
                   </a:tcPr>
                 </a:tc>
@@ -4514,7 +4514,7 @@
     <p:bg>
       <p:bgPr>
         <a:solidFill>
-          <a:srgbClr val="F0F4F9"/>
+          <a:srgbClr val="F3F7FC"/>
         </a:solidFill>
         <a:effectLst/>
       </p:bgPr>
@@ -4544,7 +4544,7 @@
             </a:avLst>
           </a:prstGeom>
           <a:solidFill>
-            <a:srgbClr val="D1DEF0"/>
+            <a:srgbClr val="D4E3F7"/>
           </a:solidFill>
           <a:ln>
             <a:noFill/>
@@ -4588,7 +4588,7 @@
             <a:r>
               <a:rPr sz="3000" b="1" i="0">
                 <a:solidFill>
-                  <a:srgbClr val="16263B"/>
+                  <a:srgbClr val="1D4072"/>
                 </a:solidFill>
               </a:rPr>
               <a:t>가입한 보험 목록</a:t>
@@ -4641,30 +4641,30 @@
                   <a:tcPr anchor="ctr" marL="73152" marR="73152">
                     <a:lnL w="9525" cap="flat" cmpd="sng" algn="ctr">
                       <a:solidFill>
-                        <a:srgbClr val="2A476F"/>
+                        <a:srgbClr val="4981D0"/>
                       </a:solidFill>
                       <a:prstDash val="solid"/>
                     </a:lnL>
                     <a:lnR w="9525" cap="flat" cmpd="sng" algn="ctr">
                       <a:solidFill>
-                        <a:srgbClr val="2A476F"/>
+                        <a:srgbClr val="4981D0"/>
                       </a:solidFill>
                       <a:prstDash val="solid"/>
                     </a:lnR>
                     <a:lnT w="9525" cap="flat" cmpd="sng" algn="ctr">
                       <a:solidFill>
-                        <a:srgbClr val="2A476F"/>
+                        <a:srgbClr val="4981D0"/>
                       </a:solidFill>
                       <a:prstDash val="solid"/>
                     </a:lnT>
                     <a:lnB w="9525" cap="flat" cmpd="sng" algn="ctr">
                       <a:solidFill>
-                        <a:srgbClr val="2A476F"/>
+                        <a:srgbClr val="4981D0"/>
                       </a:solidFill>
                       <a:prstDash val="solid"/>
                     </a:lnB>
                     <a:solidFill>
-                      <a:srgbClr val="2A476F"/>
+                      <a:srgbClr val="4981D0"/>
                     </a:solidFill>
                   </a:tcPr>
                 </a:tc>
@@ -4687,30 +4687,30 @@
                   <a:tcPr anchor="ctr" marL="73152" marR="73152">
                     <a:lnL w="9525" cap="flat" cmpd="sng" algn="ctr">
                       <a:solidFill>
-                        <a:srgbClr val="2A476F"/>
+                        <a:srgbClr val="4981D0"/>
                       </a:solidFill>
                       <a:prstDash val="solid"/>
                     </a:lnL>
                     <a:lnR w="9525" cap="flat" cmpd="sng" algn="ctr">
                       <a:solidFill>
-                        <a:srgbClr val="2A476F"/>
+                        <a:srgbClr val="4981D0"/>
                       </a:solidFill>
                       <a:prstDash val="solid"/>
                     </a:lnR>
                     <a:lnT w="9525" cap="flat" cmpd="sng" algn="ctr">
                       <a:solidFill>
-                        <a:srgbClr val="2A476F"/>
+                        <a:srgbClr val="4981D0"/>
                       </a:solidFill>
                       <a:prstDash val="solid"/>
                     </a:lnT>
                     <a:lnB w="9525" cap="flat" cmpd="sng" algn="ctr">
                       <a:solidFill>
-                        <a:srgbClr val="2A476F"/>
+                        <a:srgbClr val="4981D0"/>
                       </a:solidFill>
                       <a:prstDash val="solid"/>
                     </a:lnB>
                     <a:solidFill>
-                      <a:srgbClr val="2A476F"/>
+                      <a:srgbClr val="4981D0"/>
                     </a:solidFill>
                   </a:tcPr>
                 </a:tc>
@@ -4733,30 +4733,30 @@
                   <a:tcPr anchor="ctr" marL="73152" marR="73152">
                     <a:lnL w="9525" cap="flat" cmpd="sng" algn="ctr">
                       <a:solidFill>
-                        <a:srgbClr val="2A476F"/>
+                        <a:srgbClr val="4981D0"/>
                       </a:solidFill>
                       <a:prstDash val="solid"/>
                     </a:lnL>
                     <a:lnR w="9525" cap="flat" cmpd="sng" algn="ctr">
                       <a:solidFill>
-                        <a:srgbClr val="2A476F"/>
+                        <a:srgbClr val="4981D0"/>
                       </a:solidFill>
                       <a:prstDash val="solid"/>
                     </a:lnR>
                     <a:lnT w="9525" cap="flat" cmpd="sng" algn="ctr">
                       <a:solidFill>
-                        <a:srgbClr val="2A476F"/>
+                        <a:srgbClr val="4981D0"/>
                       </a:solidFill>
                       <a:prstDash val="solid"/>
                     </a:lnT>
                     <a:lnB w="9525" cap="flat" cmpd="sng" algn="ctr">
                       <a:solidFill>
-                        <a:srgbClr val="2A476F"/>
+                        <a:srgbClr val="4981D0"/>
                       </a:solidFill>
                       <a:prstDash val="solid"/>
                     </a:lnB>
                     <a:solidFill>
-                      <a:srgbClr val="2A476F"/>
+                      <a:srgbClr val="4981D0"/>
                     </a:solidFill>
                   </a:tcPr>
                 </a:tc>
@@ -4779,30 +4779,30 @@
                   <a:tcPr anchor="ctr" marL="73152" marR="73152">
                     <a:lnL w="9525" cap="flat" cmpd="sng" algn="ctr">
                       <a:solidFill>
-                        <a:srgbClr val="2A476F"/>
+                        <a:srgbClr val="4981D0"/>
                       </a:solidFill>
                       <a:prstDash val="solid"/>
                     </a:lnL>
                     <a:lnR w="9525" cap="flat" cmpd="sng" algn="ctr">
                       <a:solidFill>
-                        <a:srgbClr val="2A476F"/>
+                        <a:srgbClr val="4981D0"/>
                       </a:solidFill>
                       <a:prstDash val="solid"/>
                     </a:lnR>
                     <a:lnT w="9525" cap="flat" cmpd="sng" algn="ctr">
                       <a:solidFill>
-                        <a:srgbClr val="2A476F"/>
+                        <a:srgbClr val="4981D0"/>
                       </a:solidFill>
                       <a:prstDash val="solid"/>
                     </a:lnT>
                     <a:lnB w="9525" cap="flat" cmpd="sng" algn="ctr">
                       <a:solidFill>
-                        <a:srgbClr val="2A476F"/>
+                        <a:srgbClr val="4981D0"/>
                       </a:solidFill>
                       <a:prstDash val="solid"/>
                     </a:lnB>
                     <a:solidFill>
-                      <a:srgbClr val="2A476F"/>
+                      <a:srgbClr val="4981D0"/>
                     </a:solidFill>
                   </a:tcPr>
                 </a:tc>
@@ -4825,30 +4825,30 @@
                   <a:tcPr anchor="ctr" marL="73152" marR="73152">
                     <a:lnL w="9525" cap="flat" cmpd="sng" algn="ctr">
                       <a:solidFill>
-                        <a:srgbClr val="2A476F"/>
+                        <a:srgbClr val="4981D0"/>
                       </a:solidFill>
                       <a:prstDash val="solid"/>
                     </a:lnL>
                     <a:lnR w="9525" cap="flat" cmpd="sng" algn="ctr">
                       <a:solidFill>
-                        <a:srgbClr val="2A476F"/>
+                        <a:srgbClr val="4981D0"/>
                       </a:solidFill>
                       <a:prstDash val="solid"/>
                     </a:lnR>
                     <a:lnT w="9525" cap="flat" cmpd="sng" algn="ctr">
                       <a:solidFill>
-                        <a:srgbClr val="2A476F"/>
+                        <a:srgbClr val="4981D0"/>
                       </a:solidFill>
                       <a:prstDash val="solid"/>
                     </a:lnT>
                     <a:lnB w="9525" cap="flat" cmpd="sng" algn="ctr">
                       <a:solidFill>
-                        <a:srgbClr val="2A476F"/>
+                        <a:srgbClr val="4981D0"/>
                       </a:solidFill>
                       <a:prstDash val="solid"/>
                     </a:lnB>
                     <a:solidFill>
-                      <a:srgbClr val="2A476F"/>
+                      <a:srgbClr val="4981D0"/>
                     </a:solidFill>
                   </a:tcPr>
                 </a:tc>
@@ -4873,25 +4873,25 @@
                   <a:tcPr anchor="ctr" marL="73152" marR="73152">
                     <a:lnL w="9525" cap="flat" cmpd="sng" algn="ctr">
                       <a:solidFill>
-                        <a:srgbClr val="D1DEF0"/>
+                        <a:srgbClr val="D4E3F7"/>
                       </a:solidFill>
                       <a:prstDash val="solid"/>
                     </a:lnL>
                     <a:lnR w="9525" cap="flat" cmpd="sng" algn="ctr">
                       <a:solidFill>
-                        <a:srgbClr val="D1DEF0"/>
+                        <a:srgbClr val="D4E3F7"/>
                       </a:solidFill>
                       <a:prstDash val="solid"/>
                     </a:lnR>
                     <a:lnT w="9525" cap="flat" cmpd="sng" algn="ctr">
                       <a:solidFill>
-                        <a:srgbClr val="D1DEF0"/>
+                        <a:srgbClr val="D4E3F7"/>
                       </a:solidFill>
                       <a:prstDash val="solid"/>
                     </a:lnT>
                     <a:lnB w="9525" cap="flat" cmpd="sng" algn="ctr">
                       <a:solidFill>
-                        <a:srgbClr val="D1DEF0"/>
+                        <a:srgbClr val="D4E3F7"/>
                       </a:solidFill>
                       <a:prstDash val="solid"/>
                     </a:lnB>
@@ -4919,25 +4919,25 @@
                   <a:tcPr anchor="ctr" marL="73152" marR="73152">
                     <a:lnL w="9525" cap="flat" cmpd="sng" algn="ctr">
                       <a:solidFill>
-                        <a:srgbClr val="D1DEF0"/>
+                        <a:srgbClr val="D4E3F7"/>
                       </a:solidFill>
                       <a:prstDash val="solid"/>
                     </a:lnL>
                     <a:lnR w="9525" cap="flat" cmpd="sng" algn="ctr">
                       <a:solidFill>
-                        <a:srgbClr val="D1DEF0"/>
+                        <a:srgbClr val="D4E3F7"/>
                       </a:solidFill>
                       <a:prstDash val="solid"/>
                     </a:lnR>
                     <a:lnT w="9525" cap="flat" cmpd="sng" algn="ctr">
                       <a:solidFill>
-                        <a:srgbClr val="D1DEF0"/>
+                        <a:srgbClr val="D4E3F7"/>
                       </a:solidFill>
                       <a:prstDash val="solid"/>
                     </a:lnT>
                     <a:lnB w="9525" cap="flat" cmpd="sng" algn="ctr">
                       <a:solidFill>
-                        <a:srgbClr val="D1DEF0"/>
+                        <a:srgbClr val="D4E3F7"/>
                       </a:solidFill>
                       <a:prstDash val="solid"/>
                     </a:lnB>
@@ -4965,25 +4965,25 @@
                   <a:tcPr anchor="ctr" marL="73152" marR="73152">
                     <a:lnL w="9525" cap="flat" cmpd="sng" algn="ctr">
                       <a:solidFill>
-                        <a:srgbClr val="D1DEF0"/>
+                        <a:srgbClr val="D4E3F7"/>
                       </a:solidFill>
                       <a:prstDash val="solid"/>
                     </a:lnL>
                     <a:lnR w="9525" cap="flat" cmpd="sng" algn="ctr">
                       <a:solidFill>
-                        <a:srgbClr val="D1DEF0"/>
+                        <a:srgbClr val="D4E3F7"/>
                       </a:solidFill>
                       <a:prstDash val="solid"/>
                     </a:lnR>
                     <a:lnT w="9525" cap="flat" cmpd="sng" algn="ctr">
                       <a:solidFill>
-                        <a:srgbClr val="D1DEF0"/>
+                        <a:srgbClr val="D4E3F7"/>
                       </a:solidFill>
                       <a:prstDash val="solid"/>
                     </a:lnT>
                     <a:lnB w="9525" cap="flat" cmpd="sng" algn="ctr">
                       <a:solidFill>
-                        <a:srgbClr val="D1DEF0"/>
+                        <a:srgbClr val="D4E3F7"/>
                       </a:solidFill>
                       <a:prstDash val="solid"/>
                     </a:lnB>
@@ -5011,25 +5011,25 @@
                   <a:tcPr anchor="ctr" marL="73152" marR="73152">
                     <a:lnL w="9525" cap="flat" cmpd="sng" algn="ctr">
                       <a:solidFill>
-                        <a:srgbClr val="D1DEF0"/>
+                        <a:srgbClr val="D4E3F7"/>
                       </a:solidFill>
                       <a:prstDash val="solid"/>
                     </a:lnL>
                     <a:lnR w="9525" cap="flat" cmpd="sng" algn="ctr">
                       <a:solidFill>
-                        <a:srgbClr val="D1DEF0"/>
+                        <a:srgbClr val="D4E3F7"/>
                       </a:solidFill>
                       <a:prstDash val="solid"/>
                     </a:lnR>
                     <a:lnT w="9525" cap="flat" cmpd="sng" algn="ctr">
                       <a:solidFill>
-                        <a:srgbClr val="D1DEF0"/>
+                        <a:srgbClr val="D4E3F7"/>
                       </a:solidFill>
                       <a:prstDash val="solid"/>
                     </a:lnT>
                     <a:lnB w="9525" cap="flat" cmpd="sng" algn="ctr">
                       <a:solidFill>
-                        <a:srgbClr val="D1DEF0"/>
+                        <a:srgbClr val="D4E3F7"/>
                       </a:solidFill>
                       <a:prstDash val="solid"/>
                     </a:lnB>
@@ -5057,25 +5057,25 @@
                   <a:tcPr anchor="ctr" marL="73152" marR="73152">
                     <a:lnL w="9525" cap="flat" cmpd="sng" algn="ctr">
                       <a:solidFill>
-                        <a:srgbClr val="D1DEF0"/>
+                        <a:srgbClr val="D4E3F7"/>
                       </a:solidFill>
                       <a:prstDash val="solid"/>
                     </a:lnL>
                     <a:lnR w="9525" cap="flat" cmpd="sng" algn="ctr">
                       <a:solidFill>
-                        <a:srgbClr val="D1DEF0"/>
+                        <a:srgbClr val="D4E3F7"/>
                       </a:solidFill>
                       <a:prstDash val="solid"/>
                     </a:lnR>
                     <a:lnT w="9525" cap="flat" cmpd="sng" algn="ctr">
                       <a:solidFill>
-                        <a:srgbClr val="D1DEF0"/>
+                        <a:srgbClr val="D4E3F7"/>
                       </a:solidFill>
                       <a:prstDash val="solid"/>
                     </a:lnT>
                     <a:lnB w="9525" cap="flat" cmpd="sng" algn="ctr">
                       <a:solidFill>
-                        <a:srgbClr val="D1DEF0"/>
+                        <a:srgbClr val="D4E3F7"/>
                       </a:solidFill>
                       <a:prstDash val="solid"/>
                     </a:lnB>
@@ -5105,30 +5105,30 @@
                   <a:tcPr anchor="ctr" marL="73152" marR="73152">
                     <a:lnL w="9525" cap="flat" cmpd="sng" algn="ctr">
                       <a:solidFill>
-                        <a:srgbClr val="D1DEF0"/>
+                        <a:srgbClr val="D4E3F7"/>
                       </a:solidFill>
                       <a:prstDash val="solid"/>
                     </a:lnL>
                     <a:lnR w="9525" cap="flat" cmpd="sng" algn="ctr">
                       <a:solidFill>
-                        <a:srgbClr val="D1DEF0"/>
+                        <a:srgbClr val="D4E3F7"/>
                       </a:solidFill>
                       <a:prstDash val="solid"/>
                     </a:lnR>
                     <a:lnT w="9525" cap="flat" cmpd="sng" algn="ctr">
                       <a:solidFill>
-                        <a:srgbClr val="D1DEF0"/>
+                        <a:srgbClr val="D4E3F7"/>
                       </a:solidFill>
                       <a:prstDash val="solid"/>
                     </a:lnT>
                     <a:lnB w="9525" cap="flat" cmpd="sng" algn="ctr">
                       <a:solidFill>
-                        <a:srgbClr val="D1DEF0"/>
+                        <a:srgbClr val="D4E3F7"/>
                       </a:solidFill>
                       <a:prstDash val="solid"/>
                     </a:lnB>
                     <a:solidFill>
-                      <a:srgbClr val="F0F4F9"/>
+                      <a:srgbClr val="F3F7FC"/>
                     </a:solidFill>
                   </a:tcPr>
                 </a:tc>
@@ -5151,30 +5151,30 @@
                   <a:tcPr anchor="ctr" marL="73152" marR="73152">
                     <a:lnL w="9525" cap="flat" cmpd="sng" algn="ctr">
                       <a:solidFill>
-                        <a:srgbClr val="D1DEF0"/>
+                        <a:srgbClr val="D4E3F7"/>
                       </a:solidFill>
                       <a:prstDash val="solid"/>
                     </a:lnL>
                     <a:lnR w="9525" cap="flat" cmpd="sng" algn="ctr">
                       <a:solidFill>
-                        <a:srgbClr val="D1DEF0"/>
+                        <a:srgbClr val="D4E3F7"/>
                       </a:solidFill>
                       <a:prstDash val="solid"/>
                     </a:lnR>
                     <a:lnT w="9525" cap="flat" cmpd="sng" algn="ctr">
                       <a:solidFill>
-                        <a:srgbClr val="D1DEF0"/>
+                        <a:srgbClr val="D4E3F7"/>
                       </a:solidFill>
                       <a:prstDash val="solid"/>
                     </a:lnT>
                     <a:lnB w="9525" cap="flat" cmpd="sng" algn="ctr">
                       <a:solidFill>
-                        <a:srgbClr val="D1DEF0"/>
+                        <a:srgbClr val="D4E3F7"/>
                       </a:solidFill>
                       <a:prstDash val="solid"/>
                     </a:lnB>
                     <a:solidFill>
-                      <a:srgbClr val="F0F4F9"/>
+                      <a:srgbClr val="F3F7FC"/>
                     </a:solidFill>
                   </a:tcPr>
                 </a:tc>
@@ -5197,30 +5197,30 @@
                   <a:tcPr anchor="ctr" marL="73152" marR="73152">
                     <a:lnL w="9525" cap="flat" cmpd="sng" algn="ctr">
                       <a:solidFill>
-                        <a:srgbClr val="D1DEF0"/>
+                        <a:srgbClr val="D4E3F7"/>
                       </a:solidFill>
                       <a:prstDash val="solid"/>
                     </a:lnL>
                     <a:lnR w="9525" cap="flat" cmpd="sng" algn="ctr">
                       <a:solidFill>
-                        <a:srgbClr val="D1DEF0"/>
+                        <a:srgbClr val="D4E3F7"/>
                       </a:solidFill>
                       <a:prstDash val="solid"/>
                     </a:lnR>
                     <a:lnT w="9525" cap="flat" cmpd="sng" algn="ctr">
                       <a:solidFill>
-                        <a:srgbClr val="D1DEF0"/>
+                        <a:srgbClr val="D4E3F7"/>
                       </a:solidFill>
                       <a:prstDash val="solid"/>
                     </a:lnT>
                     <a:lnB w="9525" cap="flat" cmpd="sng" algn="ctr">
                       <a:solidFill>
-                        <a:srgbClr val="D1DEF0"/>
+                        <a:srgbClr val="D4E3F7"/>
                       </a:solidFill>
                       <a:prstDash val="solid"/>
                     </a:lnB>
                     <a:solidFill>
-                      <a:srgbClr val="F0F4F9"/>
+                      <a:srgbClr val="F3F7FC"/>
                     </a:solidFill>
                   </a:tcPr>
                 </a:tc>
@@ -5243,30 +5243,30 @@
                   <a:tcPr anchor="ctr" marL="73152" marR="73152">
                     <a:lnL w="9525" cap="flat" cmpd="sng" algn="ctr">
                       <a:solidFill>
-                        <a:srgbClr val="D1DEF0"/>
+                        <a:srgbClr val="D4E3F7"/>
                       </a:solidFill>
                       <a:prstDash val="solid"/>
                     </a:lnL>
                     <a:lnR w="9525" cap="flat" cmpd="sng" algn="ctr">
                       <a:solidFill>
-                        <a:srgbClr val="D1DEF0"/>
+                        <a:srgbClr val="D4E3F7"/>
                       </a:solidFill>
                       <a:prstDash val="solid"/>
                     </a:lnR>
                     <a:lnT w="9525" cap="flat" cmpd="sng" algn="ctr">
                       <a:solidFill>
-                        <a:srgbClr val="D1DEF0"/>
+                        <a:srgbClr val="D4E3F7"/>
                       </a:solidFill>
                       <a:prstDash val="solid"/>
                     </a:lnT>
                     <a:lnB w="9525" cap="flat" cmpd="sng" algn="ctr">
                       <a:solidFill>
-                        <a:srgbClr val="D1DEF0"/>
+                        <a:srgbClr val="D4E3F7"/>
                       </a:solidFill>
                       <a:prstDash val="solid"/>
                     </a:lnB>
                     <a:solidFill>
-                      <a:srgbClr val="F0F4F9"/>
+                      <a:srgbClr val="F3F7FC"/>
                     </a:solidFill>
                   </a:tcPr>
                 </a:tc>
@@ -5289,30 +5289,30 @@
                   <a:tcPr anchor="ctr" marL="73152" marR="73152">
                     <a:lnL w="9525" cap="flat" cmpd="sng" algn="ctr">
                       <a:solidFill>
-                        <a:srgbClr val="D1DEF0"/>
+                        <a:srgbClr val="D4E3F7"/>
                       </a:solidFill>
                       <a:prstDash val="solid"/>
                     </a:lnL>
                     <a:lnR w="9525" cap="flat" cmpd="sng" algn="ctr">
                       <a:solidFill>
-                        <a:srgbClr val="D1DEF0"/>
+                        <a:srgbClr val="D4E3F7"/>
                       </a:solidFill>
                       <a:prstDash val="solid"/>
                     </a:lnR>
                     <a:lnT w="9525" cap="flat" cmpd="sng" algn="ctr">
                       <a:solidFill>
-                        <a:srgbClr val="D1DEF0"/>
+                        <a:srgbClr val="D4E3F7"/>
                       </a:solidFill>
                       <a:prstDash val="solid"/>
                     </a:lnT>
                     <a:lnB w="9525" cap="flat" cmpd="sng" algn="ctr">
                       <a:solidFill>
-                        <a:srgbClr val="D1DEF0"/>
+                        <a:srgbClr val="D4E3F7"/>
                       </a:solidFill>
                       <a:prstDash val="solid"/>
                     </a:lnB>
                     <a:solidFill>
-                      <a:srgbClr val="F0F4F9"/>
+                      <a:srgbClr val="F3F7FC"/>
                     </a:solidFill>
                   </a:tcPr>
                 </a:tc>
@@ -5337,25 +5337,25 @@
                   <a:tcPr anchor="ctr" marL="73152" marR="73152">
                     <a:lnL w="9525" cap="flat" cmpd="sng" algn="ctr">
                       <a:solidFill>
-                        <a:srgbClr val="D1DEF0"/>
+                        <a:srgbClr val="D4E3F7"/>
                       </a:solidFill>
                       <a:prstDash val="solid"/>
                     </a:lnL>
                     <a:lnR w="9525" cap="flat" cmpd="sng" algn="ctr">
                       <a:solidFill>
-                        <a:srgbClr val="D1DEF0"/>
+                        <a:srgbClr val="D4E3F7"/>
                       </a:solidFill>
                       <a:prstDash val="solid"/>
                     </a:lnR>
                     <a:lnT w="9525" cap="flat" cmpd="sng" algn="ctr">
                       <a:solidFill>
-                        <a:srgbClr val="D1DEF0"/>
+                        <a:srgbClr val="D4E3F7"/>
                       </a:solidFill>
                       <a:prstDash val="solid"/>
                     </a:lnT>
                     <a:lnB w="9525" cap="flat" cmpd="sng" algn="ctr">
                       <a:solidFill>
-                        <a:srgbClr val="D1DEF0"/>
+                        <a:srgbClr val="D4E3F7"/>
                       </a:solidFill>
                       <a:prstDash val="solid"/>
                     </a:lnB>
@@ -5383,25 +5383,25 @@
                   <a:tcPr anchor="ctr" marL="73152" marR="73152">
                     <a:lnL w="9525" cap="flat" cmpd="sng" algn="ctr">
                       <a:solidFill>
-                        <a:srgbClr val="D1DEF0"/>
+                        <a:srgbClr val="D4E3F7"/>
                       </a:solidFill>
                       <a:prstDash val="solid"/>
                     </a:lnL>
                     <a:lnR w="9525" cap="flat" cmpd="sng" algn="ctr">
                       <a:solidFill>
-                        <a:srgbClr val="D1DEF0"/>
+                        <a:srgbClr val="D4E3F7"/>
                       </a:solidFill>
                       <a:prstDash val="solid"/>
                     </a:lnR>
                     <a:lnT w="9525" cap="flat" cmpd="sng" algn="ctr">
                       <a:solidFill>
-                        <a:srgbClr val="D1DEF0"/>
+                        <a:srgbClr val="D4E3F7"/>
                       </a:solidFill>
                       <a:prstDash val="solid"/>
                     </a:lnT>
                     <a:lnB w="9525" cap="flat" cmpd="sng" algn="ctr">
                       <a:solidFill>
-                        <a:srgbClr val="D1DEF0"/>
+                        <a:srgbClr val="D4E3F7"/>
                       </a:solidFill>
                       <a:prstDash val="solid"/>
                     </a:lnB>
@@ -5429,25 +5429,25 @@
                   <a:tcPr anchor="ctr" marL="73152" marR="73152">
                     <a:lnL w="9525" cap="flat" cmpd="sng" algn="ctr">
                       <a:solidFill>
-                        <a:srgbClr val="D1DEF0"/>
+                        <a:srgbClr val="D4E3F7"/>
                       </a:solidFill>
                       <a:prstDash val="solid"/>
                     </a:lnL>
                     <a:lnR w="9525" cap="flat" cmpd="sng" algn="ctr">
                       <a:solidFill>
-                        <a:srgbClr val="D1DEF0"/>
+                        <a:srgbClr val="D4E3F7"/>
                       </a:solidFill>
                       <a:prstDash val="solid"/>
                     </a:lnR>
                     <a:lnT w="9525" cap="flat" cmpd="sng" algn="ctr">
                       <a:solidFill>
-                        <a:srgbClr val="D1DEF0"/>
+                        <a:srgbClr val="D4E3F7"/>
                       </a:solidFill>
                       <a:prstDash val="solid"/>
                     </a:lnT>
                     <a:lnB w="9525" cap="flat" cmpd="sng" algn="ctr">
                       <a:solidFill>
-                        <a:srgbClr val="D1DEF0"/>
+                        <a:srgbClr val="D4E3F7"/>
                       </a:solidFill>
                       <a:prstDash val="solid"/>
                     </a:lnB>
@@ -5475,25 +5475,25 @@
                   <a:tcPr anchor="ctr" marL="73152" marR="73152">
                     <a:lnL w="9525" cap="flat" cmpd="sng" algn="ctr">
                       <a:solidFill>
-                        <a:srgbClr val="D1DEF0"/>
+                        <a:srgbClr val="D4E3F7"/>
                       </a:solidFill>
                       <a:prstDash val="solid"/>
                     </a:lnL>
                     <a:lnR w="9525" cap="flat" cmpd="sng" algn="ctr">
                       <a:solidFill>
-                        <a:srgbClr val="D1DEF0"/>
+                        <a:srgbClr val="D4E3F7"/>
                       </a:solidFill>
                       <a:prstDash val="solid"/>
                     </a:lnR>
                     <a:lnT w="9525" cap="flat" cmpd="sng" algn="ctr">
                       <a:solidFill>
-                        <a:srgbClr val="D1DEF0"/>
+                        <a:srgbClr val="D4E3F7"/>
                       </a:solidFill>
                       <a:prstDash val="solid"/>
                     </a:lnT>
                     <a:lnB w="9525" cap="flat" cmpd="sng" algn="ctr">
                       <a:solidFill>
-                        <a:srgbClr val="D1DEF0"/>
+                        <a:srgbClr val="D4E3F7"/>
                       </a:solidFill>
                       <a:prstDash val="solid"/>
                     </a:lnB>
@@ -5521,25 +5521,25 @@
                   <a:tcPr anchor="ctr" marL="73152" marR="73152">
                     <a:lnL w="9525" cap="flat" cmpd="sng" algn="ctr">
                       <a:solidFill>
-                        <a:srgbClr val="D1DEF0"/>
+                        <a:srgbClr val="D4E3F7"/>
                       </a:solidFill>
                       <a:prstDash val="solid"/>
                     </a:lnL>
                     <a:lnR w="9525" cap="flat" cmpd="sng" algn="ctr">
                       <a:solidFill>
-                        <a:srgbClr val="D1DEF0"/>
+                        <a:srgbClr val="D4E3F7"/>
                       </a:solidFill>
                       <a:prstDash val="solid"/>
                     </a:lnR>
                     <a:lnT w="9525" cap="flat" cmpd="sng" algn="ctr">
                       <a:solidFill>
-                        <a:srgbClr val="D1DEF0"/>
+                        <a:srgbClr val="D4E3F7"/>
                       </a:solidFill>
                       <a:prstDash val="solid"/>
                     </a:lnT>
                     <a:lnB w="9525" cap="flat" cmpd="sng" algn="ctr">
                       <a:solidFill>
-                        <a:srgbClr val="D1DEF0"/>
+                        <a:srgbClr val="D4E3F7"/>
                       </a:solidFill>
                       <a:prstDash val="solid"/>
                     </a:lnB>
@@ -5569,30 +5569,30 @@
                   <a:tcPr anchor="ctr" marL="73152" marR="73152">
                     <a:lnL w="9525" cap="flat" cmpd="sng" algn="ctr">
                       <a:solidFill>
-                        <a:srgbClr val="D1DEF0"/>
+                        <a:srgbClr val="D4E3F7"/>
                       </a:solidFill>
                       <a:prstDash val="solid"/>
                     </a:lnL>
                     <a:lnR w="9525" cap="flat" cmpd="sng" algn="ctr">
                       <a:solidFill>
-                        <a:srgbClr val="D1DEF0"/>
+                        <a:srgbClr val="D4E3F7"/>
                       </a:solidFill>
                       <a:prstDash val="solid"/>
                     </a:lnR>
                     <a:lnT w="9525" cap="flat" cmpd="sng" algn="ctr">
                       <a:solidFill>
-                        <a:srgbClr val="D1DEF0"/>
+                        <a:srgbClr val="D4E3F7"/>
                       </a:solidFill>
                       <a:prstDash val="solid"/>
                     </a:lnT>
                     <a:lnB w="9525" cap="flat" cmpd="sng" algn="ctr">
                       <a:solidFill>
-                        <a:srgbClr val="D1DEF0"/>
+                        <a:srgbClr val="D4E3F7"/>
                       </a:solidFill>
                       <a:prstDash val="solid"/>
                     </a:lnB>
                     <a:solidFill>
-                      <a:srgbClr val="F0F4F9"/>
+                      <a:srgbClr val="F3F7FC"/>
                     </a:solidFill>
                   </a:tcPr>
                 </a:tc>
@@ -5615,30 +5615,30 @@
                   <a:tcPr anchor="ctr" marL="73152" marR="73152">
                     <a:lnL w="9525" cap="flat" cmpd="sng" algn="ctr">
                       <a:solidFill>
-                        <a:srgbClr val="D1DEF0"/>
+                        <a:srgbClr val="D4E3F7"/>
                       </a:solidFill>
                       <a:prstDash val="solid"/>
                     </a:lnL>
                     <a:lnR w="9525" cap="flat" cmpd="sng" algn="ctr">
                       <a:solidFill>
-                        <a:srgbClr val="D1DEF0"/>
+                        <a:srgbClr val="D4E3F7"/>
                       </a:solidFill>
                       <a:prstDash val="solid"/>
                     </a:lnR>
                     <a:lnT w="9525" cap="flat" cmpd="sng" algn="ctr">
                       <a:solidFill>
-                        <a:srgbClr val="D1DEF0"/>
+                        <a:srgbClr val="D4E3F7"/>
                       </a:solidFill>
                       <a:prstDash val="solid"/>
                     </a:lnT>
                     <a:lnB w="9525" cap="flat" cmpd="sng" algn="ctr">
                       <a:solidFill>
-                        <a:srgbClr val="D1DEF0"/>
+                        <a:srgbClr val="D4E3F7"/>
                       </a:solidFill>
                       <a:prstDash val="solid"/>
                     </a:lnB>
                     <a:solidFill>
-                      <a:srgbClr val="F0F4F9"/>
+                      <a:srgbClr val="F3F7FC"/>
                     </a:solidFill>
                   </a:tcPr>
                 </a:tc>
@@ -5661,30 +5661,30 @@
                   <a:tcPr anchor="ctr" marL="73152" marR="73152">
                     <a:lnL w="9525" cap="flat" cmpd="sng" algn="ctr">
                       <a:solidFill>
-                        <a:srgbClr val="D1DEF0"/>
+                        <a:srgbClr val="D4E3F7"/>
                       </a:solidFill>
                       <a:prstDash val="solid"/>
                     </a:lnL>
                     <a:lnR w="9525" cap="flat" cmpd="sng" algn="ctr">
                       <a:solidFill>
-                        <a:srgbClr val="D1DEF0"/>
+                        <a:srgbClr val="D4E3F7"/>
                       </a:solidFill>
                       <a:prstDash val="solid"/>
                     </a:lnR>
                     <a:lnT w="9525" cap="flat" cmpd="sng" algn="ctr">
                       <a:solidFill>
-                        <a:srgbClr val="D1DEF0"/>
+                        <a:srgbClr val="D4E3F7"/>
                       </a:solidFill>
                       <a:prstDash val="solid"/>
                     </a:lnT>
                     <a:lnB w="9525" cap="flat" cmpd="sng" algn="ctr">
                       <a:solidFill>
-                        <a:srgbClr val="D1DEF0"/>
+                        <a:srgbClr val="D4E3F7"/>
                       </a:solidFill>
                       <a:prstDash val="solid"/>
                     </a:lnB>
                     <a:solidFill>
-                      <a:srgbClr val="F0F4F9"/>
+                      <a:srgbClr val="F3F7FC"/>
                     </a:solidFill>
                   </a:tcPr>
                 </a:tc>
@@ -5707,30 +5707,30 @@
                   <a:tcPr anchor="ctr" marL="73152" marR="73152">
                     <a:lnL w="9525" cap="flat" cmpd="sng" algn="ctr">
                       <a:solidFill>
-                        <a:srgbClr val="D1DEF0"/>
+                        <a:srgbClr val="D4E3F7"/>
                       </a:solidFill>
                       <a:prstDash val="solid"/>
                     </a:lnL>
                     <a:lnR w="9525" cap="flat" cmpd="sng" algn="ctr">
                       <a:solidFill>
-                        <a:srgbClr val="D1DEF0"/>
+                        <a:srgbClr val="D4E3F7"/>
                       </a:solidFill>
                       <a:prstDash val="solid"/>
                     </a:lnR>
                     <a:lnT w="9525" cap="flat" cmpd="sng" algn="ctr">
                       <a:solidFill>
-                        <a:srgbClr val="D1DEF0"/>
+                        <a:srgbClr val="D4E3F7"/>
                       </a:solidFill>
                       <a:prstDash val="solid"/>
                     </a:lnT>
                     <a:lnB w="9525" cap="flat" cmpd="sng" algn="ctr">
                       <a:solidFill>
-                        <a:srgbClr val="D1DEF0"/>
+                        <a:srgbClr val="D4E3F7"/>
                       </a:solidFill>
                       <a:prstDash val="solid"/>
                     </a:lnB>
                     <a:solidFill>
-                      <a:srgbClr val="F0F4F9"/>
+                      <a:srgbClr val="F3F7FC"/>
                     </a:solidFill>
                   </a:tcPr>
                 </a:tc>
@@ -5753,30 +5753,30 @@
                   <a:tcPr anchor="ctr" marL="73152" marR="73152">
                     <a:lnL w="9525" cap="flat" cmpd="sng" algn="ctr">
                       <a:solidFill>
-                        <a:srgbClr val="D1DEF0"/>
+                        <a:srgbClr val="D4E3F7"/>
                       </a:solidFill>
                       <a:prstDash val="solid"/>
                     </a:lnL>
                     <a:lnR w="9525" cap="flat" cmpd="sng" algn="ctr">
                       <a:solidFill>
-                        <a:srgbClr val="D1DEF0"/>
+                        <a:srgbClr val="D4E3F7"/>
                       </a:solidFill>
                       <a:prstDash val="solid"/>
                     </a:lnR>
                     <a:lnT w="9525" cap="flat" cmpd="sng" algn="ctr">
                       <a:solidFill>
-                        <a:srgbClr val="D1DEF0"/>
+                        <a:srgbClr val="D4E3F7"/>
                       </a:solidFill>
                       <a:prstDash val="solid"/>
                     </a:lnT>
                     <a:lnB w="9525" cap="flat" cmpd="sng" algn="ctr">
                       <a:solidFill>
-                        <a:srgbClr val="D1DEF0"/>
+                        <a:srgbClr val="D4E3F7"/>
                       </a:solidFill>
                       <a:prstDash val="solid"/>
                     </a:lnB>
                     <a:solidFill>
-                      <a:srgbClr val="F0F4F9"/>
+                      <a:srgbClr val="F3F7FC"/>
                     </a:solidFill>
                   </a:tcPr>
                 </a:tc>
@@ -5801,25 +5801,25 @@
                   <a:tcPr anchor="ctr" marL="73152" marR="73152">
                     <a:lnL w="9525" cap="flat" cmpd="sng" algn="ctr">
                       <a:solidFill>
-                        <a:srgbClr val="D1DEF0"/>
+                        <a:srgbClr val="D4E3F7"/>
                       </a:solidFill>
                       <a:prstDash val="solid"/>
                     </a:lnL>
                     <a:lnR w="9525" cap="flat" cmpd="sng" algn="ctr">
                       <a:solidFill>
-                        <a:srgbClr val="D1DEF0"/>
+                        <a:srgbClr val="D4E3F7"/>
                       </a:solidFill>
                       <a:prstDash val="solid"/>
                     </a:lnR>
                     <a:lnT w="9525" cap="flat" cmpd="sng" algn="ctr">
                       <a:solidFill>
-                        <a:srgbClr val="D1DEF0"/>
+                        <a:srgbClr val="D4E3F7"/>
                       </a:solidFill>
                       <a:prstDash val="solid"/>
                     </a:lnT>
                     <a:lnB w="9525" cap="flat" cmpd="sng" algn="ctr">
                       <a:solidFill>
-                        <a:srgbClr val="D1DEF0"/>
+                        <a:srgbClr val="D4E3F7"/>
                       </a:solidFill>
                       <a:prstDash val="solid"/>
                     </a:lnB>
@@ -5847,25 +5847,25 @@
                   <a:tcPr anchor="ctr" marL="73152" marR="73152">
                     <a:lnL w="9525" cap="flat" cmpd="sng" algn="ctr">
                       <a:solidFill>
-                        <a:srgbClr val="D1DEF0"/>
+                        <a:srgbClr val="D4E3F7"/>
                       </a:solidFill>
                       <a:prstDash val="solid"/>
                     </a:lnL>
                     <a:lnR w="9525" cap="flat" cmpd="sng" algn="ctr">
                       <a:solidFill>
-                        <a:srgbClr val="D1DEF0"/>
+                        <a:srgbClr val="D4E3F7"/>
                       </a:solidFill>
                       <a:prstDash val="solid"/>
                     </a:lnR>
                     <a:lnT w="9525" cap="flat" cmpd="sng" algn="ctr">
                       <a:solidFill>
-                        <a:srgbClr val="D1DEF0"/>
+                        <a:srgbClr val="D4E3F7"/>
                       </a:solidFill>
                       <a:prstDash val="solid"/>
                     </a:lnT>
                     <a:lnB w="9525" cap="flat" cmpd="sng" algn="ctr">
                       <a:solidFill>
-                        <a:srgbClr val="D1DEF0"/>
+                        <a:srgbClr val="D4E3F7"/>
                       </a:solidFill>
                       <a:prstDash val="solid"/>
                     </a:lnB>
@@ -5893,25 +5893,25 @@
                   <a:tcPr anchor="ctr" marL="73152" marR="73152">
                     <a:lnL w="9525" cap="flat" cmpd="sng" algn="ctr">
                       <a:solidFill>
-                        <a:srgbClr val="D1DEF0"/>
+                        <a:srgbClr val="D4E3F7"/>
                       </a:solidFill>
                       <a:prstDash val="solid"/>
                     </a:lnL>
                     <a:lnR w="9525" cap="flat" cmpd="sng" algn="ctr">
                       <a:solidFill>
-                        <a:srgbClr val="D1DEF0"/>
+                        <a:srgbClr val="D4E3F7"/>
                       </a:solidFill>
                       <a:prstDash val="solid"/>
                     </a:lnR>
                     <a:lnT w="9525" cap="flat" cmpd="sng" algn="ctr">
                       <a:solidFill>
-                        <a:srgbClr val="D1DEF0"/>
+                        <a:srgbClr val="D4E3F7"/>
                       </a:solidFill>
                       <a:prstDash val="solid"/>
                     </a:lnT>
                     <a:lnB w="9525" cap="flat" cmpd="sng" algn="ctr">
                       <a:solidFill>
-                        <a:srgbClr val="D1DEF0"/>
+                        <a:srgbClr val="D4E3F7"/>
                       </a:solidFill>
                       <a:prstDash val="solid"/>
                     </a:lnB>
@@ -5939,25 +5939,25 @@
                   <a:tcPr anchor="ctr" marL="73152" marR="73152">
                     <a:lnL w="9525" cap="flat" cmpd="sng" algn="ctr">
                       <a:solidFill>
-                        <a:srgbClr val="D1DEF0"/>
+                        <a:srgbClr val="D4E3F7"/>
                       </a:solidFill>
                       <a:prstDash val="solid"/>
                     </a:lnL>
                     <a:lnR w="9525" cap="flat" cmpd="sng" algn="ctr">
                       <a:solidFill>
-                        <a:srgbClr val="D1DEF0"/>
+                        <a:srgbClr val="D4E3F7"/>
                       </a:solidFill>
                       <a:prstDash val="solid"/>
                     </a:lnR>
                     <a:lnT w="9525" cap="flat" cmpd="sng" algn="ctr">
                       <a:solidFill>
-                        <a:srgbClr val="D1DEF0"/>
+                        <a:srgbClr val="D4E3F7"/>
                       </a:solidFill>
                       <a:prstDash val="solid"/>
                     </a:lnT>
                     <a:lnB w="9525" cap="flat" cmpd="sng" algn="ctr">
                       <a:solidFill>
-                        <a:srgbClr val="D1DEF0"/>
+                        <a:srgbClr val="D4E3F7"/>
                       </a:solidFill>
                       <a:prstDash val="solid"/>
                     </a:lnB>
@@ -5985,25 +5985,25 @@
                   <a:tcPr anchor="ctr" marL="73152" marR="73152">
                     <a:lnL w="9525" cap="flat" cmpd="sng" algn="ctr">
                       <a:solidFill>
-                        <a:srgbClr val="D1DEF0"/>
+                        <a:srgbClr val="D4E3F7"/>
                       </a:solidFill>
                       <a:prstDash val="solid"/>
                     </a:lnL>
                     <a:lnR w="9525" cap="flat" cmpd="sng" algn="ctr">
                       <a:solidFill>
-                        <a:srgbClr val="D1DEF0"/>
+                        <a:srgbClr val="D4E3F7"/>
                       </a:solidFill>
                       <a:prstDash val="solid"/>
                     </a:lnR>
                     <a:lnT w="9525" cap="flat" cmpd="sng" algn="ctr">
                       <a:solidFill>
-                        <a:srgbClr val="D1DEF0"/>
+                        <a:srgbClr val="D4E3F7"/>
                       </a:solidFill>
                       <a:prstDash val="solid"/>
                     </a:lnT>
                     <a:lnB w="9525" cap="flat" cmpd="sng" algn="ctr">
                       <a:solidFill>
-                        <a:srgbClr val="D1DEF0"/>
+                        <a:srgbClr val="D4E3F7"/>
                       </a:solidFill>
                       <a:prstDash val="solid"/>
                     </a:lnB>
@@ -6033,30 +6033,30 @@
                   <a:tcPr anchor="ctr" marL="73152" marR="73152">
                     <a:lnL w="9525" cap="flat" cmpd="sng" algn="ctr">
                       <a:solidFill>
-                        <a:srgbClr val="D1DEF0"/>
+                        <a:srgbClr val="D4E3F7"/>
                       </a:solidFill>
                       <a:prstDash val="solid"/>
                     </a:lnL>
                     <a:lnR w="9525" cap="flat" cmpd="sng" algn="ctr">
                       <a:solidFill>
-                        <a:srgbClr val="D1DEF0"/>
+                        <a:srgbClr val="D4E3F7"/>
                       </a:solidFill>
                       <a:prstDash val="solid"/>
                     </a:lnR>
                     <a:lnT w="9525" cap="flat" cmpd="sng" algn="ctr">
                       <a:solidFill>
-                        <a:srgbClr val="D1DEF0"/>
+                        <a:srgbClr val="D4E3F7"/>
                       </a:solidFill>
                       <a:prstDash val="solid"/>
                     </a:lnT>
                     <a:lnB w="9525" cap="flat" cmpd="sng" algn="ctr">
                       <a:solidFill>
-                        <a:srgbClr val="D1DEF0"/>
+                        <a:srgbClr val="D4E3F7"/>
                       </a:solidFill>
                       <a:prstDash val="solid"/>
                     </a:lnB>
                     <a:solidFill>
-                      <a:srgbClr val="F0F4F9"/>
+                      <a:srgbClr val="F3F7FC"/>
                     </a:solidFill>
                   </a:tcPr>
                 </a:tc>
@@ -6079,30 +6079,30 @@
                   <a:tcPr anchor="ctr" marL="73152" marR="73152">
                     <a:lnL w="9525" cap="flat" cmpd="sng" algn="ctr">
                       <a:solidFill>
-                        <a:srgbClr val="D1DEF0"/>
+                        <a:srgbClr val="D4E3F7"/>
                       </a:solidFill>
                       <a:prstDash val="solid"/>
                     </a:lnL>
                     <a:lnR w="9525" cap="flat" cmpd="sng" algn="ctr">
                       <a:solidFill>
-                        <a:srgbClr val="D1DEF0"/>
+                        <a:srgbClr val="D4E3F7"/>
                       </a:solidFill>
                       <a:prstDash val="solid"/>
                     </a:lnR>
                     <a:lnT w="9525" cap="flat" cmpd="sng" algn="ctr">
                       <a:solidFill>
-                        <a:srgbClr val="D1DEF0"/>
+                        <a:srgbClr val="D4E3F7"/>
                       </a:solidFill>
                       <a:prstDash val="solid"/>
                     </a:lnT>
                     <a:lnB w="9525" cap="flat" cmpd="sng" algn="ctr">
                       <a:solidFill>
-                        <a:srgbClr val="D1DEF0"/>
+                        <a:srgbClr val="D4E3F7"/>
                       </a:solidFill>
                       <a:prstDash val="solid"/>
                     </a:lnB>
                     <a:solidFill>
-                      <a:srgbClr val="F0F4F9"/>
+                      <a:srgbClr val="F3F7FC"/>
                     </a:solidFill>
                   </a:tcPr>
                 </a:tc>
@@ -6125,30 +6125,30 @@
                   <a:tcPr anchor="ctr" marL="73152" marR="73152">
                     <a:lnL w="9525" cap="flat" cmpd="sng" algn="ctr">
                       <a:solidFill>
-                        <a:srgbClr val="D1DEF0"/>
+                        <a:srgbClr val="D4E3F7"/>
                       </a:solidFill>
                       <a:prstDash val="solid"/>
                     </a:lnL>
                     <a:lnR w="9525" cap="flat" cmpd="sng" algn="ctr">
                       <a:solidFill>
-                        <a:srgbClr val="D1DEF0"/>
+                        <a:srgbClr val="D4E3F7"/>
                       </a:solidFill>
                       <a:prstDash val="solid"/>
                     </a:lnR>
                     <a:lnT w="9525" cap="flat" cmpd="sng" algn="ctr">
                       <a:solidFill>
-                        <a:srgbClr val="D1DEF0"/>
+                        <a:srgbClr val="D4E3F7"/>
                       </a:solidFill>
                       <a:prstDash val="solid"/>
                     </a:lnT>
                     <a:lnB w="9525" cap="flat" cmpd="sng" algn="ctr">
                       <a:solidFill>
-                        <a:srgbClr val="D1DEF0"/>
+                        <a:srgbClr val="D4E3F7"/>
                       </a:solidFill>
                       <a:prstDash val="solid"/>
                     </a:lnB>
                     <a:solidFill>
-                      <a:srgbClr val="F0F4F9"/>
+                      <a:srgbClr val="F3F7FC"/>
                     </a:solidFill>
                   </a:tcPr>
                 </a:tc>
@@ -6171,30 +6171,30 @@
                   <a:tcPr anchor="ctr" marL="73152" marR="73152">
                     <a:lnL w="9525" cap="flat" cmpd="sng" algn="ctr">
                       <a:solidFill>
-                        <a:srgbClr val="D1DEF0"/>
+                        <a:srgbClr val="D4E3F7"/>
                       </a:solidFill>
                       <a:prstDash val="solid"/>
                     </a:lnL>
                     <a:lnR w="9525" cap="flat" cmpd="sng" algn="ctr">
                       <a:solidFill>
-                        <a:srgbClr val="D1DEF0"/>
+                        <a:srgbClr val="D4E3F7"/>
                       </a:solidFill>
                       <a:prstDash val="solid"/>
                     </a:lnR>
                     <a:lnT w="9525" cap="flat" cmpd="sng" algn="ctr">
                       <a:solidFill>
-                        <a:srgbClr val="D1DEF0"/>
+                        <a:srgbClr val="D4E3F7"/>
                       </a:solidFill>
                       <a:prstDash val="solid"/>
                     </a:lnT>
                     <a:lnB w="9525" cap="flat" cmpd="sng" algn="ctr">
                       <a:solidFill>
-                        <a:srgbClr val="D1DEF0"/>
+                        <a:srgbClr val="D4E3F7"/>
                       </a:solidFill>
                       <a:prstDash val="solid"/>
                     </a:lnB>
                     <a:solidFill>
-                      <a:srgbClr val="F0F4F9"/>
+                      <a:srgbClr val="F3F7FC"/>
                     </a:solidFill>
                   </a:tcPr>
                 </a:tc>
@@ -6217,30 +6217,30 @@
                   <a:tcPr anchor="ctr" marL="73152" marR="73152">
                     <a:lnL w="9525" cap="flat" cmpd="sng" algn="ctr">
                       <a:solidFill>
-                        <a:srgbClr val="D1DEF0"/>
+                        <a:srgbClr val="D4E3F7"/>
                       </a:solidFill>
                       <a:prstDash val="solid"/>
                     </a:lnL>
                     <a:lnR w="9525" cap="flat" cmpd="sng" algn="ctr">
                       <a:solidFill>
-                        <a:srgbClr val="D1DEF0"/>
+                        <a:srgbClr val="D4E3F7"/>
                       </a:solidFill>
                       <a:prstDash val="solid"/>
                     </a:lnR>
                     <a:lnT w="9525" cap="flat" cmpd="sng" algn="ctr">
                       <a:solidFill>
-                        <a:srgbClr val="D1DEF0"/>
+                        <a:srgbClr val="D4E3F7"/>
                       </a:solidFill>
                       <a:prstDash val="solid"/>
                     </a:lnT>
                     <a:lnB w="9525" cap="flat" cmpd="sng" algn="ctr">
                       <a:solidFill>
-                        <a:srgbClr val="D1DEF0"/>
+                        <a:srgbClr val="D4E3F7"/>
                       </a:solidFill>
                       <a:prstDash val="solid"/>
                     </a:lnB>
                     <a:solidFill>
-                      <a:srgbClr val="F0F4F9"/>
+                      <a:srgbClr val="F3F7FC"/>
                     </a:solidFill>
                   </a:tcPr>
                 </a:tc>
@@ -6263,7 +6263,7 @@
     <p:bg>
       <p:bgPr>
         <a:solidFill>
-          <a:srgbClr val="F0F4F9"/>
+          <a:srgbClr val="F3F7FC"/>
         </a:solidFill>
         <a:effectLst/>
       </p:bgPr>
@@ -6293,7 +6293,7 @@
             </a:avLst>
           </a:prstGeom>
           <a:solidFill>
-            <a:srgbClr val="D1DEF0"/>
+            <a:srgbClr val="D4E3F7"/>
           </a:solidFill>
           <a:ln>
             <a:noFill/>
@@ -6337,7 +6337,7 @@
             <a:r>
               <a:rPr sz="3000" b="1" i="0">
                 <a:solidFill>
-                  <a:srgbClr val="16263B"/>
+                  <a:srgbClr val="1D4072"/>
                 </a:solidFill>
               </a:rPr>
               <a:t>보장 항목 체크</a:t>
@@ -6389,30 +6389,30 @@
                   <a:tcPr anchor="ctr" marL="73152" marR="73152">
                     <a:lnL w="9525" cap="flat" cmpd="sng" algn="ctr">
                       <a:solidFill>
-                        <a:srgbClr val="2A476F"/>
+                        <a:srgbClr val="4981D0"/>
                       </a:solidFill>
                       <a:prstDash val="solid"/>
                     </a:lnL>
                     <a:lnR w="9525" cap="flat" cmpd="sng" algn="ctr">
                       <a:solidFill>
-                        <a:srgbClr val="2A476F"/>
+                        <a:srgbClr val="4981D0"/>
                       </a:solidFill>
                       <a:prstDash val="solid"/>
                     </a:lnR>
                     <a:lnT w="9525" cap="flat" cmpd="sng" algn="ctr">
                       <a:solidFill>
-                        <a:srgbClr val="2A476F"/>
+                        <a:srgbClr val="4981D0"/>
                       </a:solidFill>
                       <a:prstDash val="solid"/>
                     </a:lnT>
                     <a:lnB w="9525" cap="flat" cmpd="sng" algn="ctr">
                       <a:solidFill>
-                        <a:srgbClr val="2A476F"/>
+                        <a:srgbClr val="4981D0"/>
                       </a:solidFill>
                       <a:prstDash val="solid"/>
                     </a:lnB>
                     <a:solidFill>
-                      <a:srgbClr val="2A476F"/>
+                      <a:srgbClr val="4981D0"/>
                     </a:solidFill>
                   </a:tcPr>
                 </a:tc>
@@ -6435,30 +6435,30 @@
                   <a:tcPr anchor="ctr" marL="73152" marR="73152">
                     <a:lnL w="9525" cap="flat" cmpd="sng" algn="ctr">
                       <a:solidFill>
-                        <a:srgbClr val="2A476F"/>
+                        <a:srgbClr val="4981D0"/>
                       </a:solidFill>
                       <a:prstDash val="solid"/>
                     </a:lnL>
                     <a:lnR w="9525" cap="flat" cmpd="sng" algn="ctr">
                       <a:solidFill>
-                        <a:srgbClr val="2A476F"/>
+                        <a:srgbClr val="4981D0"/>
                       </a:solidFill>
                       <a:prstDash val="solid"/>
                     </a:lnR>
                     <a:lnT w="9525" cap="flat" cmpd="sng" algn="ctr">
                       <a:solidFill>
-                        <a:srgbClr val="2A476F"/>
+                        <a:srgbClr val="4981D0"/>
                       </a:solidFill>
                       <a:prstDash val="solid"/>
                     </a:lnT>
                     <a:lnB w="9525" cap="flat" cmpd="sng" algn="ctr">
                       <a:solidFill>
-                        <a:srgbClr val="2A476F"/>
+                        <a:srgbClr val="4981D0"/>
                       </a:solidFill>
                       <a:prstDash val="solid"/>
                     </a:lnB>
                     <a:solidFill>
-                      <a:srgbClr val="2A476F"/>
+                      <a:srgbClr val="4981D0"/>
                     </a:solidFill>
                   </a:tcPr>
                 </a:tc>
@@ -6481,30 +6481,30 @@
                   <a:tcPr anchor="ctr" marL="73152" marR="73152">
                     <a:lnL w="9525" cap="flat" cmpd="sng" algn="ctr">
                       <a:solidFill>
-                        <a:srgbClr val="2A476F"/>
+                        <a:srgbClr val="4981D0"/>
                       </a:solidFill>
                       <a:prstDash val="solid"/>
                     </a:lnL>
                     <a:lnR w="9525" cap="flat" cmpd="sng" algn="ctr">
                       <a:solidFill>
-                        <a:srgbClr val="2A476F"/>
+                        <a:srgbClr val="4981D0"/>
                       </a:solidFill>
                       <a:prstDash val="solid"/>
                     </a:lnR>
                     <a:lnT w="9525" cap="flat" cmpd="sng" algn="ctr">
                       <a:solidFill>
-                        <a:srgbClr val="2A476F"/>
+                        <a:srgbClr val="4981D0"/>
                       </a:solidFill>
                       <a:prstDash val="solid"/>
                     </a:lnT>
                     <a:lnB w="9525" cap="flat" cmpd="sng" algn="ctr">
                       <a:solidFill>
-                        <a:srgbClr val="2A476F"/>
+                        <a:srgbClr val="4981D0"/>
                       </a:solidFill>
                       <a:prstDash val="solid"/>
                     </a:lnB>
                     <a:solidFill>
-                      <a:srgbClr val="2A476F"/>
+                      <a:srgbClr val="4981D0"/>
                     </a:solidFill>
                   </a:tcPr>
                 </a:tc>
@@ -6527,30 +6527,30 @@
                   <a:tcPr anchor="ctr" marL="73152" marR="73152">
                     <a:lnL w="9525" cap="flat" cmpd="sng" algn="ctr">
                       <a:solidFill>
-                        <a:srgbClr val="2A476F"/>
+                        <a:srgbClr val="4981D0"/>
                       </a:solidFill>
                       <a:prstDash val="solid"/>
                     </a:lnL>
                     <a:lnR w="9525" cap="flat" cmpd="sng" algn="ctr">
                       <a:solidFill>
-                        <a:srgbClr val="2A476F"/>
+                        <a:srgbClr val="4981D0"/>
                       </a:solidFill>
                       <a:prstDash val="solid"/>
                     </a:lnR>
                     <a:lnT w="9525" cap="flat" cmpd="sng" algn="ctr">
                       <a:solidFill>
-                        <a:srgbClr val="2A476F"/>
+                        <a:srgbClr val="4981D0"/>
                       </a:solidFill>
                       <a:prstDash val="solid"/>
                     </a:lnT>
                     <a:lnB w="9525" cap="flat" cmpd="sng" algn="ctr">
                       <a:solidFill>
-                        <a:srgbClr val="2A476F"/>
+                        <a:srgbClr val="4981D0"/>
                       </a:solidFill>
                       <a:prstDash val="solid"/>
                     </a:lnB>
                     <a:solidFill>
-                      <a:srgbClr val="2A476F"/>
+                      <a:srgbClr val="4981D0"/>
                     </a:solidFill>
                   </a:tcPr>
                 </a:tc>
@@ -6565,7 +6565,7 @@
                       <a:r>
                         <a:rPr sz="1400" b="1">
                           <a:solidFill>
-                            <a:srgbClr val="16263B"/>
+                            <a:srgbClr val="1D4072"/>
                           </a:solidFill>
                         </a:rPr>
                         <a:t>사망·재해</a:t>
@@ -6575,30 +6575,30 @@
                   <a:tcPr anchor="ctr" marL="73152" marR="73152">
                     <a:lnL w="9525" cap="flat" cmpd="sng" algn="ctr">
                       <a:solidFill>
-                        <a:srgbClr val="D1DEF0"/>
+                        <a:srgbClr val="D4E3F7"/>
                       </a:solidFill>
                       <a:prstDash val="solid"/>
                     </a:lnL>
                     <a:lnR w="9525" cap="flat" cmpd="sng" algn="ctr">
                       <a:solidFill>
-                        <a:srgbClr val="D1DEF0"/>
+                        <a:srgbClr val="D4E3F7"/>
                       </a:solidFill>
                       <a:prstDash val="solid"/>
                     </a:lnR>
                     <a:lnT w="9525" cap="flat" cmpd="sng" algn="ctr">
                       <a:solidFill>
-                        <a:srgbClr val="D1DEF0"/>
+                        <a:srgbClr val="D4E3F7"/>
                       </a:solidFill>
                       <a:prstDash val="solid"/>
                     </a:lnT>
                     <a:lnB w="9525" cap="flat" cmpd="sng" algn="ctr">
                       <a:solidFill>
-                        <a:srgbClr val="D1DEF0"/>
+                        <a:srgbClr val="D4E3F7"/>
                       </a:solidFill>
                       <a:prstDash val="solid"/>
                     </a:lnB>
                     <a:solidFill>
-                      <a:srgbClr val="D1DEF0"/>
+                      <a:srgbClr val="D4E3F7"/>
                     </a:solidFill>
                   </a:tcPr>
                 </a:tc>
@@ -6621,25 +6621,25 @@
                   <a:tcPr anchor="ctr" marL="73152" marR="73152">
                     <a:lnL w="9525" cap="flat" cmpd="sng" algn="ctr">
                       <a:solidFill>
-                        <a:srgbClr val="D1DEF0"/>
+                        <a:srgbClr val="D4E3F7"/>
                       </a:solidFill>
                       <a:prstDash val="solid"/>
                     </a:lnL>
                     <a:lnR w="9525" cap="flat" cmpd="sng" algn="ctr">
                       <a:solidFill>
-                        <a:srgbClr val="D1DEF0"/>
+                        <a:srgbClr val="D4E3F7"/>
                       </a:solidFill>
                       <a:prstDash val="solid"/>
                     </a:lnR>
                     <a:lnT w="9525" cap="flat" cmpd="sng" algn="ctr">
                       <a:solidFill>
-                        <a:srgbClr val="D1DEF0"/>
+                        <a:srgbClr val="D4E3F7"/>
                       </a:solidFill>
                       <a:prstDash val="solid"/>
                     </a:lnT>
                     <a:lnB w="9525" cap="flat" cmpd="sng" algn="ctr">
                       <a:solidFill>
-                        <a:srgbClr val="D1DEF0"/>
+                        <a:srgbClr val="D4E3F7"/>
                       </a:solidFill>
                       <a:prstDash val="solid"/>
                     </a:lnB>
@@ -6667,25 +6667,25 @@
                   <a:tcPr anchor="ctr" marL="73152" marR="73152">
                     <a:lnL w="9525" cap="flat" cmpd="sng" algn="ctr">
                       <a:solidFill>
-                        <a:srgbClr val="D1DEF0"/>
+                        <a:srgbClr val="D4E3F7"/>
                       </a:solidFill>
                       <a:prstDash val="solid"/>
                     </a:lnL>
                     <a:lnR w="9525" cap="flat" cmpd="sng" algn="ctr">
                       <a:solidFill>
-                        <a:srgbClr val="D1DEF0"/>
+                        <a:srgbClr val="D4E3F7"/>
                       </a:solidFill>
                       <a:prstDash val="solid"/>
                     </a:lnR>
                     <a:lnT w="9525" cap="flat" cmpd="sng" algn="ctr">
                       <a:solidFill>
-                        <a:srgbClr val="D1DEF0"/>
+                        <a:srgbClr val="D4E3F7"/>
                       </a:solidFill>
                       <a:prstDash val="solid"/>
                     </a:lnT>
                     <a:lnB w="9525" cap="flat" cmpd="sng" algn="ctr">
                       <a:solidFill>
-                        <a:srgbClr val="D1DEF0"/>
+                        <a:srgbClr val="D4E3F7"/>
                       </a:solidFill>
                       <a:prstDash val="solid"/>
                     </a:lnB>
@@ -6713,25 +6713,25 @@
                   <a:tcPr anchor="ctr" marL="73152" marR="73152">
                     <a:lnL w="9525" cap="flat" cmpd="sng" algn="ctr">
                       <a:solidFill>
-                        <a:srgbClr val="D1DEF0"/>
+                        <a:srgbClr val="D4E3F7"/>
                       </a:solidFill>
                       <a:prstDash val="solid"/>
                     </a:lnL>
                     <a:lnR w="9525" cap="flat" cmpd="sng" algn="ctr">
                       <a:solidFill>
-                        <a:srgbClr val="D1DEF0"/>
+                        <a:srgbClr val="D4E3F7"/>
                       </a:solidFill>
                       <a:prstDash val="solid"/>
                     </a:lnR>
                     <a:lnT w="9525" cap="flat" cmpd="sng" algn="ctr">
                       <a:solidFill>
-                        <a:srgbClr val="D1DEF0"/>
+                        <a:srgbClr val="D4E3F7"/>
                       </a:solidFill>
                       <a:prstDash val="solid"/>
                     </a:lnT>
                     <a:lnB w="9525" cap="flat" cmpd="sng" algn="ctr">
                       <a:solidFill>
-                        <a:srgbClr val="D1DEF0"/>
+                        <a:srgbClr val="D4E3F7"/>
                       </a:solidFill>
                       <a:prstDash val="solid"/>
                     </a:lnB>
@@ -6751,7 +6751,7 @@
                       <a:r>
                         <a:rPr sz="1400" b="1">
                           <a:solidFill>
-                            <a:srgbClr val="16263B"/>
+                            <a:srgbClr val="1D4072"/>
                           </a:solidFill>
                         </a:rPr>
                         <a:t>질병 진단</a:t>
@@ -6761,30 +6761,30 @@
                   <a:tcPr anchor="ctr" marL="73152" marR="73152">
                     <a:lnL w="9525" cap="flat" cmpd="sng" algn="ctr">
                       <a:solidFill>
-                        <a:srgbClr val="D1DEF0"/>
+                        <a:srgbClr val="D4E3F7"/>
                       </a:solidFill>
                       <a:prstDash val="solid"/>
                     </a:lnL>
                     <a:lnR w="9525" cap="flat" cmpd="sng" algn="ctr">
                       <a:solidFill>
-                        <a:srgbClr val="D1DEF0"/>
+                        <a:srgbClr val="D4E3F7"/>
                       </a:solidFill>
                       <a:prstDash val="solid"/>
                     </a:lnR>
                     <a:lnT w="9525" cap="flat" cmpd="sng" algn="ctr">
                       <a:solidFill>
-                        <a:srgbClr val="D1DEF0"/>
+                        <a:srgbClr val="D4E3F7"/>
                       </a:solidFill>
                       <a:prstDash val="solid"/>
                     </a:lnT>
                     <a:lnB w="9525" cap="flat" cmpd="sng" algn="ctr">
                       <a:solidFill>
-                        <a:srgbClr val="D1DEF0"/>
+                        <a:srgbClr val="D4E3F7"/>
                       </a:solidFill>
                       <a:prstDash val="solid"/>
                     </a:lnB>
                     <a:solidFill>
-                      <a:srgbClr val="D1DEF0"/>
+                      <a:srgbClr val="D4E3F7"/>
                     </a:solidFill>
                   </a:tcPr>
                 </a:tc>
@@ -6807,30 +6807,30 @@
                   <a:tcPr anchor="ctr" marL="73152" marR="73152">
                     <a:lnL w="9525" cap="flat" cmpd="sng" algn="ctr">
                       <a:solidFill>
-                        <a:srgbClr val="D1DEF0"/>
+                        <a:srgbClr val="D4E3F7"/>
                       </a:solidFill>
                       <a:prstDash val="solid"/>
                     </a:lnL>
                     <a:lnR w="9525" cap="flat" cmpd="sng" algn="ctr">
                       <a:solidFill>
-                        <a:srgbClr val="D1DEF0"/>
+                        <a:srgbClr val="D4E3F7"/>
                       </a:solidFill>
                       <a:prstDash val="solid"/>
                     </a:lnR>
                     <a:lnT w="9525" cap="flat" cmpd="sng" algn="ctr">
                       <a:solidFill>
-                        <a:srgbClr val="D1DEF0"/>
+                        <a:srgbClr val="D4E3F7"/>
                       </a:solidFill>
                       <a:prstDash val="solid"/>
                     </a:lnT>
                     <a:lnB w="9525" cap="flat" cmpd="sng" algn="ctr">
                       <a:solidFill>
-                        <a:srgbClr val="D1DEF0"/>
+                        <a:srgbClr val="D4E3F7"/>
                       </a:solidFill>
                       <a:prstDash val="solid"/>
                     </a:lnB>
                     <a:solidFill>
-                      <a:srgbClr val="F0F4F9"/>
+                      <a:srgbClr val="F3F7FC"/>
                     </a:solidFill>
                   </a:tcPr>
                 </a:tc>
@@ -6853,30 +6853,30 @@
                   <a:tcPr anchor="ctr" marL="73152" marR="73152">
                     <a:lnL w="9525" cap="flat" cmpd="sng" algn="ctr">
                       <a:solidFill>
-                        <a:srgbClr val="D1DEF0"/>
+                        <a:srgbClr val="D4E3F7"/>
                       </a:solidFill>
                       <a:prstDash val="solid"/>
                     </a:lnL>
                     <a:lnR w="9525" cap="flat" cmpd="sng" algn="ctr">
                       <a:solidFill>
-                        <a:srgbClr val="D1DEF0"/>
+                        <a:srgbClr val="D4E3F7"/>
                       </a:solidFill>
                       <a:prstDash val="solid"/>
                     </a:lnR>
                     <a:lnT w="9525" cap="flat" cmpd="sng" algn="ctr">
                       <a:solidFill>
-                        <a:srgbClr val="D1DEF0"/>
+                        <a:srgbClr val="D4E3F7"/>
                       </a:solidFill>
                       <a:prstDash val="solid"/>
                     </a:lnT>
                     <a:lnB w="9525" cap="flat" cmpd="sng" algn="ctr">
                       <a:solidFill>
-                        <a:srgbClr val="D1DEF0"/>
+                        <a:srgbClr val="D4E3F7"/>
                       </a:solidFill>
                       <a:prstDash val="solid"/>
                     </a:lnB>
                     <a:solidFill>
-                      <a:srgbClr val="F0F4F9"/>
+                      <a:srgbClr val="F3F7FC"/>
                     </a:solidFill>
                   </a:tcPr>
                 </a:tc>
@@ -6899,30 +6899,30 @@
                   <a:tcPr anchor="ctr" marL="73152" marR="73152">
                     <a:lnL w="9525" cap="flat" cmpd="sng" algn="ctr">
                       <a:solidFill>
-                        <a:srgbClr val="D1DEF0"/>
+                        <a:srgbClr val="D4E3F7"/>
                       </a:solidFill>
                       <a:prstDash val="solid"/>
                     </a:lnL>
                     <a:lnR w="9525" cap="flat" cmpd="sng" algn="ctr">
                       <a:solidFill>
-                        <a:srgbClr val="D1DEF0"/>
+                        <a:srgbClr val="D4E3F7"/>
                       </a:solidFill>
                       <a:prstDash val="solid"/>
                     </a:lnR>
                     <a:lnT w="9525" cap="flat" cmpd="sng" algn="ctr">
                       <a:solidFill>
-                        <a:srgbClr val="D1DEF0"/>
+                        <a:srgbClr val="D4E3F7"/>
                       </a:solidFill>
                       <a:prstDash val="solid"/>
                     </a:lnT>
                     <a:lnB w="9525" cap="flat" cmpd="sng" algn="ctr">
                       <a:solidFill>
-                        <a:srgbClr val="D1DEF0"/>
+                        <a:srgbClr val="D4E3F7"/>
                       </a:solidFill>
                       <a:prstDash val="solid"/>
                     </a:lnB>
                     <a:solidFill>
-                      <a:srgbClr val="F0F4F9"/>
+                      <a:srgbClr val="F3F7FC"/>
                     </a:solidFill>
                   </a:tcPr>
                 </a:tc>
@@ -6937,7 +6937,7 @@
                       <a:r>
                         <a:rPr sz="1400" b="1">
                           <a:solidFill>
-                            <a:srgbClr val="16263B"/>
+                            <a:srgbClr val="1D4072"/>
                           </a:solidFill>
                         </a:rPr>
                         <a:t>암</a:t>
@@ -6947,30 +6947,30 @@
                   <a:tcPr anchor="ctr" marL="73152" marR="73152">
                     <a:lnL w="9525" cap="flat" cmpd="sng" algn="ctr">
                       <a:solidFill>
-                        <a:srgbClr val="D1DEF0"/>
+                        <a:srgbClr val="D4E3F7"/>
                       </a:solidFill>
                       <a:prstDash val="solid"/>
                     </a:lnL>
                     <a:lnR w="9525" cap="flat" cmpd="sng" algn="ctr">
                       <a:solidFill>
-                        <a:srgbClr val="D1DEF0"/>
+                        <a:srgbClr val="D4E3F7"/>
                       </a:solidFill>
                       <a:prstDash val="solid"/>
                     </a:lnR>
                     <a:lnT w="9525" cap="flat" cmpd="sng" algn="ctr">
                       <a:solidFill>
-                        <a:srgbClr val="D1DEF0"/>
+                        <a:srgbClr val="D4E3F7"/>
                       </a:solidFill>
                       <a:prstDash val="solid"/>
                     </a:lnT>
                     <a:lnB w="9525" cap="flat" cmpd="sng" algn="ctr">
                       <a:solidFill>
-                        <a:srgbClr val="D1DEF0"/>
+                        <a:srgbClr val="D4E3F7"/>
                       </a:solidFill>
                       <a:prstDash val="solid"/>
                     </a:lnB>
                     <a:solidFill>
-                      <a:srgbClr val="D1DEF0"/>
+                      <a:srgbClr val="D4E3F7"/>
                     </a:solidFill>
                   </a:tcPr>
                 </a:tc>
@@ -6993,25 +6993,25 @@
                   <a:tcPr anchor="ctr" marL="73152" marR="73152">
                     <a:lnL w="9525" cap="flat" cmpd="sng" algn="ctr">
                       <a:solidFill>
-                        <a:srgbClr val="D1DEF0"/>
+                        <a:srgbClr val="D4E3F7"/>
                       </a:solidFill>
                       <a:prstDash val="solid"/>
                     </a:lnL>
                     <a:lnR w="9525" cap="flat" cmpd="sng" algn="ctr">
                       <a:solidFill>
-                        <a:srgbClr val="D1DEF0"/>
+                        <a:srgbClr val="D4E3F7"/>
                       </a:solidFill>
                       <a:prstDash val="solid"/>
                     </a:lnR>
                     <a:lnT w="9525" cap="flat" cmpd="sng" algn="ctr">
                       <a:solidFill>
-                        <a:srgbClr val="D1DEF0"/>
+                        <a:srgbClr val="D4E3F7"/>
                       </a:solidFill>
                       <a:prstDash val="solid"/>
                     </a:lnT>
                     <a:lnB w="9525" cap="flat" cmpd="sng" algn="ctr">
                       <a:solidFill>
-                        <a:srgbClr val="D1DEF0"/>
+                        <a:srgbClr val="D4E3F7"/>
                       </a:solidFill>
                       <a:prstDash val="solid"/>
                     </a:lnB>
@@ -7039,25 +7039,25 @@
                   <a:tcPr anchor="ctr" marL="73152" marR="73152">
                     <a:lnL w="9525" cap="flat" cmpd="sng" algn="ctr">
                       <a:solidFill>
-                        <a:srgbClr val="D1DEF0"/>
+                        <a:srgbClr val="D4E3F7"/>
                       </a:solidFill>
                       <a:prstDash val="solid"/>
                     </a:lnL>
                     <a:lnR w="9525" cap="flat" cmpd="sng" algn="ctr">
                       <a:solidFill>
-                        <a:srgbClr val="D1DEF0"/>
+                        <a:srgbClr val="D4E3F7"/>
                       </a:solidFill>
                       <a:prstDash val="solid"/>
                     </a:lnR>
                     <a:lnT w="9525" cap="flat" cmpd="sng" algn="ctr">
                       <a:solidFill>
-                        <a:srgbClr val="D1DEF0"/>
+                        <a:srgbClr val="D4E3F7"/>
                       </a:solidFill>
                       <a:prstDash val="solid"/>
                     </a:lnT>
                     <a:lnB w="9525" cap="flat" cmpd="sng" algn="ctr">
                       <a:solidFill>
-                        <a:srgbClr val="D1DEF0"/>
+                        <a:srgbClr val="D4E3F7"/>
                       </a:solidFill>
                       <a:prstDash val="solid"/>
                     </a:lnB>
@@ -7085,25 +7085,25 @@
                   <a:tcPr anchor="ctr" marL="73152" marR="73152">
                     <a:lnL w="9525" cap="flat" cmpd="sng" algn="ctr">
                       <a:solidFill>
-                        <a:srgbClr val="D1DEF0"/>
+                        <a:srgbClr val="D4E3F7"/>
                       </a:solidFill>
                       <a:prstDash val="solid"/>
                     </a:lnL>
                     <a:lnR w="9525" cap="flat" cmpd="sng" algn="ctr">
                       <a:solidFill>
-                        <a:srgbClr val="D1DEF0"/>
+                        <a:srgbClr val="D4E3F7"/>
                       </a:solidFill>
                       <a:prstDash val="solid"/>
                     </a:lnR>
                     <a:lnT w="9525" cap="flat" cmpd="sng" algn="ctr">
                       <a:solidFill>
-                        <a:srgbClr val="D1DEF0"/>
+                        <a:srgbClr val="D4E3F7"/>
                       </a:solidFill>
                       <a:prstDash val="solid"/>
                     </a:lnT>
                     <a:lnB w="9525" cap="flat" cmpd="sng" algn="ctr">
                       <a:solidFill>
-                        <a:srgbClr val="D1DEF0"/>
+                        <a:srgbClr val="D4E3F7"/>
                       </a:solidFill>
                       <a:prstDash val="solid"/>
                     </a:lnB>
@@ -7123,7 +7123,7 @@
                       <a:r>
                         <a:rPr sz="1400" b="1">
                           <a:solidFill>
-                            <a:srgbClr val="16263B"/>
+                            <a:srgbClr val="1D4072"/>
                           </a:solidFill>
                         </a:rPr>
                         <a:t>뇌·심장</a:t>
@@ -7133,30 +7133,30 @@
                   <a:tcPr anchor="ctr" marL="73152" marR="73152">
                     <a:lnL w="9525" cap="flat" cmpd="sng" algn="ctr">
                       <a:solidFill>
-                        <a:srgbClr val="D1DEF0"/>
+                        <a:srgbClr val="D4E3F7"/>
                       </a:solidFill>
                       <a:prstDash val="solid"/>
                     </a:lnL>
                     <a:lnR w="9525" cap="flat" cmpd="sng" algn="ctr">
                       <a:solidFill>
-                        <a:srgbClr val="D1DEF0"/>
+                        <a:srgbClr val="D4E3F7"/>
                       </a:solidFill>
                       <a:prstDash val="solid"/>
                     </a:lnR>
                     <a:lnT w="9525" cap="flat" cmpd="sng" algn="ctr">
                       <a:solidFill>
-                        <a:srgbClr val="D1DEF0"/>
+                        <a:srgbClr val="D4E3F7"/>
                       </a:solidFill>
                       <a:prstDash val="solid"/>
                     </a:lnT>
                     <a:lnB w="9525" cap="flat" cmpd="sng" algn="ctr">
                       <a:solidFill>
-                        <a:srgbClr val="D1DEF0"/>
+                        <a:srgbClr val="D4E3F7"/>
                       </a:solidFill>
                       <a:prstDash val="solid"/>
                     </a:lnB>
                     <a:solidFill>
-                      <a:srgbClr val="D1DEF0"/>
+                      <a:srgbClr val="D4E3F7"/>
                     </a:solidFill>
                   </a:tcPr>
                 </a:tc>
@@ -7179,30 +7179,30 @@
                   <a:tcPr anchor="ctr" marL="73152" marR="73152">
                     <a:lnL w="9525" cap="flat" cmpd="sng" algn="ctr">
                       <a:solidFill>
-                        <a:srgbClr val="D1DEF0"/>
+                        <a:srgbClr val="D4E3F7"/>
                       </a:solidFill>
                       <a:prstDash val="solid"/>
                     </a:lnL>
                     <a:lnR w="9525" cap="flat" cmpd="sng" algn="ctr">
                       <a:solidFill>
-                        <a:srgbClr val="D1DEF0"/>
+                        <a:srgbClr val="D4E3F7"/>
                       </a:solidFill>
                       <a:prstDash val="solid"/>
                     </a:lnR>
                     <a:lnT w="9525" cap="flat" cmpd="sng" algn="ctr">
                       <a:solidFill>
-                        <a:srgbClr val="D1DEF0"/>
+                        <a:srgbClr val="D4E3F7"/>
                       </a:solidFill>
                       <a:prstDash val="solid"/>
                     </a:lnT>
                     <a:lnB w="9525" cap="flat" cmpd="sng" algn="ctr">
                       <a:solidFill>
-                        <a:srgbClr val="D1DEF0"/>
+                        <a:srgbClr val="D4E3F7"/>
                       </a:solidFill>
                       <a:prstDash val="solid"/>
                     </a:lnB>
                     <a:solidFill>
-                      <a:srgbClr val="F0F4F9"/>
+                      <a:srgbClr val="F3F7FC"/>
                     </a:solidFill>
                   </a:tcPr>
                 </a:tc>
@@ -7225,30 +7225,30 @@
                   <a:tcPr anchor="ctr" marL="73152" marR="73152">
                     <a:lnL w="9525" cap="flat" cmpd="sng" algn="ctr">
                       <a:solidFill>
-                        <a:srgbClr val="D1DEF0"/>
+                        <a:srgbClr val="D4E3F7"/>
                       </a:solidFill>
                       <a:prstDash val="solid"/>
                     </a:lnL>
                     <a:lnR w="9525" cap="flat" cmpd="sng" algn="ctr">
                       <a:solidFill>
-                        <a:srgbClr val="D1DEF0"/>
+                        <a:srgbClr val="D4E3F7"/>
                       </a:solidFill>
                       <a:prstDash val="solid"/>
                     </a:lnR>
                     <a:lnT w="9525" cap="flat" cmpd="sng" algn="ctr">
                       <a:solidFill>
-                        <a:srgbClr val="D1DEF0"/>
+                        <a:srgbClr val="D4E3F7"/>
                       </a:solidFill>
                       <a:prstDash val="solid"/>
                     </a:lnT>
                     <a:lnB w="9525" cap="flat" cmpd="sng" algn="ctr">
                       <a:solidFill>
-                        <a:srgbClr val="D1DEF0"/>
+                        <a:srgbClr val="D4E3F7"/>
                       </a:solidFill>
                       <a:prstDash val="solid"/>
                     </a:lnB>
                     <a:solidFill>
-                      <a:srgbClr val="F0F4F9"/>
+                      <a:srgbClr val="F3F7FC"/>
                     </a:solidFill>
                   </a:tcPr>
                 </a:tc>
@@ -7271,30 +7271,30 @@
                   <a:tcPr anchor="ctr" marL="73152" marR="73152">
                     <a:lnL w="9525" cap="flat" cmpd="sng" algn="ctr">
                       <a:solidFill>
-                        <a:srgbClr val="D1DEF0"/>
+                        <a:srgbClr val="D4E3F7"/>
                       </a:solidFill>
                       <a:prstDash val="solid"/>
                     </a:lnL>
                     <a:lnR w="9525" cap="flat" cmpd="sng" algn="ctr">
                       <a:solidFill>
-                        <a:srgbClr val="D1DEF0"/>
+                        <a:srgbClr val="D4E3F7"/>
                       </a:solidFill>
                       <a:prstDash val="solid"/>
                     </a:lnR>
                     <a:lnT w="9525" cap="flat" cmpd="sng" algn="ctr">
                       <a:solidFill>
-                        <a:srgbClr val="D1DEF0"/>
+                        <a:srgbClr val="D4E3F7"/>
                       </a:solidFill>
                       <a:prstDash val="solid"/>
                     </a:lnT>
                     <a:lnB w="9525" cap="flat" cmpd="sng" algn="ctr">
                       <a:solidFill>
-                        <a:srgbClr val="D1DEF0"/>
+                        <a:srgbClr val="D4E3F7"/>
                       </a:solidFill>
                       <a:prstDash val="solid"/>
                     </a:lnB>
                     <a:solidFill>
-                      <a:srgbClr val="F0F4F9"/>
+                      <a:srgbClr val="F3F7FC"/>
                     </a:solidFill>
                   </a:tcPr>
                 </a:tc>
@@ -7309,7 +7309,7 @@
                       <a:r>
                         <a:rPr sz="1400" b="1">
                           <a:solidFill>
-                            <a:srgbClr val="16263B"/>
+                            <a:srgbClr val="1D4072"/>
                           </a:solidFill>
                         </a:rPr>
                         <a:t>입원·수술</a:t>
@@ -7319,30 +7319,30 @@
                   <a:tcPr anchor="ctr" marL="73152" marR="73152">
                     <a:lnL w="9525" cap="flat" cmpd="sng" algn="ctr">
                       <a:solidFill>
-                        <a:srgbClr val="D1DEF0"/>
+                        <a:srgbClr val="D4E3F7"/>
                       </a:solidFill>
                       <a:prstDash val="solid"/>
                     </a:lnL>
                     <a:lnR w="9525" cap="flat" cmpd="sng" algn="ctr">
                       <a:solidFill>
-                        <a:srgbClr val="D1DEF0"/>
+                        <a:srgbClr val="D4E3F7"/>
                       </a:solidFill>
                       <a:prstDash val="solid"/>
                     </a:lnR>
                     <a:lnT w="9525" cap="flat" cmpd="sng" algn="ctr">
                       <a:solidFill>
-                        <a:srgbClr val="D1DEF0"/>
+                        <a:srgbClr val="D4E3F7"/>
                       </a:solidFill>
                       <a:prstDash val="solid"/>
                     </a:lnT>
                     <a:lnB w="9525" cap="flat" cmpd="sng" algn="ctr">
                       <a:solidFill>
-                        <a:srgbClr val="D1DEF0"/>
+                        <a:srgbClr val="D4E3F7"/>
                       </a:solidFill>
                       <a:prstDash val="solid"/>
                     </a:lnB>
                     <a:solidFill>
-                      <a:srgbClr val="D1DEF0"/>
+                      <a:srgbClr val="D4E3F7"/>
                     </a:solidFill>
                   </a:tcPr>
                 </a:tc>
@@ -7365,25 +7365,25 @@
                   <a:tcPr anchor="ctr" marL="73152" marR="73152">
                     <a:lnL w="9525" cap="flat" cmpd="sng" algn="ctr">
                       <a:solidFill>
-                        <a:srgbClr val="D1DEF0"/>
+                        <a:srgbClr val="D4E3F7"/>
                       </a:solidFill>
                       <a:prstDash val="solid"/>
                     </a:lnL>
                     <a:lnR w="9525" cap="flat" cmpd="sng" algn="ctr">
                       <a:solidFill>
-                        <a:srgbClr val="D1DEF0"/>
+                        <a:srgbClr val="D4E3F7"/>
                       </a:solidFill>
                       <a:prstDash val="solid"/>
                     </a:lnR>
                     <a:lnT w="9525" cap="flat" cmpd="sng" algn="ctr">
                       <a:solidFill>
-                        <a:srgbClr val="D1DEF0"/>
+                        <a:srgbClr val="D4E3F7"/>
                       </a:solidFill>
                       <a:prstDash val="solid"/>
                     </a:lnT>
                     <a:lnB w="9525" cap="flat" cmpd="sng" algn="ctr">
                       <a:solidFill>
-                        <a:srgbClr val="D1DEF0"/>
+                        <a:srgbClr val="D4E3F7"/>
                       </a:solidFill>
                       <a:prstDash val="solid"/>
                     </a:lnB>
@@ -7411,25 +7411,25 @@
                   <a:tcPr anchor="ctr" marL="73152" marR="73152">
                     <a:lnL w="9525" cap="flat" cmpd="sng" algn="ctr">
                       <a:solidFill>
-                        <a:srgbClr val="D1DEF0"/>
+                        <a:srgbClr val="D4E3F7"/>
                       </a:solidFill>
                       <a:prstDash val="solid"/>
                     </a:lnL>
                     <a:lnR w="9525" cap="flat" cmpd="sng" algn="ctr">
                       <a:solidFill>
-                        <a:srgbClr val="D1DEF0"/>
+                        <a:srgbClr val="D4E3F7"/>
                       </a:solidFill>
                       <a:prstDash val="solid"/>
                     </a:lnR>
                     <a:lnT w="9525" cap="flat" cmpd="sng" algn="ctr">
                       <a:solidFill>
-                        <a:srgbClr val="D1DEF0"/>
+                        <a:srgbClr val="D4E3F7"/>
                       </a:solidFill>
                       <a:prstDash val="solid"/>
                     </a:lnT>
                     <a:lnB w="9525" cap="flat" cmpd="sng" algn="ctr">
                       <a:solidFill>
-                        <a:srgbClr val="D1DEF0"/>
+                        <a:srgbClr val="D4E3F7"/>
                       </a:solidFill>
                       <a:prstDash val="solid"/>
                     </a:lnB>
@@ -7457,25 +7457,25 @@
                   <a:tcPr anchor="ctr" marL="73152" marR="73152">
                     <a:lnL w="9525" cap="flat" cmpd="sng" algn="ctr">
                       <a:solidFill>
-                        <a:srgbClr val="D1DEF0"/>
+                        <a:srgbClr val="D4E3F7"/>
                       </a:solidFill>
                       <a:prstDash val="solid"/>
                     </a:lnL>
                     <a:lnR w="9525" cap="flat" cmpd="sng" algn="ctr">
                       <a:solidFill>
-                        <a:srgbClr val="D1DEF0"/>
+                        <a:srgbClr val="D4E3F7"/>
                       </a:solidFill>
                       <a:prstDash val="solid"/>
                     </a:lnR>
                     <a:lnT w="9525" cap="flat" cmpd="sng" algn="ctr">
                       <a:solidFill>
-                        <a:srgbClr val="D1DEF0"/>
+                        <a:srgbClr val="D4E3F7"/>
                       </a:solidFill>
                       <a:prstDash val="solid"/>
                     </a:lnT>
                     <a:lnB w="9525" cap="flat" cmpd="sng" algn="ctr">
                       <a:solidFill>
-                        <a:srgbClr val="D1DEF0"/>
+                        <a:srgbClr val="D4E3F7"/>
                       </a:solidFill>
                       <a:prstDash val="solid"/>
                     </a:lnB>
@@ -7495,7 +7495,7 @@
                       <a:r>
                         <a:rPr sz="1400" b="1">
                           <a:solidFill>
-                            <a:srgbClr val="16263B"/>
+                            <a:srgbClr val="1D4072"/>
                           </a:solidFill>
                         </a:rPr>
                         <a:t>상해</a:t>
@@ -7505,30 +7505,30 @@
                   <a:tcPr anchor="ctr" marL="73152" marR="73152">
                     <a:lnL w="9525" cap="flat" cmpd="sng" algn="ctr">
                       <a:solidFill>
-                        <a:srgbClr val="D1DEF0"/>
+                        <a:srgbClr val="D4E3F7"/>
                       </a:solidFill>
                       <a:prstDash val="solid"/>
                     </a:lnL>
                     <a:lnR w="9525" cap="flat" cmpd="sng" algn="ctr">
                       <a:solidFill>
-                        <a:srgbClr val="D1DEF0"/>
+                        <a:srgbClr val="D4E3F7"/>
                       </a:solidFill>
                       <a:prstDash val="solid"/>
                     </a:lnR>
                     <a:lnT w="9525" cap="flat" cmpd="sng" algn="ctr">
                       <a:solidFill>
-                        <a:srgbClr val="D1DEF0"/>
+                        <a:srgbClr val="D4E3F7"/>
                       </a:solidFill>
                       <a:prstDash val="solid"/>
                     </a:lnT>
                     <a:lnB w="9525" cap="flat" cmpd="sng" algn="ctr">
                       <a:solidFill>
-                        <a:srgbClr val="D1DEF0"/>
+                        <a:srgbClr val="D4E3F7"/>
                       </a:solidFill>
                       <a:prstDash val="solid"/>
                     </a:lnB>
                     <a:solidFill>
-                      <a:srgbClr val="D1DEF0"/>
+                      <a:srgbClr val="D4E3F7"/>
                     </a:solidFill>
                   </a:tcPr>
                 </a:tc>
@@ -7551,30 +7551,30 @@
                   <a:tcPr anchor="ctr" marL="73152" marR="73152">
                     <a:lnL w="9525" cap="flat" cmpd="sng" algn="ctr">
                       <a:solidFill>
-                        <a:srgbClr val="D1DEF0"/>
+                        <a:srgbClr val="D4E3F7"/>
                       </a:solidFill>
                       <a:prstDash val="solid"/>
                     </a:lnL>
                     <a:lnR w="9525" cap="flat" cmpd="sng" algn="ctr">
                       <a:solidFill>
-                        <a:srgbClr val="D1DEF0"/>
+                        <a:srgbClr val="D4E3F7"/>
                       </a:solidFill>
                       <a:prstDash val="solid"/>
                     </a:lnR>
                     <a:lnT w="9525" cap="flat" cmpd="sng" algn="ctr">
                       <a:solidFill>
-                        <a:srgbClr val="D1DEF0"/>
+                        <a:srgbClr val="D4E3F7"/>
                       </a:solidFill>
                       <a:prstDash val="solid"/>
                     </a:lnT>
                     <a:lnB w="9525" cap="flat" cmpd="sng" algn="ctr">
                       <a:solidFill>
-                        <a:srgbClr val="D1DEF0"/>
+                        <a:srgbClr val="D4E3F7"/>
                       </a:solidFill>
                       <a:prstDash val="solid"/>
                     </a:lnB>
                     <a:solidFill>
-                      <a:srgbClr val="F0F4F9"/>
+                      <a:srgbClr val="F3F7FC"/>
                     </a:solidFill>
                   </a:tcPr>
                 </a:tc>
@@ -7597,30 +7597,30 @@
                   <a:tcPr anchor="ctr" marL="73152" marR="73152">
                     <a:lnL w="9525" cap="flat" cmpd="sng" algn="ctr">
                       <a:solidFill>
-                        <a:srgbClr val="D1DEF0"/>
+                        <a:srgbClr val="D4E3F7"/>
                       </a:solidFill>
                       <a:prstDash val="solid"/>
                     </a:lnL>
                     <a:lnR w="9525" cap="flat" cmpd="sng" algn="ctr">
                       <a:solidFill>
-                        <a:srgbClr val="D1DEF0"/>
+                        <a:srgbClr val="D4E3F7"/>
                       </a:solidFill>
                       <a:prstDash val="solid"/>
                     </a:lnR>
                     <a:lnT w="9525" cap="flat" cmpd="sng" algn="ctr">
                       <a:solidFill>
-                        <a:srgbClr val="D1DEF0"/>
+                        <a:srgbClr val="D4E3F7"/>
                       </a:solidFill>
                       <a:prstDash val="solid"/>
                     </a:lnT>
                     <a:lnB w="9525" cap="flat" cmpd="sng" algn="ctr">
                       <a:solidFill>
-                        <a:srgbClr val="D1DEF0"/>
+                        <a:srgbClr val="D4E3F7"/>
                       </a:solidFill>
                       <a:prstDash val="solid"/>
                     </a:lnB>
                     <a:solidFill>
-                      <a:srgbClr val="F0F4F9"/>
+                      <a:srgbClr val="F3F7FC"/>
                     </a:solidFill>
                   </a:tcPr>
                 </a:tc>
@@ -7643,30 +7643,30 @@
                   <a:tcPr anchor="ctr" marL="73152" marR="73152">
                     <a:lnL w="9525" cap="flat" cmpd="sng" algn="ctr">
                       <a:solidFill>
-                        <a:srgbClr val="D1DEF0"/>
+                        <a:srgbClr val="D4E3F7"/>
                       </a:solidFill>
                       <a:prstDash val="solid"/>
                     </a:lnL>
                     <a:lnR w="9525" cap="flat" cmpd="sng" algn="ctr">
                       <a:solidFill>
-                        <a:srgbClr val="D1DEF0"/>
+                        <a:srgbClr val="D4E3F7"/>
                       </a:solidFill>
                       <a:prstDash val="solid"/>
                     </a:lnR>
                     <a:lnT w="9525" cap="flat" cmpd="sng" algn="ctr">
                       <a:solidFill>
-                        <a:srgbClr val="D1DEF0"/>
+                        <a:srgbClr val="D4E3F7"/>
                       </a:solidFill>
                       <a:prstDash val="solid"/>
                     </a:lnT>
                     <a:lnB w="9525" cap="flat" cmpd="sng" algn="ctr">
                       <a:solidFill>
-                        <a:srgbClr val="D1DEF0"/>
+                        <a:srgbClr val="D4E3F7"/>
                       </a:solidFill>
                       <a:prstDash val="solid"/>
                     </a:lnB>
                     <a:solidFill>
-                      <a:srgbClr val="F0F4F9"/>
+                      <a:srgbClr val="F3F7FC"/>
                     </a:solidFill>
                   </a:tcPr>
                 </a:tc>
@@ -7681,7 +7681,7 @@
                       <a:r>
                         <a:rPr sz="1400" b="1">
                           <a:solidFill>
-                            <a:srgbClr val="16263B"/>
+                            <a:srgbClr val="1D4072"/>
                           </a:solidFill>
                         </a:rPr>
                         <a:t>실손의료</a:t>
@@ -7691,30 +7691,30 @@
                   <a:tcPr anchor="ctr" marL="73152" marR="73152">
                     <a:lnL w="9525" cap="flat" cmpd="sng" algn="ctr">
                       <a:solidFill>
-                        <a:srgbClr val="D1DEF0"/>
+                        <a:srgbClr val="D4E3F7"/>
                       </a:solidFill>
                       <a:prstDash val="solid"/>
                     </a:lnL>
                     <a:lnR w="9525" cap="flat" cmpd="sng" algn="ctr">
                       <a:solidFill>
-                        <a:srgbClr val="D1DEF0"/>
+                        <a:srgbClr val="D4E3F7"/>
                       </a:solidFill>
                       <a:prstDash val="solid"/>
                     </a:lnR>
                     <a:lnT w="9525" cap="flat" cmpd="sng" algn="ctr">
                       <a:solidFill>
-                        <a:srgbClr val="D1DEF0"/>
+                        <a:srgbClr val="D4E3F7"/>
                       </a:solidFill>
                       <a:prstDash val="solid"/>
                     </a:lnT>
                     <a:lnB w="9525" cap="flat" cmpd="sng" algn="ctr">
                       <a:solidFill>
-                        <a:srgbClr val="D1DEF0"/>
+                        <a:srgbClr val="D4E3F7"/>
                       </a:solidFill>
                       <a:prstDash val="solid"/>
                     </a:lnB>
                     <a:solidFill>
-                      <a:srgbClr val="D1DEF0"/>
+                      <a:srgbClr val="D4E3F7"/>
                     </a:solidFill>
                   </a:tcPr>
                 </a:tc>
@@ -7737,25 +7737,25 @@
                   <a:tcPr anchor="ctr" marL="73152" marR="73152">
                     <a:lnL w="9525" cap="flat" cmpd="sng" algn="ctr">
                       <a:solidFill>
-                        <a:srgbClr val="D1DEF0"/>
+                        <a:srgbClr val="D4E3F7"/>
                       </a:solidFill>
                       <a:prstDash val="solid"/>
                     </a:lnL>
                     <a:lnR w="9525" cap="flat" cmpd="sng" algn="ctr">
                       <a:solidFill>
-                        <a:srgbClr val="D1DEF0"/>
+                        <a:srgbClr val="D4E3F7"/>
                       </a:solidFill>
                       <a:prstDash val="solid"/>
                     </a:lnR>
                     <a:lnT w="9525" cap="flat" cmpd="sng" algn="ctr">
                       <a:solidFill>
-                        <a:srgbClr val="D1DEF0"/>
+                        <a:srgbClr val="D4E3F7"/>
                       </a:solidFill>
                       <a:prstDash val="solid"/>
                     </a:lnT>
                     <a:lnB w="9525" cap="flat" cmpd="sng" algn="ctr">
                       <a:solidFill>
-                        <a:srgbClr val="D1DEF0"/>
+                        <a:srgbClr val="D4E3F7"/>
                       </a:solidFill>
                       <a:prstDash val="solid"/>
                     </a:lnB>
@@ -7783,25 +7783,25 @@
                   <a:tcPr anchor="ctr" marL="73152" marR="73152">
                     <a:lnL w="9525" cap="flat" cmpd="sng" algn="ctr">
                       <a:solidFill>
-                        <a:srgbClr val="D1DEF0"/>
+                        <a:srgbClr val="D4E3F7"/>
                       </a:solidFill>
                       <a:prstDash val="solid"/>
                     </a:lnL>
                     <a:lnR w="9525" cap="flat" cmpd="sng" algn="ctr">
                       <a:solidFill>
-                        <a:srgbClr val="D1DEF0"/>
+                        <a:srgbClr val="D4E3F7"/>
                       </a:solidFill>
                       <a:prstDash val="solid"/>
                     </a:lnR>
                     <a:lnT w="9525" cap="flat" cmpd="sng" algn="ctr">
                       <a:solidFill>
-                        <a:srgbClr val="D1DEF0"/>
+                        <a:srgbClr val="D4E3F7"/>
                       </a:solidFill>
                       <a:prstDash val="solid"/>
                     </a:lnT>
                     <a:lnB w="9525" cap="flat" cmpd="sng" algn="ctr">
                       <a:solidFill>
-                        <a:srgbClr val="D1DEF0"/>
+                        <a:srgbClr val="D4E3F7"/>
                       </a:solidFill>
                       <a:prstDash val="solid"/>
                     </a:lnB>
@@ -7829,25 +7829,25 @@
                   <a:tcPr anchor="ctr" marL="73152" marR="73152">
                     <a:lnL w="9525" cap="flat" cmpd="sng" algn="ctr">
                       <a:solidFill>
-                        <a:srgbClr val="D1DEF0"/>
+                        <a:srgbClr val="D4E3F7"/>
                       </a:solidFill>
                       <a:prstDash val="solid"/>
                     </a:lnL>
                     <a:lnR w="9525" cap="flat" cmpd="sng" algn="ctr">
                       <a:solidFill>
-                        <a:srgbClr val="D1DEF0"/>
+                        <a:srgbClr val="D4E3F7"/>
                       </a:solidFill>
                       <a:prstDash val="solid"/>
                     </a:lnR>
                     <a:lnT w="9525" cap="flat" cmpd="sng" algn="ctr">
                       <a:solidFill>
-                        <a:srgbClr val="D1DEF0"/>
+                        <a:srgbClr val="D4E3F7"/>
                       </a:solidFill>
                       <a:prstDash val="solid"/>
                     </a:lnT>
                     <a:lnB w="9525" cap="flat" cmpd="sng" algn="ctr">
                       <a:solidFill>
-                        <a:srgbClr val="D1DEF0"/>
+                        <a:srgbClr val="D4E3F7"/>
                       </a:solidFill>
                       <a:prstDash val="solid"/>
                     </a:lnB>
@@ -7867,7 +7867,7 @@
                       <a:r>
                         <a:rPr sz="1400" b="1">
                           <a:solidFill>
-                            <a:srgbClr val="16263B"/>
+                            <a:srgbClr val="1D4072"/>
                           </a:solidFill>
                         </a:rPr>
                         <a:t>연금·노후자금</a:t>
@@ -7877,30 +7877,30 @@
                   <a:tcPr anchor="ctr" marL="73152" marR="73152">
                     <a:lnL w="9525" cap="flat" cmpd="sng" algn="ctr">
                       <a:solidFill>
-                        <a:srgbClr val="D1DEF0"/>
+                        <a:srgbClr val="D4E3F7"/>
                       </a:solidFill>
                       <a:prstDash val="solid"/>
                     </a:lnL>
                     <a:lnR w="9525" cap="flat" cmpd="sng" algn="ctr">
                       <a:solidFill>
-                        <a:srgbClr val="D1DEF0"/>
+                        <a:srgbClr val="D4E3F7"/>
                       </a:solidFill>
                       <a:prstDash val="solid"/>
                     </a:lnR>
                     <a:lnT w="9525" cap="flat" cmpd="sng" algn="ctr">
                       <a:solidFill>
-                        <a:srgbClr val="D1DEF0"/>
+                        <a:srgbClr val="D4E3F7"/>
                       </a:solidFill>
                       <a:prstDash val="solid"/>
                     </a:lnT>
                     <a:lnB w="9525" cap="flat" cmpd="sng" algn="ctr">
                       <a:solidFill>
-                        <a:srgbClr val="D1DEF0"/>
+                        <a:srgbClr val="D4E3F7"/>
                       </a:solidFill>
                       <a:prstDash val="solid"/>
                     </a:lnB>
                     <a:solidFill>
-                      <a:srgbClr val="D1DEF0"/>
+                      <a:srgbClr val="D4E3F7"/>
                     </a:solidFill>
                   </a:tcPr>
                 </a:tc>
@@ -7923,30 +7923,30 @@
                   <a:tcPr anchor="ctr" marL="73152" marR="73152">
                     <a:lnL w="9525" cap="flat" cmpd="sng" algn="ctr">
                       <a:solidFill>
-                        <a:srgbClr val="D1DEF0"/>
+                        <a:srgbClr val="D4E3F7"/>
                       </a:solidFill>
                       <a:prstDash val="solid"/>
                     </a:lnL>
                     <a:lnR w="9525" cap="flat" cmpd="sng" algn="ctr">
                       <a:solidFill>
-                        <a:srgbClr val="D1DEF0"/>
+                        <a:srgbClr val="D4E3F7"/>
                       </a:solidFill>
                       <a:prstDash val="solid"/>
                     </a:lnR>
                     <a:lnT w="9525" cap="flat" cmpd="sng" algn="ctr">
                       <a:solidFill>
-                        <a:srgbClr val="D1DEF0"/>
+                        <a:srgbClr val="D4E3F7"/>
                       </a:solidFill>
                       <a:prstDash val="solid"/>
                     </a:lnT>
                     <a:lnB w="9525" cap="flat" cmpd="sng" algn="ctr">
                       <a:solidFill>
-                        <a:srgbClr val="D1DEF0"/>
+                        <a:srgbClr val="D4E3F7"/>
                       </a:solidFill>
                       <a:prstDash val="solid"/>
                     </a:lnB>
                     <a:solidFill>
-                      <a:srgbClr val="F0F4F9"/>
+                      <a:srgbClr val="F3F7FC"/>
                     </a:solidFill>
                   </a:tcPr>
                 </a:tc>
@@ -7969,30 +7969,30 @@
                   <a:tcPr anchor="ctr" marL="73152" marR="73152">
                     <a:lnL w="9525" cap="flat" cmpd="sng" algn="ctr">
                       <a:solidFill>
-                        <a:srgbClr val="D1DEF0"/>
+                        <a:srgbClr val="D4E3F7"/>
                       </a:solidFill>
                       <a:prstDash val="solid"/>
                     </a:lnL>
                     <a:lnR w="9525" cap="flat" cmpd="sng" algn="ctr">
                       <a:solidFill>
-                        <a:srgbClr val="D1DEF0"/>
+                        <a:srgbClr val="D4E3F7"/>
                       </a:solidFill>
                       <a:prstDash val="solid"/>
                     </a:lnR>
                     <a:lnT w="9525" cap="flat" cmpd="sng" algn="ctr">
                       <a:solidFill>
-                        <a:srgbClr val="D1DEF0"/>
+                        <a:srgbClr val="D4E3F7"/>
                       </a:solidFill>
                       <a:prstDash val="solid"/>
                     </a:lnT>
                     <a:lnB w="9525" cap="flat" cmpd="sng" algn="ctr">
                       <a:solidFill>
-                        <a:srgbClr val="D1DEF0"/>
+                        <a:srgbClr val="D4E3F7"/>
                       </a:solidFill>
                       <a:prstDash val="solid"/>
                     </a:lnB>
                     <a:solidFill>
-                      <a:srgbClr val="F0F4F9"/>
+                      <a:srgbClr val="F3F7FC"/>
                     </a:solidFill>
                   </a:tcPr>
                 </a:tc>
@@ -8015,30 +8015,30 @@
                   <a:tcPr anchor="ctr" marL="73152" marR="73152">
                     <a:lnL w="9525" cap="flat" cmpd="sng" algn="ctr">
                       <a:solidFill>
-                        <a:srgbClr val="D1DEF0"/>
+                        <a:srgbClr val="D4E3F7"/>
                       </a:solidFill>
                       <a:prstDash val="solid"/>
                     </a:lnL>
                     <a:lnR w="9525" cap="flat" cmpd="sng" algn="ctr">
                       <a:solidFill>
-                        <a:srgbClr val="D1DEF0"/>
+                        <a:srgbClr val="D4E3F7"/>
                       </a:solidFill>
                       <a:prstDash val="solid"/>
                     </a:lnR>
                     <a:lnT w="9525" cap="flat" cmpd="sng" algn="ctr">
                       <a:solidFill>
-                        <a:srgbClr val="D1DEF0"/>
+                        <a:srgbClr val="D4E3F7"/>
                       </a:solidFill>
                       <a:prstDash val="solid"/>
                     </a:lnT>
                     <a:lnB w="9525" cap="flat" cmpd="sng" algn="ctr">
                       <a:solidFill>
-                        <a:srgbClr val="D1DEF0"/>
+                        <a:srgbClr val="D4E3F7"/>
                       </a:solidFill>
                       <a:prstDash val="solid"/>
                     </a:lnB>
                     <a:solidFill>
-                      <a:srgbClr val="F0F4F9"/>
+                      <a:srgbClr val="F3F7FC"/>
                     </a:solidFill>
                   </a:tcPr>
                 </a:tc>
@@ -8061,7 +8061,7 @@
     <p:bg>
       <p:bgPr>
         <a:solidFill>
-          <a:srgbClr val="F0F4F9"/>
+          <a:srgbClr val="F3F7FC"/>
         </a:solidFill>
         <a:effectLst/>
       </p:bgPr>
@@ -8091,7 +8091,7 @@
             </a:avLst>
           </a:prstGeom>
           <a:solidFill>
-            <a:srgbClr val="D1DEF0"/>
+            <a:srgbClr val="D4E3F7"/>
           </a:solidFill>
           <a:ln>
             <a:noFill/>
@@ -8135,7 +8135,7 @@
             <a:r>
               <a:rPr sz="3000" b="1" i="0">
                 <a:solidFill>
-                  <a:srgbClr val="16263B"/>
+                  <a:srgbClr val="1D4072"/>
                 </a:solidFill>
               </a:rPr>
               <a:t>월 보험료 한눈에</a:t>
@@ -8160,11 +8160,11 @@
             </a:avLst>
           </a:prstGeom>
           <a:solidFill>
-            <a:srgbClr val="F0F4F9"/>
+            <a:srgbClr val="F3F7FC"/>
           </a:solidFill>
           <a:ln w="15875">
             <a:solidFill>
-              <a:srgbClr val="D1DEF0"/>
+              <a:srgbClr val="D4E3F7"/>
             </a:solidFill>
           </a:ln>
         </p:spPr>
@@ -8191,7 +8191,7 @@
             <a:avLst/>
           </a:prstGeom>
           <a:solidFill>
-            <a:srgbClr val="2A476F"/>
+            <a:srgbClr val="4981D0"/>
           </a:solidFill>
           <a:ln>
             <a:noFill/>
@@ -8249,7 +8249,7 @@
             <a:r>
               <a:rPr sz="1700" b="1" i="0">
                 <a:solidFill>
-                  <a:srgbClr val="16263B"/>
+                  <a:srgbClr val="1D4072"/>
                 </a:solidFill>
               </a:rPr>
               <a:t>월 보험료 합계</a:t>
@@ -8312,11 +8312,11 @@
             </a:avLst>
           </a:prstGeom>
           <a:solidFill>
-            <a:srgbClr val="F0F4F9"/>
+            <a:srgbClr val="F3F7FC"/>
           </a:solidFill>
           <a:ln w="15875">
             <a:solidFill>
-              <a:srgbClr val="D1DEF0"/>
+              <a:srgbClr val="D4E3F7"/>
             </a:solidFill>
           </a:ln>
         </p:spPr>
@@ -8343,7 +8343,7 @@
             <a:avLst/>
           </a:prstGeom>
           <a:solidFill>
-            <a:srgbClr val="2A476F"/>
+            <a:srgbClr val="4981D0"/>
           </a:solidFill>
           <a:ln>
             <a:noFill/>
@@ -8401,7 +8401,7 @@
             <a:r>
               <a:rPr sz="1700" b="1" i="0">
                 <a:solidFill>
-                  <a:srgbClr val="16263B"/>
+                  <a:srgbClr val="1D4072"/>
                 </a:solidFill>
               </a:rPr>
               <a:t>연 보험료 합계</a:t>
@@ -8464,11 +8464,11 @@
             </a:avLst>
           </a:prstGeom>
           <a:solidFill>
-            <a:srgbClr val="F0F4F9"/>
+            <a:srgbClr val="F3F7FC"/>
           </a:solidFill>
           <a:ln w="15875">
             <a:solidFill>
-              <a:srgbClr val="D1DEF0"/>
+              <a:srgbClr val="D4E3F7"/>
             </a:solidFill>
           </a:ln>
         </p:spPr>
@@ -8495,7 +8495,7 @@
             <a:avLst/>
           </a:prstGeom>
           <a:solidFill>
-            <a:srgbClr val="2A476F"/>
+            <a:srgbClr val="4981D0"/>
           </a:solidFill>
           <a:ln>
             <a:noFill/>
@@ -8553,7 +8553,7 @@
             <a:r>
               <a:rPr sz="1700" b="1" i="0">
                 <a:solidFill>
-                  <a:srgbClr val="16263B"/>
+                  <a:srgbClr val="1D4072"/>
                 </a:solidFill>
               </a:rPr>
               <a:t>월 소득 대비</a:t>
@@ -8651,7 +8651,7 @@
     <p:bg>
       <p:bgPr>
         <a:solidFill>
-          <a:srgbClr val="F0F4F9"/>
+          <a:srgbClr val="F3F7FC"/>
         </a:solidFill>
         <a:effectLst/>
       </p:bgPr>
@@ -8681,7 +8681,7 @@
             </a:avLst>
           </a:prstGeom>
           <a:solidFill>
-            <a:srgbClr val="D1DEF0"/>
+            <a:srgbClr val="D4E3F7"/>
           </a:solidFill>
           <a:ln>
             <a:noFill/>
@@ -8725,7 +8725,7 @@
             <a:r>
               <a:rPr sz="3000" b="1" i="0">
                 <a:solidFill>
-                  <a:srgbClr val="16263B"/>
+                  <a:srgbClr val="1D4072"/>
                 </a:solidFill>
               </a:rPr>
               <a:t>점검 메모와 다음 할 일</a:t>
@@ -8750,11 +8750,11 @@
             </a:avLst>
           </a:prstGeom>
           <a:solidFill>
-            <a:srgbClr val="F0F4F9"/>
+            <a:srgbClr val="F3F7FC"/>
           </a:solidFill>
           <a:ln w="15875">
             <a:solidFill>
-              <a:srgbClr val="D1DEF0"/>
+              <a:srgbClr val="D4E3F7"/>
             </a:solidFill>
           </a:ln>
         </p:spPr>
@@ -8781,7 +8781,7 @@
             <a:avLst/>
           </a:prstGeom>
           <a:solidFill>
-            <a:srgbClr val="2A476F"/>
+            <a:srgbClr val="4981D0"/>
           </a:solidFill>
           <a:ln>
             <a:noFill/>
@@ -8839,7 +8839,7 @@
             <a:r>
               <a:rPr sz="1800" b="1" i="0">
                 <a:solidFill>
-                  <a:srgbClr val="16263B"/>
+                  <a:srgbClr val="1D4072"/>
                 </a:solidFill>
               </a:rPr>
               <a:t>확인할 것</a:t>
@@ -8902,11 +8902,11 @@
             </a:avLst>
           </a:prstGeom>
           <a:solidFill>
-            <a:srgbClr val="F0F4F9"/>
+            <a:srgbClr val="F3F7FC"/>
           </a:solidFill>
           <a:ln w="15875">
             <a:solidFill>
-              <a:srgbClr val="D1DEF0"/>
+              <a:srgbClr val="D4E3F7"/>
             </a:solidFill>
           </a:ln>
         </p:spPr>
@@ -8933,7 +8933,7 @@
             <a:avLst/>
           </a:prstGeom>
           <a:solidFill>
-            <a:srgbClr val="2A476F"/>
+            <a:srgbClr val="4981D0"/>
           </a:solidFill>
           <a:ln>
             <a:noFill/>
@@ -8991,7 +8991,7 @@
             <a:r>
               <a:rPr sz="1800" b="1" i="0">
                 <a:solidFill>
-                  <a:srgbClr val="16263B"/>
+                  <a:srgbClr val="1D4072"/>
                 </a:solidFill>
               </a:rPr>
               <a:t>문의할 것</a:t>
@@ -9054,11 +9054,11 @@
             </a:avLst>
           </a:prstGeom>
           <a:solidFill>
-            <a:srgbClr val="F0F4F9"/>
+            <a:srgbClr val="F3F7FC"/>
           </a:solidFill>
           <a:ln w="15875">
             <a:solidFill>
-              <a:srgbClr val="D1DEF0"/>
+              <a:srgbClr val="D4E3F7"/>
             </a:solidFill>
           </a:ln>
         </p:spPr>
@@ -9085,7 +9085,7 @@
             <a:avLst/>
           </a:prstGeom>
           <a:solidFill>
-            <a:srgbClr val="2A476F"/>
+            <a:srgbClr val="4981D0"/>
           </a:solidFill>
           <a:ln>
             <a:noFill/>
@@ -9143,7 +9143,7 @@
             <a:r>
               <a:rPr sz="1800" b="1" i="0">
                 <a:solidFill>
-                  <a:srgbClr val="16263B"/>
+                  <a:srgbClr val="1D4072"/>
                 </a:solidFill>
               </a:rPr>
               <a:t>정리할 날짜</a:t>
@@ -9246,34 +9246,34 @@
         <a:sysClr val="window" lastClr="FFFFFF"/>
       </a:lt1>
       <a:dk2>
-        <a:srgbClr val="16263B"/>
+        <a:srgbClr val="1D4072"/>
       </a:dk2>
       <a:lt2>
-        <a:srgbClr val="F0F4F9"/>
+        <a:srgbClr val="F3F7FC"/>
       </a:lt2>
       <a:accent1>
-        <a:srgbClr val="2A476F"/>
+        <a:srgbClr val="4981D0"/>
       </a:accent1>
       <a:accent2>
-        <a:srgbClr val="91423B"/>
+        <a:srgbClr val="339941"/>
       </a:accent2>
       <a:accent3>
-        <a:srgbClr val="16263B"/>
+        <a:srgbClr val="1D4072"/>
       </a:accent3>
       <a:accent4>
-        <a:srgbClr val="D1DEF0"/>
+        <a:srgbClr val="D4E3F7"/>
       </a:accent4>
       <a:accent5>
-        <a:srgbClr val="5E4455"/>
+        <a:srgbClr val="3E8D88"/>
       </a:accent5>
       <a:accent6>
-        <a:srgbClr val="737D89"/>
+        <a:srgbClr val="778CAA"/>
       </a:accent6>
       <a:hlink>
-        <a:srgbClr val="2A476F"/>
+        <a:srgbClr val="4981D0"/>
       </a:hlink>
       <a:folHlink>
-        <a:srgbClr val="16263B"/>
+        <a:srgbClr val="1D4072"/>
       </a:folHlink>
     </a:clrScheme>
     <a:fontScheme name="Office">

--- a/public/fun/pack/pptx/review/보장점검양식_08_가족점검_처마밑제비집.pptx
+++ b/public/fun/pack/pptx/review/보장점검양식_08_가족점검_처마밑제비집.pptx
@@ -3286,6 +3286,14 @@
 <file path=ppt/slides/slide1.xml><?xml version="1.0" encoding="utf-8"?>
 <p:sld xmlns:a="http://schemas.openxmlformats.org/drawingml/2006/main" xmlns:p="http://schemas.openxmlformats.org/presentationml/2006/main" xmlns:r="http://schemas.openxmlformats.org/officeDocument/2006/relationships">
   <p:cSld>
+    <p:bg>
+      <p:bgPr>
+        <a:solidFill>
+          <a:srgbClr val="EAF2FD"/>
+        </a:solidFill>
+        <a:effectLst/>
+      </p:bgPr>
+    </p:bg>
     <p:spTree>
       <p:nvGrpSpPr>
         <p:cNvPr id="1" name=""/>
@@ -3293,30 +3301,102 @@
         <p:nvPr/>
       </p:nvGrpSpPr>
       <p:grpSpPr/>
-      <p:pic>
-        <p:nvPicPr>
-          <p:cNvPr id="3" name="표지 그림" descr="review-08.jpg"/>
-          <p:cNvPicPr>
-            <a:picLocks noChangeAspect="1"/>
-          </p:cNvPicPr>
+      <p:sp>
+        <p:nvSpPr>
+          <p:cNvPr id="3" name="장식"/>
+          <p:cNvSpPr/>
           <p:nvPr/>
-        </p:nvPicPr>
-        <p:blipFill>
-          <a:blip r:embed="rId2"/>
-          <a:stretch>
-            <a:fillRect/>
-          </a:stretch>
-        </p:blipFill>
-        <p:spPr>
-          <a:xfrm>
-            <a:off x="0" y="0"/>
-            <a:ext cx="12191695" cy="6858000"/>
+        </p:nvSpPr>
+        <p:spPr>
+          <a:xfrm>
+            <a:off x="7071183" y="-3200400"/>
+            <a:ext cx="6400800" cy="6400800"/>
+          </a:xfrm>
+          <a:prstGeom prst="ellipse">
+            <a:avLst/>
+          </a:prstGeom>
+          <a:solidFill>
+            <a:srgbClr val="A6C6F2"/>
+          </a:solidFill>
+          <a:ln>
+            <a:noFill/>
+          </a:ln>
+        </p:spPr>
+        <p:txBody>
+          <a:bodyPr rtlCol="0" anchor="ctr"/>
+          <a:lstStyle/>
+          <a:p>
+            <a:pPr algn="ctr"/>
+          </a:p>
+        </p:txBody>
+      </p:sp>
+      <p:sp>
+        <p:nvSpPr>
+          <p:cNvPr id="4" name="장식"/>
+          <p:cNvSpPr/>
+          <p:nvPr/>
+        </p:nvSpPr>
+        <p:spPr>
+          <a:xfrm>
+            <a:off x="8534186" y="-914400"/>
+            <a:ext cx="3291840" cy="3291840"/>
+          </a:xfrm>
+          <a:prstGeom prst="ellipse">
+            <a:avLst/>
+          </a:prstGeom>
+          <a:solidFill>
+            <a:srgbClr val="97BBED"/>
+          </a:solidFill>
+          <a:ln>
+            <a:noFill/>
+          </a:ln>
+        </p:spPr>
+        <p:txBody>
+          <a:bodyPr rtlCol="0" anchor="ctr"/>
+          <a:lstStyle/>
+          <a:p>
+            <a:pPr algn="ctr"/>
+          </a:p>
+        </p:txBody>
+      </p:sp>
+      <p:sp>
+        <p:nvSpPr>
+          <p:cNvPr id="5" name="라벨"/>
+          <p:cNvSpPr txBox="1"/>
+          <p:nvPr/>
+        </p:nvSpPr>
+        <p:spPr>
+          <a:xfrm>
+            <a:off x="822960" y="2148840"/>
+            <a:ext cx="5608179" cy="274320"/>
           </a:xfrm>
           <a:prstGeom prst="rect">
             <a:avLst/>
           </a:prstGeom>
-        </p:spPr>
-      </p:pic>
+          <a:noFill/>
+        </p:spPr>
+        <p:txBody>
+          <a:bodyPr wrap="square" lIns="54864" rIns="54864" tIns="27432" bIns="27432" anchor="t">
+            <a:noAutofit/>
+          </a:bodyPr>
+          <a:lstStyle/>
+          <a:p>
+            <a:pPr algn="l">
+              <a:lnSpc>
+                <a:spcPct val="115000"/>
+              </a:lnSpc>
+            </a:pPr>
+            <a:r>
+              <a:rPr sz="1000" b="1" i="0" spc="250">
+                <a:solidFill>
+                  <a:srgbClr val="26231F"/>
+                </a:solidFill>
+              </a:rPr>
+              <a:t>INSURANCE CHECK</a:t>
+            </a:r>
+          </a:p>
+        </p:txBody>
+      </p:sp>
       <p:sp>
         <p:nvSpPr>
           <p:cNvPr id="2" name="Title 1"/>
@@ -3329,8 +3409,8 @@
         </p:nvSpPr>
         <p:spPr>
           <a:xfrm>
-            <a:off x="853418" y="2057400"/>
-            <a:ext cx="6095847" cy="1554480"/>
+            <a:off x="822960" y="2606040"/>
+            <a:ext cx="5608179" cy="1188720"/>
           </a:xfrm>
         </p:spPr>
         <p:txBody>
@@ -3347,7 +3427,7 @@
             <a:r>
               <a:rPr sz="3600" b="1" i="0">
                 <a:solidFill>
-                  <a:srgbClr val="1D4072"/>
+                  <a:srgbClr val="26231F"/>
                 </a:solidFill>
               </a:rPr>
               <a:t>우리 보험 점검 시간</a:t>
@@ -3357,14 +3437,14 @@
       </p:sp>
       <p:sp>
         <p:nvSpPr>
-          <p:cNvPr id="4" name="한 줄 문구"/>
+          <p:cNvPr id="6" name="한 줄 문구"/>
           <p:cNvSpPr txBox="1"/>
           <p:nvPr/>
         </p:nvSpPr>
         <p:spPr>
           <a:xfrm>
-            <a:off x="853418" y="3749039"/>
-            <a:ext cx="6095847" cy="822960"/>
+            <a:off x="822960" y="3886200"/>
+            <a:ext cx="5608179" cy="822960"/>
           </a:xfrm>
           <a:prstGeom prst="rect">
             <a:avLst/>
@@ -3383,9 +3463,9 @@
               </a:lnSpc>
             </a:pPr>
             <a:r>
-              <a:rPr sz="1700" b="0" i="1">
+              <a:rPr sz="1700" b="0" i="0">
                 <a:solidFill>
-                  <a:srgbClr val="1D4072"/>
+                  <a:srgbClr val="26231F"/>
                 </a:solidFill>
               </a:rPr>
               <a:t>아이 이름으로 된 보험도 같이 적습니다</a:t>
@@ -3395,14 +3475,14 @@
       </p:sp>
       <p:sp>
         <p:nvSpPr>
-          <p:cNvPr id="5" name="안내 문구"/>
+          <p:cNvPr id="7" name="안내 문구"/>
           <p:cNvSpPr txBox="1"/>
           <p:nvPr/>
         </p:nvSpPr>
         <p:spPr>
           <a:xfrm>
-            <a:off x="853418" y="4617720"/>
-            <a:ext cx="6095847" cy="914400"/>
+            <a:off x="822960" y="4754880"/>
+            <a:ext cx="5608179" cy="914400"/>
           </a:xfrm>
           <a:prstGeom prst="rect">
             <a:avLst/>
@@ -3423,10 +3503,10 @@
             <a:r>
               <a:rPr sz="1400" b="0" i="0">
                 <a:solidFill>
-                  <a:srgbClr val="666666"/>
+                  <a:srgbClr val="26231F"/>
                 </a:solidFill>
               </a:rPr>
-              <a:t>가족 점검 · 2027. 00. 00</a:t>
+              <a:t>가족 점검 · 날짜 입력</a:t>
             </a:r>
           </a:p>
           <a:p>
@@ -3438,7 +3518,7 @@
             <a:r>
               <a:rPr sz="1400" b="0" i="0">
                 <a:solidFill>
-                  <a:srgbClr val="666666"/>
+                  <a:srgbClr val="26231F"/>
                 </a:solidFill>
               </a:rPr>
               <a:t>가입 내용을 정리하고 함께 확인하는 양식</a:t>
@@ -3460,7 +3540,7 @@
     <p:bg>
       <p:bgPr>
         <a:solidFill>
-          <a:srgbClr val="F3F7FC"/>
+          <a:srgbClr val="FAFBFD"/>
         </a:solidFill>
         <a:effectLst/>
       </p:bgPr>
@@ -3479,18 +3559,82 @@
           <p:nvPr/>
         </p:nvSpPr>
         <p:spPr>
-          <a:xfrm rot="10800000">
-            <a:off x="10637215" y="0"/>
-            <a:ext cx="914400" cy="1554480"/>
-          </a:xfrm>
-          <a:prstGeom prst="round2SameRect">
-            <a:avLst>
-              <a:gd name="adj1" fmla="val 50000"/>
-              <a:gd name="adj2" fmla="val 0"/>
-            </a:avLst>
+          <a:xfrm>
+            <a:off x="10180015" y="-1645920"/>
+            <a:ext cx="3474720" cy="3474720"/>
+          </a:xfrm>
+          <a:prstGeom prst="ellipse">
+            <a:avLst/>
           </a:prstGeom>
           <a:solidFill>
-            <a:srgbClr val="D4E3F7"/>
+            <a:srgbClr val="A6C6F2"/>
+          </a:solidFill>
+          <a:ln>
+            <a:noFill/>
+          </a:ln>
+        </p:spPr>
+        <p:txBody>
+          <a:bodyPr rtlCol="0" anchor="ctr"/>
+          <a:lstStyle/>
+          <a:p>
+            <a:pPr algn="ctr"/>
+          </a:p>
+        </p:txBody>
+      </p:sp>
+      <p:sp>
+        <p:nvSpPr>
+          <p:cNvPr id="4" name="상단 라벨"/>
+          <p:cNvSpPr txBox="1"/>
+          <p:nvPr/>
+        </p:nvSpPr>
+        <p:spPr>
+          <a:xfrm>
+            <a:off x="640080" y="274320"/>
+            <a:ext cx="5486400" cy="274320"/>
+          </a:xfrm>
+          <a:prstGeom prst="rect">
+            <a:avLst/>
+          </a:prstGeom>
+          <a:noFill/>
+        </p:spPr>
+        <p:txBody>
+          <a:bodyPr wrap="square" lIns="54864" rIns="54864" tIns="27432" bIns="27432" anchor="ctr">
+            <a:noAutofit/>
+          </a:bodyPr>
+          <a:lstStyle/>
+          <a:p>
+            <a:pPr algn="l">
+              <a:lnSpc>
+                <a:spcPct val="115000"/>
+              </a:lnSpc>
+            </a:pPr>
+            <a:r>
+              <a:rPr sz="900" b="1" i="0" spc="250">
+                <a:solidFill>
+                  <a:srgbClr val="26231F"/>
+                </a:solidFill>
+              </a:rPr>
+              <a:t>INSURANCE CHECK</a:t>
+            </a:r>
+          </a:p>
+        </p:txBody>
+      </p:sp>
+      <p:sp>
+        <p:nvSpPr>
+          <p:cNvPr id="5" name="포인트"/>
+          <p:cNvSpPr/>
+          <p:nvPr/>
+        </p:nvSpPr>
+        <p:spPr>
+          <a:xfrm>
+            <a:off x="11048695" y="502919"/>
+            <a:ext cx="274320" cy="274320"/>
+          </a:xfrm>
+          <a:prstGeom prst="ellipse">
+            <a:avLst/>
+          </a:prstGeom>
+          <a:solidFill>
+            <a:srgbClr val="FFFFFF"/>
           </a:solidFill>
           <a:ln>
             <a:noFill/>
@@ -3516,8 +3660,8 @@
         </p:nvSpPr>
         <p:spPr>
           <a:xfrm>
-            <a:off x="640080" y="457200"/>
-            <a:ext cx="9722815" cy="868680"/>
+            <a:off x="640080" y="658368"/>
+            <a:ext cx="9082735" cy="868680"/>
           </a:xfrm>
         </p:spPr>
         <p:txBody>
@@ -3534,7 +3678,7 @@
             <a:r>
               <a:rPr sz="3000" b="1" i="0">
                 <a:solidFill>
-                  <a:srgbClr val="1D4072"/>
+                  <a:srgbClr val="26231F"/>
                 </a:solidFill>
               </a:rPr>
               <a:t>점검 대상 현황</a:t>
@@ -3544,14 +3688,14 @@
       </p:sp>
       <p:graphicFrame>
         <p:nvGraphicFramePr>
-          <p:cNvPr id="4" name="표"/>
+          <p:cNvPr id="6" name="표"/>
           <p:cNvGraphicFramePr>
             <a:graphicFrameLocks noGrp="1"/>
           </p:cNvGraphicFramePr>
           <p:nvPr/>
         </p:nvGraphicFramePr>
         <p:xfrm>
-          <a:off x="640080" y="1600200"/>
+          <a:off x="640080" y="1783080"/>
           <a:ext cx="10911532" cy="3657600"/>
         </p:xfrm>
         <a:graphic>
@@ -3576,7 +3720,7 @@
                       <a:r>
                         <a:rPr sz="1600" b="1">
                           <a:solidFill>
-                            <a:srgbClr val="FFFFFF"/>
+                            <a:srgbClr val="26231F"/>
                           </a:solidFill>
                         </a:rPr>
                         <a:t>구분</a:t>
@@ -3586,30 +3730,30 @@
                   <a:tcPr anchor="ctr" marL="73152" marR="73152">
                     <a:lnL w="9525" cap="flat" cmpd="sng" algn="ctr">
                       <a:solidFill>
-                        <a:srgbClr val="4981D0"/>
+                        <a:srgbClr val="97BBED"/>
                       </a:solidFill>
                       <a:prstDash val="solid"/>
                     </a:lnL>
                     <a:lnR w="9525" cap="flat" cmpd="sng" algn="ctr">
                       <a:solidFill>
-                        <a:srgbClr val="4981D0"/>
+                        <a:srgbClr val="97BBED"/>
                       </a:solidFill>
                       <a:prstDash val="solid"/>
                     </a:lnR>
                     <a:lnT w="9525" cap="flat" cmpd="sng" algn="ctr">
                       <a:solidFill>
-                        <a:srgbClr val="4981D0"/>
+                        <a:srgbClr val="97BBED"/>
                       </a:solidFill>
                       <a:prstDash val="solid"/>
                     </a:lnT>
                     <a:lnB w="9525" cap="flat" cmpd="sng" algn="ctr">
                       <a:solidFill>
-                        <a:srgbClr val="4981D0"/>
+                        <a:srgbClr val="97BBED"/>
                       </a:solidFill>
                       <a:prstDash val="solid"/>
                     </a:lnB>
                     <a:solidFill>
-                      <a:srgbClr val="4981D0"/>
+                      <a:srgbClr val="97BBED"/>
                     </a:solidFill>
                   </a:tcPr>
                 </a:tc>
@@ -3622,7 +3766,7 @@
                       <a:r>
                         <a:rPr sz="1600" b="1">
                           <a:solidFill>
-                            <a:srgbClr val="FFFFFF"/>
+                            <a:srgbClr val="26231F"/>
                           </a:solidFill>
                         </a:rPr>
                         <a:t>아빠</a:t>
@@ -3632,30 +3776,30 @@
                   <a:tcPr anchor="ctr" marL="73152" marR="73152">
                     <a:lnL w="9525" cap="flat" cmpd="sng" algn="ctr">
                       <a:solidFill>
-                        <a:srgbClr val="4981D0"/>
+                        <a:srgbClr val="97BBED"/>
                       </a:solidFill>
                       <a:prstDash val="solid"/>
                     </a:lnL>
                     <a:lnR w="9525" cap="flat" cmpd="sng" algn="ctr">
                       <a:solidFill>
-                        <a:srgbClr val="4981D0"/>
+                        <a:srgbClr val="97BBED"/>
                       </a:solidFill>
                       <a:prstDash val="solid"/>
                     </a:lnR>
                     <a:lnT w="9525" cap="flat" cmpd="sng" algn="ctr">
                       <a:solidFill>
-                        <a:srgbClr val="4981D0"/>
+                        <a:srgbClr val="97BBED"/>
                       </a:solidFill>
                       <a:prstDash val="solid"/>
                     </a:lnT>
                     <a:lnB w="9525" cap="flat" cmpd="sng" algn="ctr">
                       <a:solidFill>
-                        <a:srgbClr val="4981D0"/>
+                        <a:srgbClr val="97BBED"/>
                       </a:solidFill>
                       <a:prstDash val="solid"/>
                     </a:lnB>
                     <a:solidFill>
-                      <a:srgbClr val="4981D0"/>
+                      <a:srgbClr val="97BBED"/>
                     </a:solidFill>
                   </a:tcPr>
                 </a:tc>
@@ -3668,7 +3812,7 @@
                       <a:r>
                         <a:rPr sz="1600" b="1">
                           <a:solidFill>
-                            <a:srgbClr val="FFFFFF"/>
+                            <a:srgbClr val="26231F"/>
                           </a:solidFill>
                         </a:rPr>
                         <a:t>엄마</a:t>
@@ -3678,30 +3822,30 @@
                   <a:tcPr anchor="ctr" marL="73152" marR="73152">
                     <a:lnL w="9525" cap="flat" cmpd="sng" algn="ctr">
                       <a:solidFill>
-                        <a:srgbClr val="4981D0"/>
+                        <a:srgbClr val="97BBED"/>
                       </a:solidFill>
                       <a:prstDash val="solid"/>
                     </a:lnL>
                     <a:lnR w="9525" cap="flat" cmpd="sng" algn="ctr">
                       <a:solidFill>
-                        <a:srgbClr val="4981D0"/>
+                        <a:srgbClr val="97BBED"/>
                       </a:solidFill>
                       <a:prstDash val="solid"/>
                     </a:lnR>
                     <a:lnT w="9525" cap="flat" cmpd="sng" algn="ctr">
                       <a:solidFill>
-                        <a:srgbClr val="4981D0"/>
+                        <a:srgbClr val="97BBED"/>
                       </a:solidFill>
                       <a:prstDash val="solid"/>
                     </a:lnT>
                     <a:lnB w="9525" cap="flat" cmpd="sng" algn="ctr">
                       <a:solidFill>
-                        <a:srgbClr val="4981D0"/>
+                        <a:srgbClr val="97BBED"/>
                       </a:solidFill>
                       <a:prstDash val="solid"/>
                     </a:lnB>
                     <a:solidFill>
-                      <a:srgbClr val="4981D0"/>
+                      <a:srgbClr val="97BBED"/>
                     </a:solidFill>
                   </a:tcPr>
                 </a:tc>
@@ -3714,7 +3858,7 @@
                       <a:r>
                         <a:rPr sz="1600" b="1">
                           <a:solidFill>
-                            <a:srgbClr val="FFFFFF"/>
+                            <a:srgbClr val="26231F"/>
                           </a:solidFill>
                         </a:rPr>
                         <a:t>자녀</a:t>
@@ -3724,30 +3868,30 @@
                   <a:tcPr anchor="ctr" marL="73152" marR="73152">
                     <a:lnL w="9525" cap="flat" cmpd="sng" algn="ctr">
                       <a:solidFill>
-                        <a:srgbClr val="4981D0"/>
+                        <a:srgbClr val="97BBED"/>
                       </a:solidFill>
                       <a:prstDash val="solid"/>
                     </a:lnL>
                     <a:lnR w="9525" cap="flat" cmpd="sng" algn="ctr">
                       <a:solidFill>
-                        <a:srgbClr val="4981D0"/>
+                        <a:srgbClr val="97BBED"/>
                       </a:solidFill>
                       <a:prstDash val="solid"/>
                     </a:lnR>
                     <a:lnT w="9525" cap="flat" cmpd="sng" algn="ctr">
                       <a:solidFill>
-                        <a:srgbClr val="4981D0"/>
+                        <a:srgbClr val="97BBED"/>
                       </a:solidFill>
                       <a:prstDash val="solid"/>
                     </a:lnT>
                     <a:lnB w="9525" cap="flat" cmpd="sng" algn="ctr">
                       <a:solidFill>
-                        <a:srgbClr val="4981D0"/>
+                        <a:srgbClr val="97BBED"/>
                       </a:solidFill>
                       <a:prstDash val="solid"/>
                     </a:lnB>
                     <a:solidFill>
-                      <a:srgbClr val="4981D0"/>
+                      <a:srgbClr val="97BBED"/>
                     </a:solidFill>
                   </a:tcPr>
                 </a:tc>
@@ -3762,7 +3906,7 @@
                       <a:r>
                         <a:rPr sz="1600" b="1">
                           <a:solidFill>
-                            <a:srgbClr val="1D4072"/>
+                            <a:srgbClr val="273549"/>
                           </a:solidFill>
                         </a:rPr>
                         <a:t>이름</a:t>
@@ -3772,30 +3916,30 @@
                   <a:tcPr anchor="ctr" marL="73152" marR="73152">
                     <a:lnL w="9525" cap="flat" cmpd="sng" algn="ctr">
                       <a:solidFill>
-                        <a:srgbClr val="D4E3F7"/>
+                        <a:srgbClr val="D1E2FA"/>
                       </a:solidFill>
                       <a:prstDash val="solid"/>
                     </a:lnL>
                     <a:lnR w="9525" cap="flat" cmpd="sng" algn="ctr">
                       <a:solidFill>
-                        <a:srgbClr val="D4E3F7"/>
+                        <a:srgbClr val="D1E2FA"/>
                       </a:solidFill>
                       <a:prstDash val="solid"/>
                     </a:lnR>
                     <a:lnT w="9525" cap="flat" cmpd="sng" algn="ctr">
                       <a:solidFill>
-                        <a:srgbClr val="D4E3F7"/>
+                        <a:srgbClr val="D1E2FA"/>
                       </a:solidFill>
                       <a:prstDash val="solid"/>
                     </a:lnT>
                     <a:lnB w="9525" cap="flat" cmpd="sng" algn="ctr">
                       <a:solidFill>
-                        <a:srgbClr val="D4E3F7"/>
+                        <a:srgbClr val="D1E2FA"/>
                       </a:solidFill>
                       <a:prstDash val="solid"/>
                     </a:lnB>
                     <a:solidFill>
-                      <a:srgbClr val="D4E3F7"/>
+                      <a:srgbClr val="D1E2FA"/>
                     </a:solidFill>
                   </a:tcPr>
                 </a:tc>
@@ -3808,7 +3952,7 @@
                       <a:r>
                         <a:rPr sz="1600" b="0">
                           <a:solidFill>
-                            <a:srgbClr val="2B2B2B"/>
+                            <a:srgbClr val="26231F"/>
                           </a:solidFill>
                         </a:rPr>
                         <a:t/>
@@ -3818,25 +3962,25 @@
                   <a:tcPr anchor="ctr" marL="73152" marR="73152">
                     <a:lnL w="9525" cap="flat" cmpd="sng" algn="ctr">
                       <a:solidFill>
-                        <a:srgbClr val="D4E3F7"/>
+                        <a:srgbClr val="D1E2FA"/>
                       </a:solidFill>
                       <a:prstDash val="solid"/>
                     </a:lnL>
                     <a:lnR w="9525" cap="flat" cmpd="sng" algn="ctr">
                       <a:solidFill>
-                        <a:srgbClr val="D4E3F7"/>
+                        <a:srgbClr val="D1E2FA"/>
                       </a:solidFill>
                       <a:prstDash val="solid"/>
                     </a:lnR>
                     <a:lnT w="9525" cap="flat" cmpd="sng" algn="ctr">
                       <a:solidFill>
-                        <a:srgbClr val="D4E3F7"/>
+                        <a:srgbClr val="D1E2FA"/>
                       </a:solidFill>
                       <a:prstDash val="solid"/>
                     </a:lnT>
                     <a:lnB w="9525" cap="flat" cmpd="sng" algn="ctr">
                       <a:solidFill>
-                        <a:srgbClr val="D4E3F7"/>
+                        <a:srgbClr val="D1E2FA"/>
                       </a:solidFill>
                       <a:prstDash val="solid"/>
                     </a:lnB>
@@ -3854,7 +3998,7 @@
                       <a:r>
                         <a:rPr sz="1600" b="0">
                           <a:solidFill>
-                            <a:srgbClr val="2B2B2B"/>
+                            <a:srgbClr val="26231F"/>
                           </a:solidFill>
                         </a:rPr>
                         <a:t/>
@@ -3864,25 +4008,25 @@
                   <a:tcPr anchor="ctr" marL="73152" marR="73152">
                     <a:lnL w="9525" cap="flat" cmpd="sng" algn="ctr">
                       <a:solidFill>
-                        <a:srgbClr val="D4E3F7"/>
+                        <a:srgbClr val="D1E2FA"/>
                       </a:solidFill>
                       <a:prstDash val="solid"/>
                     </a:lnL>
                     <a:lnR w="9525" cap="flat" cmpd="sng" algn="ctr">
                       <a:solidFill>
-                        <a:srgbClr val="D4E3F7"/>
+                        <a:srgbClr val="D1E2FA"/>
                       </a:solidFill>
                       <a:prstDash val="solid"/>
                     </a:lnR>
                     <a:lnT w="9525" cap="flat" cmpd="sng" algn="ctr">
                       <a:solidFill>
-                        <a:srgbClr val="D4E3F7"/>
+                        <a:srgbClr val="D1E2FA"/>
                       </a:solidFill>
                       <a:prstDash val="solid"/>
                     </a:lnT>
                     <a:lnB w="9525" cap="flat" cmpd="sng" algn="ctr">
                       <a:solidFill>
-                        <a:srgbClr val="D4E3F7"/>
+                        <a:srgbClr val="D1E2FA"/>
                       </a:solidFill>
                       <a:prstDash val="solid"/>
                     </a:lnB>
@@ -3900,7 +4044,7 @@
                       <a:r>
                         <a:rPr sz="1600" b="0">
                           <a:solidFill>
-                            <a:srgbClr val="2B2B2B"/>
+                            <a:srgbClr val="26231F"/>
                           </a:solidFill>
                         </a:rPr>
                         <a:t/>
@@ -3910,25 +4054,25 @@
                   <a:tcPr anchor="ctr" marL="73152" marR="73152">
                     <a:lnL w="9525" cap="flat" cmpd="sng" algn="ctr">
                       <a:solidFill>
-                        <a:srgbClr val="D4E3F7"/>
+                        <a:srgbClr val="D1E2FA"/>
                       </a:solidFill>
                       <a:prstDash val="solid"/>
                     </a:lnL>
                     <a:lnR w="9525" cap="flat" cmpd="sng" algn="ctr">
                       <a:solidFill>
-                        <a:srgbClr val="D4E3F7"/>
+                        <a:srgbClr val="D1E2FA"/>
                       </a:solidFill>
                       <a:prstDash val="solid"/>
                     </a:lnR>
                     <a:lnT w="9525" cap="flat" cmpd="sng" algn="ctr">
                       <a:solidFill>
-                        <a:srgbClr val="D4E3F7"/>
+                        <a:srgbClr val="D1E2FA"/>
                       </a:solidFill>
                       <a:prstDash val="solid"/>
                     </a:lnT>
                     <a:lnB w="9525" cap="flat" cmpd="sng" algn="ctr">
                       <a:solidFill>
-                        <a:srgbClr val="D4E3F7"/>
+                        <a:srgbClr val="D1E2FA"/>
                       </a:solidFill>
                       <a:prstDash val="solid"/>
                     </a:lnB>
@@ -3948,7 +4092,7 @@
                       <a:r>
                         <a:rPr sz="1600" b="1">
                           <a:solidFill>
-                            <a:srgbClr val="1D4072"/>
+                            <a:srgbClr val="273549"/>
                           </a:solidFill>
                         </a:rPr>
                         <a:t>나이</a:t>
@@ -3958,30 +4102,30 @@
                   <a:tcPr anchor="ctr" marL="73152" marR="73152">
                     <a:lnL w="9525" cap="flat" cmpd="sng" algn="ctr">
                       <a:solidFill>
-                        <a:srgbClr val="D4E3F7"/>
+                        <a:srgbClr val="D1E2FA"/>
                       </a:solidFill>
                       <a:prstDash val="solid"/>
                     </a:lnL>
                     <a:lnR w="9525" cap="flat" cmpd="sng" algn="ctr">
                       <a:solidFill>
-                        <a:srgbClr val="D4E3F7"/>
+                        <a:srgbClr val="D1E2FA"/>
                       </a:solidFill>
                       <a:prstDash val="solid"/>
                     </a:lnR>
                     <a:lnT w="9525" cap="flat" cmpd="sng" algn="ctr">
                       <a:solidFill>
-                        <a:srgbClr val="D4E3F7"/>
+                        <a:srgbClr val="D1E2FA"/>
                       </a:solidFill>
                       <a:prstDash val="solid"/>
                     </a:lnT>
                     <a:lnB w="9525" cap="flat" cmpd="sng" algn="ctr">
                       <a:solidFill>
-                        <a:srgbClr val="D4E3F7"/>
+                        <a:srgbClr val="D1E2FA"/>
                       </a:solidFill>
                       <a:prstDash val="solid"/>
                     </a:lnB>
                     <a:solidFill>
-                      <a:srgbClr val="D4E3F7"/>
+                      <a:srgbClr val="D1E2FA"/>
                     </a:solidFill>
                   </a:tcPr>
                 </a:tc>
@@ -3994,7 +4138,7 @@
                       <a:r>
                         <a:rPr sz="1600" b="0">
                           <a:solidFill>
-                            <a:srgbClr val="2B2B2B"/>
+                            <a:srgbClr val="26231F"/>
                           </a:solidFill>
                         </a:rPr>
                         <a:t/>
@@ -4004,30 +4148,30 @@
                   <a:tcPr anchor="ctr" marL="73152" marR="73152">
                     <a:lnL w="9525" cap="flat" cmpd="sng" algn="ctr">
                       <a:solidFill>
-                        <a:srgbClr val="D4E3F7"/>
+                        <a:srgbClr val="D1E2FA"/>
                       </a:solidFill>
                       <a:prstDash val="solid"/>
                     </a:lnL>
                     <a:lnR w="9525" cap="flat" cmpd="sng" algn="ctr">
                       <a:solidFill>
-                        <a:srgbClr val="D4E3F7"/>
+                        <a:srgbClr val="D1E2FA"/>
                       </a:solidFill>
                       <a:prstDash val="solid"/>
                     </a:lnR>
                     <a:lnT w="9525" cap="flat" cmpd="sng" algn="ctr">
                       <a:solidFill>
-                        <a:srgbClr val="D4E3F7"/>
+                        <a:srgbClr val="D1E2FA"/>
                       </a:solidFill>
                       <a:prstDash val="solid"/>
                     </a:lnT>
                     <a:lnB w="9525" cap="flat" cmpd="sng" algn="ctr">
                       <a:solidFill>
-                        <a:srgbClr val="D4E3F7"/>
+                        <a:srgbClr val="D1E2FA"/>
                       </a:solidFill>
                       <a:prstDash val="solid"/>
                     </a:lnB>
                     <a:solidFill>
-                      <a:srgbClr val="F3F7FC"/>
+                      <a:srgbClr val="EAF2FD"/>
                     </a:solidFill>
                   </a:tcPr>
                 </a:tc>
@@ -4040,7 +4184,7 @@
                       <a:r>
                         <a:rPr sz="1600" b="0">
                           <a:solidFill>
-                            <a:srgbClr val="2B2B2B"/>
+                            <a:srgbClr val="26231F"/>
                           </a:solidFill>
                         </a:rPr>
                         <a:t/>
@@ -4050,30 +4194,30 @@
                   <a:tcPr anchor="ctr" marL="73152" marR="73152">
                     <a:lnL w="9525" cap="flat" cmpd="sng" algn="ctr">
                       <a:solidFill>
-                        <a:srgbClr val="D4E3F7"/>
+                        <a:srgbClr val="D1E2FA"/>
                       </a:solidFill>
                       <a:prstDash val="solid"/>
                     </a:lnL>
                     <a:lnR w="9525" cap="flat" cmpd="sng" algn="ctr">
                       <a:solidFill>
-                        <a:srgbClr val="D4E3F7"/>
+                        <a:srgbClr val="D1E2FA"/>
                       </a:solidFill>
                       <a:prstDash val="solid"/>
                     </a:lnR>
                     <a:lnT w="9525" cap="flat" cmpd="sng" algn="ctr">
                       <a:solidFill>
-                        <a:srgbClr val="D4E3F7"/>
+                        <a:srgbClr val="D1E2FA"/>
                       </a:solidFill>
                       <a:prstDash val="solid"/>
                     </a:lnT>
                     <a:lnB w="9525" cap="flat" cmpd="sng" algn="ctr">
                       <a:solidFill>
-                        <a:srgbClr val="D4E3F7"/>
+                        <a:srgbClr val="D1E2FA"/>
                       </a:solidFill>
                       <a:prstDash val="solid"/>
                     </a:lnB>
                     <a:solidFill>
-                      <a:srgbClr val="F3F7FC"/>
+                      <a:srgbClr val="EAF2FD"/>
                     </a:solidFill>
                   </a:tcPr>
                 </a:tc>
@@ -4086,7 +4230,7 @@
                       <a:r>
                         <a:rPr sz="1600" b="0">
                           <a:solidFill>
-                            <a:srgbClr val="2B2B2B"/>
+                            <a:srgbClr val="26231F"/>
                           </a:solidFill>
                         </a:rPr>
                         <a:t/>
@@ -4096,30 +4240,30 @@
                   <a:tcPr anchor="ctr" marL="73152" marR="73152">
                     <a:lnL w="9525" cap="flat" cmpd="sng" algn="ctr">
                       <a:solidFill>
-                        <a:srgbClr val="D4E3F7"/>
+                        <a:srgbClr val="D1E2FA"/>
                       </a:solidFill>
                       <a:prstDash val="solid"/>
                     </a:lnL>
                     <a:lnR w="9525" cap="flat" cmpd="sng" algn="ctr">
                       <a:solidFill>
-                        <a:srgbClr val="D4E3F7"/>
+                        <a:srgbClr val="D1E2FA"/>
                       </a:solidFill>
                       <a:prstDash val="solid"/>
                     </a:lnR>
                     <a:lnT w="9525" cap="flat" cmpd="sng" algn="ctr">
                       <a:solidFill>
-                        <a:srgbClr val="D4E3F7"/>
+                        <a:srgbClr val="D1E2FA"/>
                       </a:solidFill>
                       <a:prstDash val="solid"/>
                     </a:lnT>
                     <a:lnB w="9525" cap="flat" cmpd="sng" algn="ctr">
                       <a:solidFill>
-                        <a:srgbClr val="D4E3F7"/>
+                        <a:srgbClr val="D1E2FA"/>
                       </a:solidFill>
                       <a:prstDash val="solid"/>
                     </a:lnB>
                     <a:solidFill>
-                      <a:srgbClr val="F3F7FC"/>
+                      <a:srgbClr val="EAF2FD"/>
                     </a:solidFill>
                   </a:tcPr>
                 </a:tc>
@@ -4134,7 +4278,7 @@
                       <a:r>
                         <a:rPr sz="1600" b="1">
                           <a:solidFill>
-                            <a:srgbClr val="1D4072"/>
+                            <a:srgbClr val="273549"/>
                           </a:solidFill>
                         </a:rPr>
                         <a:t>직업·학교</a:t>
@@ -4144,30 +4288,30 @@
                   <a:tcPr anchor="ctr" marL="73152" marR="73152">
                     <a:lnL w="9525" cap="flat" cmpd="sng" algn="ctr">
                       <a:solidFill>
-                        <a:srgbClr val="D4E3F7"/>
+                        <a:srgbClr val="D1E2FA"/>
                       </a:solidFill>
                       <a:prstDash val="solid"/>
                     </a:lnL>
                     <a:lnR w="9525" cap="flat" cmpd="sng" algn="ctr">
                       <a:solidFill>
-                        <a:srgbClr val="D4E3F7"/>
+                        <a:srgbClr val="D1E2FA"/>
                       </a:solidFill>
                       <a:prstDash val="solid"/>
                     </a:lnR>
                     <a:lnT w="9525" cap="flat" cmpd="sng" algn="ctr">
                       <a:solidFill>
-                        <a:srgbClr val="D4E3F7"/>
+                        <a:srgbClr val="D1E2FA"/>
                       </a:solidFill>
                       <a:prstDash val="solid"/>
                     </a:lnT>
                     <a:lnB w="9525" cap="flat" cmpd="sng" algn="ctr">
                       <a:solidFill>
-                        <a:srgbClr val="D4E3F7"/>
+                        <a:srgbClr val="D1E2FA"/>
                       </a:solidFill>
                       <a:prstDash val="solid"/>
                     </a:lnB>
                     <a:solidFill>
-                      <a:srgbClr val="D4E3F7"/>
+                      <a:srgbClr val="D1E2FA"/>
                     </a:solidFill>
                   </a:tcPr>
                 </a:tc>
@@ -4180,7 +4324,7 @@
                       <a:r>
                         <a:rPr sz="1600" b="0">
                           <a:solidFill>
-                            <a:srgbClr val="2B2B2B"/>
+                            <a:srgbClr val="26231F"/>
                           </a:solidFill>
                         </a:rPr>
                         <a:t/>
@@ -4190,25 +4334,25 @@
                   <a:tcPr anchor="ctr" marL="73152" marR="73152">
                     <a:lnL w="9525" cap="flat" cmpd="sng" algn="ctr">
                       <a:solidFill>
-                        <a:srgbClr val="D4E3F7"/>
+                        <a:srgbClr val="D1E2FA"/>
                       </a:solidFill>
                       <a:prstDash val="solid"/>
                     </a:lnL>
                     <a:lnR w="9525" cap="flat" cmpd="sng" algn="ctr">
                       <a:solidFill>
-                        <a:srgbClr val="D4E3F7"/>
+                        <a:srgbClr val="D1E2FA"/>
                       </a:solidFill>
                       <a:prstDash val="solid"/>
                     </a:lnR>
                     <a:lnT w="9525" cap="flat" cmpd="sng" algn="ctr">
                       <a:solidFill>
-                        <a:srgbClr val="D4E3F7"/>
+                        <a:srgbClr val="D1E2FA"/>
                       </a:solidFill>
                       <a:prstDash val="solid"/>
                     </a:lnT>
                     <a:lnB w="9525" cap="flat" cmpd="sng" algn="ctr">
                       <a:solidFill>
-                        <a:srgbClr val="D4E3F7"/>
+                        <a:srgbClr val="D1E2FA"/>
                       </a:solidFill>
                       <a:prstDash val="solid"/>
                     </a:lnB>
@@ -4226,7 +4370,7 @@
                       <a:r>
                         <a:rPr sz="1600" b="0">
                           <a:solidFill>
-                            <a:srgbClr val="2B2B2B"/>
+                            <a:srgbClr val="26231F"/>
                           </a:solidFill>
                         </a:rPr>
                         <a:t/>
@@ -4236,25 +4380,25 @@
                   <a:tcPr anchor="ctr" marL="73152" marR="73152">
                     <a:lnL w="9525" cap="flat" cmpd="sng" algn="ctr">
                       <a:solidFill>
-                        <a:srgbClr val="D4E3F7"/>
+                        <a:srgbClr val="D1E2FA"/>
                       </a:solidFill>
                       <a:prstDash val="solid"/>
                     </a:lnL>
                     <a:lnR w="9525" cap="flat" cmpd="sng" algn="ctr">
                       <a:solidFill>
-                        <a:srgbClr val="D4E3F7"/>
+                        <a:srgbClr val="D1E2FA"/>
                       </a:solidFill>
                       <a:prstDash val="solid"/>
                     </a:lnR>
                     <a:lnT w="9525" cap="flat" cmpd="sng" algn="ctr">
                       <a:solidFill>
-                        <a:srgbClr val="D4E3F7"/>
+                        <a:srgbClr val="D1E2FA"/>
                       </a:solidFill>
                       <a:prstDash val="solid"/>
                     </a:lnT>
                     <a:lnB w="9525" cap="flat" cmpd="sng" algn="ctr">
                       <a:solidFill>
-                        <a:srgbClr val="D4E3F7"/>
+                        <a:srgbClr val="D1E2FA"/>
                       </a:solidFill>
                       <a:prstDash val="solid"/>
                     </a:lnB>
@@ -4272,7 +4416,7 @@
                       <a:r>
                         <a:rPr sz="1600" b="0">
                           <a:solidFill>
-                            <a:srgbClr val="2B2B2B"/>
+                            <a:srgbClr val="26231F"/>
                           </a:solidFill>
                         </a:rPr>
                         <a:t/>
@@ -4282,25 +4426,25 @@
                   <a:tcPr anchor="ctr" marL="73152" marR="73152">
                     <a:lnL w="9525" cap="flat" cmpd="sng" algn="ctr">
                       <a:solidFill>
-                        <a:srgbClr val="D4E3F7"/>
+                        <a:srgbClr val="D1E2FA"/>
                       </a:solidFill>
                       <a:prstDash val="solid"/>
                     </a:lnL>
                     <a:lnR w="9525" cap="flat" cmpd="sng" algn="ctr">
                       <a:solidFill>
-                        <a:srgbClr val="D4E3F7"/>
+                        <a:srgbClr val="D1E2FA"/>
                       </a:solidFill>
                       <a:prstDash val="solid"/>
                     </a:lnR>
                     <a:lnT w="9525" cap="flat" cmpd="sng" algn="ctr">
                       <a:solidFill>
-                        <a:srgbClr val="D4E3F7"/>
+                        <a:srgbClr val="D1E2FA"/>
                       </a:solidFill>
                       <a:prstDash val="solid"/>
                     </a:lnT>
                     <a:lnB w="9525" cap="flat" cmpd="sng" algn="ctr">
                       <a:solidFill>
-                        <a:srgbClr val="D4E3F7"/>
+                        <a:srgbClr val="D1E2FA"/>
                       </a:solidFill>
                       <a:prstDash val="solid"/>
                     </a:lnB>
@@ -4320,7 +4464,7 @@
                       <a:r>
                         <a:rPr sz="1600" b="1">
                           <a:solidFill>
-                            <a:srgbClr val="1D4072"/>
+                            <a:srgbClr val="273549"/>
                           </a:solidFill>
                         </a:rPr>
                         <a:t>메모</a:t>
@@ -4330,30 +4474,30 @@
                   <a:tcPr anchor="ctr" marL="73152" marR="73152">
                     <a:lnL w="9525" cap="flat" cmpd="sng" algn="ctr">
                       <a:solidFill>
-                        <a:srgbClr val="D4E3F7"/>
+                        <a:srgbClr val="D1E2FA"/>
                       </a:solidFill>
                       <a:prstDash val="solid"/>
                     </a:lnL>
                     <a:lnR w="9525" cap="flat" cmpd="sng" algn="ctr">
                       <a:solidFill>
-                        <a:srgbClr val="D4E3F7"/>
+                        <a:srgbClr val="D1E2FA"/>
                       </a:solidFill>
                       <a:prstDash val="solid"/>
                     </a:lnR>
                     <a:lnT w="9525" cap="flat" cmpd="sng" algn="ctr">
                       <a:solidFill>
-                        <a:srgbClr val="D4E3F7"/>
+                        <a:srgbClr val="D1E2FA"/>
                       </a:solidFill>
                       <a:prstDash val="solid"/>
                     </a:lnT>
                     <a:lnB w="9525" cap="flat" cmpd="sng" algn="ctr">
                       <a:solidFill>
-                        <a:srgbClr val="D4E3F7"/>
+                        <a:srgbClr val="D1E2FA"/>
                       </a:solidFill>
                       <a:prstDash val="solid"/>
                     </a:lnB>
                     <a:solidFill>
-                      <a:srgbClr val="D4E3F7"/>
+                      <a:srgbClr val="D1E2FA"/>
                     </a:solidFill>
                   </a:tcPr>
                 </a:tc>
@@ -4366,7 +4510,7 @@
                       <a:r>
                         <a:rPr sz="1600" b="0">
                           <a:solidFill>
-                            <a:srgbClr val="2B2B2B"/>
+                            <a:srgbClr val="26231F"/>
                           </a:solidFill>
                         </a:rPr>
                         <a:t/>
@@ -4376,30 +4520,30 @@
                   <a:tcPr anchor="ctr" marL="73152" marR="73152">
                     <a:lnL w="9525" cap="flat" cmpd="sng" algn="ctr">
                       <a:solidFill>
-                        <a:srgbClr val="D4E3F7"/>
+                        <a:srgbClr val="D1E2FA"/>
                       </a:solidFill>
                       <a:prstDash val="solid"/>
                     </a:lnL>
                     <a:lnR w="9525" cap="flat" cmpd="sng" algn="ctr">
                       <a:solidFill>
-                        <a:srgbClr val="D4E3F7"/>
+                        <a:srgbClr val="D1E2FA"/>
                       </a:solidFill>
                       <a:prstDash val="solid"/>
                     </a:lnR>
                     <a:lnT w="9525" cap="flat" cmpd="sng" algn="ctr">
                       <a:solidFill>
-                        <a:srgbClr val="D4E3F7"/>
+                        <a:srgbClr val="D1E2FA"/>
                       </a:solidFill>
                       <a:prstDash val="solid"/>
                     </a:lnT>
                     <a:lnB w="9525" cap="flat" cmpd="sng" algn="ctr">
                       <a:solidFill>
-                        <a:srgbClr val="D4E3F7"/>
+                        <a:srgbClr val="D1E2FA"/>
                       </a:solidFill>
                       <a:prstDash val="solid"/>
                     </a:lnB>
                     <a:solidFill>
-                      <a:srgbClr val="F3F7FC"/>
+                      <a:srgbClr val="EAF2FD"/>
                     </a:solidFill>
                   </a:tcPr>
                 </a:tc>
@@ -4412,7 +4556,7 @@
                       <a:r>
                         <a:rPr sz="1600" b="0">
                           <a:solidFill>
-                            <a:srgbClr val="2B2B2B"/>
+                            <a:srgbClr val="26231F"/>
                           </a:solidFill>
                         </a:rPr>
                         <a:t/>
@@ -4422,30 +4566,30 @@
                   <a:tcPr anchor="ctr" marL="73152" marR="73152">
                     <a:lnL w="9525" cap="flat" cmpd="sng" algn="ctr">
                       <a:solidFill>
-                        <a:srgbClr val="D4E3F7"/>
+                        <a:srgbClr val="D1E2FA"/>
                       </a:solidFill>
                       <a:prstDash val="solid"/>
                     </a:lnL>
                     <a:lnR w="9525" cap="flat" cmpd="sng" algn="ctr">
                       <a:solidFill>
-                        <a:srgbClr val="D4E3F7"/>
+                        <a:srgbClr val="D1E2FA"/>
                       </a:solidFill>
                       <a:prstDash val="solid"/>
                     </a:lnR>
                     <a:lnT w="9525" cap="flat" cmpd="sng" algn="ctr">
                       <a:solidFill>
-                        <a:srgbClr val="D4E3F7"/>
+                        <a:srgbClr val="D1E2FA"/>
                       </a:solidFill>
                       <a:prstDash val="solid"/>
                     </a:lnT>
                     <a:lnB w="9525" cap="flat" cmpd="sng" algn="ctr">
                       <a:solidFill>
-                        <a:srgbClr val="D4E3F7"/>
+                        <a:srgbClr val="D1E2FA"/>
                       </a:solidFill>
                       <a:prstDash val="solid"/>
                     </a:lnB>
                     <a:solidFill>
-                      <a:srgbClr val="F3F7FC"/>
+                      <a:srgbClr val="EAF2FD"/>
                     </a:solidFill>
                   </a:tcPr>
                 </a:tc>
@@ -4458,7 +4602,7 @@
                       <a:r>
                         <a:rPr sz="1600" b="0">
                           <a:solidFill>
-                            <a:srgbClr val="2B2B2B"/>
+                            <a:srgbClr val="26231F"/>
                           </a:solidFill>
                         </a:rPr>
                         <a:t/>
@@ -4468,30 +4612,30 @@
                   <a:tcPr anchor="ctr" marL="73152" marR="73152">
                     <a:lnL w="9525" cap="flat" cmpd="sng" algn="ctr">
                       <a:solidFill>
-                        <a:srgbClr val="D4E3F7"/>
+                        <a:srgbClr val="D1E2FA"/>
                       </a:solidFill>
                       <a:prstDash val="solid"/>
                     </a:lnL>
                     <a:lnR w="9525" cap="flat" cmpd="sng" algn="ctr">
                       <a:solidFill>
-                        <a:srgbClr val="D4E3F7"/>
+                        <a:srgbClr val="D1E2FA"/>
                       </a:solidFill>
                       <a:prstDash val="solid"/>
                     </a:lnR>
                     <a:lnT w="9525" cap="flat" cmpd="sng" algn="ctr">
                       <a:solidFill>
-                        <a:srgbClr val="D4E3F7"/>
+                        <a:srgbClr val="D1E2FA"/>
                       </a:solidFill>
                       <a:prstDash val="solid"/>
                     </a:lnT>
                     <a:lnB w="9525" cap="flat" cmpd="sng" algn="ctr">
                       <a:solidFill>
-                        <a:srgbClr val="D4E3F7"/>
+                        <a:srgbClr val="D1E2FA"/>
                       </a:solidFill>
                       <a:prstDash val="solid"/>
                     </a:lnB>
                     <a:solidFill>
-                      <a:srgbClr val="F3F7FC"/>
+                      <a:srgbClr val="EAF2FD"/>
                     </a:solidFill>
                   </a:tcPr>
                 </a:tc>
@@ -4514,7 +4658,7 @@
     <p:bg>
       <p:bgPr>
         <a:solidFill>
-          <a:srgbClr val="F3F7FC"/>
+          <a:srgbClr val="FAFBFD"/>
         </a:solidFill>
         <a:effectLst/>
       </p:bgPr>
@@ -4533,18 +4677,82 @@
           <p:nvPr/>
         </p:nvSpPr>
         <p:spPr>
-          <a:xfrm rot="10800000">
-            <a:off x="10637215" y="0"/>
-            <a:ext cx="914400" cy="1554480"/>
-          </a:xfrm>
-          <a:prstGeom prst="round2SameRect">
-            <a:avLst>
-              <a:gd name="adj1" fmla="val 50000"/>
-              <a:gd name="adj2" fmla="val 0"/>
-            </a:avLst>
+          <a:xfrm>
+            <a:off x="10180015" y="-1645920"/>
+            <a:ext cx="3474720" cy="3474720"/>
+          </a:xfrm>
+          <a:prstGeom prst="ellipse">
+            <a:avLst/>
           </a:prstGeom>
           <a:solidFill>
-            <a:srgbClr val="D4E3F7"/>
+            <a:srgbClr val="A6C6F2"/>
+          </a:solidFill>
+          <a:ln>
+            <a:noFill/>
+          </a:ln>
+        </p:spPr>
+        <p:txBody>
+          <a:bodyPr rtlCol="0" anchor="ctr"/>
+          <a:lstStyle/>
+          <a:p>
+            <a:pPr algn="ctr"/>
+          </a:p>
+        </p:txBody>
+      </p:sp>
+      <p:sp>
+        <p:nvSpPr>
+          <p:cNvPr id="4" name="상단 라벨"/>
+          <p:cNvSpPr txBox="1"/>
+          <p:nvPr/>
+        </p:nvSpPr>
+        <p:spPr>
+          <a:xfrm>
+            <a:off x="640080" y="274320"/>
+            <a:ext cx="5486400" cy="274320"/>
+          </a:xfrm>
+          <a:prstGeom prst="rect">
+            <a:avLst/>
+          </a:prstGeom>
+          <a:noFill/>
+        </p:spPr>
+        <p:txBody>
+          <a:bodyPr wrap="square" lIns="54864" rIns="54864" tIns="27432" bIns="27432" anchor="ctr">
+            <a:noAutofit/>
+          </a:bodyPr>
+          <a:lstStyle/>
+          <a:p>
+            <a:pPr algn="l">
+              <a:lnSpc>
+                <a:spcPct val="115000"/>
+              </a:lnSpc>
+            </a:pPr>
+            <a:r>
+              <a:rPr sz="900" b="1" i="0" spc="250">
+                <a:solidFill>
+                  <a:srgbClr val="26231F"/>
+                </a:solidFill>
+              </a:rPr>
+              <a:t>INSURANCE CHECK</a:t>
+            </a:r>
+          </a:p>
+        </p:txBody>
+      </p:sp>
+      <p:sp>
+        <p:nvSpPr>
+          <p:cNvPr id="5" name="포인트"/>
+          <p:cNvSpPr/>
+          <p:nvPr/>
+        </p:nvSpPr>
+        <p:spPr>
+          <a:xfrm>
+            <a:off x="11048695" y="502919"/>
+            <a:ext cx="274320" cy="274320"/>
+          </a:xfrm>
+          <a:prstGeom prst="ellipse">
+            <a:avLst/>
+          </a:prstGeom>
+          <a:solidFill>
+            <a:srgbClr val="FFFFFF"/>
           </a:solidFill>
           <a:ln>
             <a:noFill/>
@@ -4570,8 +4778,8 @@
         </p:nvSpPr>
         <p:spPr>
           <a:xfrm>
-            <a:off x="640080" y="457200"/>
-            <a:ext cx="9722815" cy="868680"/>
+            <a:off x="640080" y="658368"/>
+            <a:ext cx="9082735" cy="868680"/>
           </a:xfrm>
         </p:spPr>
         <p:txBody>
@@ -4588,7 +4796,7 @@
             <a:r>
               <a:rPr sz="3000" b="1" i="0">
                 <a:solidFill>
-                  <a:srgbClr val="1D4072"/>
+                  <a:srgbClr val="26231F"/>
                 </a:solidFill>
               </a:rPr>
               <a:t>가입한 보험 목록</a:t>
@@ -4598,14 +4806,14 @@
       </p:sp>
       <p:graphicFrame>
         <p:nvGraphicFramePr>
-          <p:cNvPr id="4" name="표"/>
+          <p:cNvPr id="6" name="표"/>
           <p:cNvGraphicFramePr>
             <a:graphicFrameLocks noGrp="1"/>
           </p:cNvGraphicFramePr>
           <p:nvPr/>
         </p:nvGraphicFramePr>
         <p:xfrm>
-          <a:off x="640080" y="1600200"/>
+          <a:off x="640080" y="1783080"/>
           <a:ext cx="10911535" cy="4224528"/>
         </p:xfrm>
         <a:graphic>
@@ -4631,7 +4839,7 @@
                       <a:r>
                         <a:rPr sz="1400" b="1">
                           <a:solidFill>
-                            <a:srgbClr val="FFFFFF"/>
+                            <a:srgbClr val="26231F"/>
                           </a:solidFill>
                         </a:rPr>
                         <a:t>보험회사</a:t>
@@ -4641,30 +4849,30 @@
                   <a:tcPr anchor="ctr" marL="73152" marR="73152">
                     <a:lnL w="9525" cap="flat" cmpd="sng" algn="ctr">
                       <a:solidFill>
-                        <a:srgbClr val="4981D0"/>
+                        <a:srgbClr val="97BBED"/>
                       </a:solidFill>
                       <a:prstDash val="solid"/>
                     </a:lnL>
                     <a:lnR w="9525" cap="flat" cmpd="sng" algn="ctr">
                       <a:solidFill>
-                        <a:srgbClr val="4981D0"/>
+                        <a:srgbClr val="97BBED"/>
                       </a:solidFill>
                       <a:prstDash val="solid"/>
                     </a:lnR>
                     <a:lnT w="9525" cap="flat" cmpd="sng" algn="ctr">
                       <a:solidFill>
-                        <a:srgbClr val="4981D0"/>
+                        <a:srgbClr val="97BBED"/>
                       </a:solidFill>
                       <a:prstDash val="solid"/>
                     </a:lnT>
                     <a:lnB w="9525" cap="flat" cmpd="sng" algn="ctr">
                       <a:solidFill>
-                        <a:srgbClr val="4981D0"/>
+                        <a:srgbClr val="97BBED"/>
                       </a:solidFill>
                       <a:prstDash val="solid"/>
                     </a:lnB>
                     <a:solidFill>
-                      <a:srgbClr val="4981D0"/>
+                      <a:srgbClr val="97BBED"/>
                     </a:solidFill>
                   </a:tcPr>
                 </a:tc>
@@ -4677,7 +4885,7 @@
                       <a:r>
                         <a:rPr sz="1400" b="1">
                           <a:solidFill>
-                            <a:srgbClr val="FFFFFF"/>
+                            <a:srgbClr val="26231F"/>
                           </a:solidFill>
                         </a:rPr>
                         <a:t>상품명</a:t>
@@ -4687,30 +4895,30 @@
                   <a:tcPr anchor="ctr" marL="73152" marR="73152">
                     <a:lnL w="9525" cap="flat" cmpd="sng" algn="ctr">
                       <a:solidFill>
-                        <a:srgbClr val="4981D0"/>
+                        <a:srgbClr val="97BBED"/>
                       </a:solidFill>
                       <a:prstDash val="solid"/>
                     </a:lnL>
                     <a:lnR w="9525" cap="flat" cmpd="sng" algn="ctr">
                       <a:solidFill>
-                        <a:srgbClr val="4981D0"/>
+                        <a:srgbClr val="97BBED"/>
                       </a:solidFill>
                       <a:prstDash val="solid"/>
                     </a:lnR>
                     <a:lnT w="9525" cap="flat" cmpd="sng" algn="ctr">
                       <a:solidFill>
-                        <a:srgbClr val="4981D0"/>
+                        <a:srgbClr val="97BBED"/>
                       </a:solidFill>
                       <a:prstDash val="solid"/>
                     </a:lnT>
                     <a:lnB w="9525" cap="flat" cmpd="sng" algn="ctr">
                       <a:solidFill>
-                        <a:srgbClr val="4981D0"/>
+                        <a:srgbClr val="97BBED"/>
                       </a:solidFill>
                       <a:prstDash val="solid"/>
                     </a:lnB>
                     <a:solidFill>
-                      <a:srgbClr val="4981D0"/>
+                      <a:srgbClr val="97BBED"/>
                     </a:solidFill>
                   </a:tcPr>
                 </a:tc>
@@ -4723,7 +4931,7 @@
                       <a:r>
                         <a:rPr sz="1400" b="1">
                           <a:solidFill>
-                            <a:srgbClr val="FFFFFF"/>
+                            <a:srgbClr val="26231F"/>
                           </a:solidFill>
                         </a:rPr>
                         <a:t>종류</a:t>
@@ -4733,30 +4941,30 @@
                   <a:tcPr anchor="ctr" marL="73152" marR="73152">
                     <a:lnL w="9525" cap="flat" cmpd="sng" algn="ctr">
                       <a:solidFill>
-                        <a:srgbClr val="4981D0"/>
+                        <a:srgbClr val="97BBED"/>
                       </a:solidFill>
                       <a:prstDash val="solid"/>
                     </a:lnL>
                     <a:lnR w="9525" cap="flat" cmpd="sng" algn="ctr">
                       <a:solidFill>
-                        <a:srgbClr val="4981D0"/>
+                        <a:srgbClr val="97BBED"/>
                       </a:solidFill>
                       <a:prstDash val="solid"/>
                     </a:lnR>
                     <a:lnT w="9525" cap="flat" cmpd="sng" algn="ctr">
                       <a:solidFill>
-                        <a:srgbClr val="4981D0"/>
+                        <a:srgbClr val="97BBED"/>
                       </a:solidFill>
                       <a:prstDash val="solid"/>
                     </a:lnT>
                     <a:lnB w="9525" cap="flat" cmpd="sng" algn="ctr">
                       <a:solidFill>
-                        <a:srgbClr val="4981D0"/>
+                        <a:srgbClr val="97BBED"/>
                       </a:solidFill>
                       <a:prstDash val="solid"/>
                     </a:lnB>
                     <a:solidFill>
-                      <a:srgbClr val="4981D0"/>
+                      <a:srgbClr val="97BBED"/>
                     </a:solidFill>
                   </a:tcPr>
                 </a:tc>
@@ -4769,7 +4977,7 @@
                       <a:r>
                         <a:rPr sz="1400" b="1">
                           <a:solidFill>
-                            <a:srgbClr val="FFFFFF"/>
+                            <a:srgbClr val="26231F"/>
                           </a:solidFill>
                         </a:rPr>
                         <a:t>만기일</a:t>
@@ -4779,30 +4987,30 @@
                   <a:tcPr anchor="ctr" marL="73152" marR="73152">
                     <a:lnL w="9525" cap="flat" cmpd="sng" algn="ctr">
                       <a:solidFill>
-                        <a:srgbClr val="4981D0"/>
+                        <a:srgbClr val="97BBED"/>
                       </a:solidFill>
                       <a:prstDash val="solid"/>
                     </a:lnL>
                     <a:lnR w="9525" cap="flat" cmpd="sng" algn="ctr">
                       <a:solidFill>
-                        <a:srgbClr val="4981D0"/>
+                        <a:srgbClr val="97BBED"/>
                       </a:solidFill>
                       <a:prstDash val="solid"/>
                     </a:lnR>
                     <a:lnT w="9525" cap="flat" cmpd="sng" algn="ctr">
                       <a:solidFill>
-                        <a:srgbClr val="4981D0"/>
+                        <a:srgbClr val="97BBED"/>
                       </a:solidFill>
                       <a:prstDash val="solid"/>
                     </a:lnT>
                     <a:lnB w="9525" cap="flat" cmpd="sng" algn="ctr">
                       <a:solidFill>
-                        <a:srgbClr val="4981D0"/>
+                        <a:srgbClr val="97BBED"/>
                       </a:solidFill>
                       <a:prstDash val="solid"/>
                     </a:lnB>
                     <a:solidFill>
-                      <a:srgbClr val="4981D0"/>
+                      <a:srgbClr val="97BBED"/>
                     </a:solidFill>
                   </a:tcPr>
                 </a:tc>
@@ -4815,7 +5023,7 @@
                       <a:r>
                         <a:rPr sz="1400" b="1">
                           <a:solidFill>
-                            <a:srgbClr val="FFFFFF"/>
+                            <a:srgbClr val="26231F"/>
                           </a:solidFill>
                         </a:rPr>
                         <a:t>월 보험료</a:t>
@@ -4825,30 +5033,30 @@
                   <a:tcPr anchor="ctr" marL="73152" marR="73152">
                     <a:lnL w="9525" cap="flat" cmpd="sng" algn="ctr">
                       <a:solidFill>
-                        <a:srgbClr val="4981D0"/>
+                        <a:srgbClr val="97BBED"/>
                       </a:solidFill>
                       <a:prstDash val="solid"/>
                     </a:lnL>
                     <a:lnR w="9525" cap="flat" cmpd="sng" algn="ctr">
                       <a:solidFill>
-                        <a:srgbClr val="4981D0"/>
+                        <a:srgbClr val="97BBED"/>
                       </a:solidFill>
                       <a:prstDash val="solid"/>
                     </a:lnR>
                     <a:lnT w="9525" cap="flat" cmpd="sng" algn="ctr">
                       <a:solidFill>
-                        <a:srgbClr val="4981D0"/>
+                        <a:srgbClr val="97BBED"/>
                       </a:solidFill>
                       <a:prstDash val="solid"/>
                     </a:lnT>
                     <a:lnB w="9525" cap="flat" cmpd="sng" algn="ctr">
                       <a:solidFill>
-                        <a:srgbClr val="4981D0"/>
+                        <a:srgbClr val="97BBED"/>
                       </a:solidFill>
                       <a:prstDash val="solid"/>
                     </a:lnB>
                     <a:solidFill>
-                      <a:srgbClr val="4981D0"/>
+                      <a:srgbClr val="97BBED"/>
                     </a:solidFill>
                   </a:tcPr>
                 </a:tc>
@@ -4863,7 +5071,7 @@
                       <a:r>
                         <a:rPr sz="1400" b="0">
                           <a:solidFill>
-                            <a:srgbClr val="2B2B2B"/>
+                            <a:srgbClr val="26231F"/>
                           </a:solidFill>
                         </a:rPr>
                         <a:t/>
@@ -4873,25 +5081,25 @@
                   <a:tcPr anchor="ctr" marL="73152" marR="73152">
                     <a:lnL w="9525" cap="flat" cmpd="sng" algn="ctr">
                       <a:solidFill>
-                        <a:srgbClr val="D4E3F7"/>
+                        <a:srgbClr val="D1E2FA"/>
                       </a:solidFill>
                       <a:prstDash val="solid"/>
                     </a:lnL>
                     <a:lnR w="9525" cap="flat" cmpd="sng" algn="ctr">
                       <a:solidFill>
-                        <a:srgbClr val="D4E3F7"/>
+                        <a:srgbClr val="D1E2FA"/>
                       </a:solidFill>
                       <a:prstDash val="solid"/>
                     </a:lnR>
                     <a:lnT w="9525" cap="flat" cmpd="sng" algn="ctr">
                       <a:solidFill>
-                        <a:srgbClr val="D4E3F7"/>
+                        <a:srgbClr val="D1E2FA"/>
                       </a:solidFill>
                       <a:prstDash val="solid"/>
                     </a:lnT>
                     <a:lnB w="9525" cap="flat" cmpd="sng" algn="ctr">
                       <a:solidFill>
-                        <a:srgbClr val="D4E3F7"/>
+                        <a:srgbClr val="D1E2FA"/>
                       </a:solidFill>
                       <a:prstDash val="solid"/>
                     </a:lnB>
@@ -4909,7 +5117,7 @@
                       <a:r>
                         <a:rPr sz="1400" b="0">
                           <a:solidFill>
-                            <a:srgbClr val="2B2B2B"/>
+                            <a:srgbClr val="26231F"/>
                           </a:solidFill>
                         </a:rPr>
                         <a:t/>
@@ -4919,25 +5127,25 @@
                   <a:tcPr anchor="ctr" marL="73152" marR="73152">
                     <a:lnL w="9525" cap="flat" cmpd="sng" algn="ctr">
                       <a:solidFill>
-                        <a:srgbClr val="D4E3F7"/>
+                        <a:srgbClr val="D1E2FA"/>
                       </a:solidFill>
                       <a:prstDash val="solid"/>
                     </a:lnL>
                     <a:lnR w="9525" cap="flat" cmpd="sng" algn="ctr">
                       <a:solidFill>
-                        <a:srgbClr val="D4E3F7"/>
+                        <a:srgbClr val="D1E2FA"/>
                       </a:solidFill>
                       <a:prstDash val="solid"/>
                     </a:lnR>
                     <a:lnT w="9525" cap="flat" cmpd="sng" algn="ctr">
                       <a:solidFill>
-                        <a:srgbClr val="D4E3F7"/>
+                        <a:srgbClr val="D1E2FA"/>
                       </a:solidFill>
                       <a:prstDash val="solid"/>
                     </a:lnT>
                     <a:lnB w="9525" cap="flat" cmpd="sng" algn="ctr">
                       <a:solidFill>
-                        <a:srgbClr val="D4E3F7"/>
+                        <a:srgbClr val="D1E2FA"/>
                       </a:solidFill>
                       <a:prstDash val="solid"/>
                     </a:lnB>
@@ -4955,7 +5163,7 @@
                       <a:r>
                         <a:rPr sz="1400" b="0">
                           <a:solidFill>
-                            <a:srgbClr val="2B2B2B"/>
+                            <a:srgbClr val="26231F"/>
                           </a:solidFill>
                         </a:rPr>
                         <a:t/>
@@ -4965,25 +5173,25 @@
                   <a:tcPr anchor="ctr" marL="73152" marR="73152">
                     <a:lnL w="9525" cap="flat" cmpd="sng" algn="ctr">
                       <a:solidFill>
-                        <a:srgbClr val="D4E3F7"/>
+                        <a:srgbClr val="D1E2FA"/>
                       </a:solidFill>
                       <a:prstDash val="solid"/>
                     </a:lnL>
                     <a:lnR w="9525" cap="flat" cmpd="sng" algn="ctr">
                       <a:solidFill>
-                        <a:srgbClr val="D4E3F7"/>
+                        <a:srgbClr val="D1E2FA"/>
                       </a:solidFill>
                       <a:prstDash val="solid"/>
                     </a:lnR>
                     <a:lnT w="9525" cap="flat" cmpd="sng" algn="ctr">
                       <a:solidFill>
-                        <a:srgbClr val="D4E3F7"/>
+                        <a:srgbClr val="D1E2FA"/>
                       </a:solidFill>
                       <a:prstDash val="solid"/>
                     </a:lnT>
                     <a:lnB w="9525" cap="flat" cmpd="sng" algn="ctr">
                       <a:solidFill>
-                        <a:srgbClr val="D4E3F7"/>
+                        <a:srgbClr val="D1E2FA"/>
                       </a:solidFill>
                       <a:prstDash val="solid"/>
                     </a:lnB>
@@ -5001,7 +5209,7 @@
                       <a:r>
                         <a:rPr sz="1400" b="0">
                           <a:solidFill>
-                            <a:srgbClr val="2B2B2B"/>
+                            <a:srgbClr val="26231F"/>
                           </a:solidFill>
                         </a:rPr>
                         <a:t/>
@@ -5011,25 +5219,25 @@
                   <a:tcPr anchor="ctr" marL="73152" marR="73152">
                     <a:lnL w="9525" cap="flat" cmpd="sng" algn="ctr">
                       <a:solidFill>
-                        <a:srgbClr val="D4E3F7"/>
+                        <a:srgbClr val="D1E2FA"/>
                       </a:solidFill>
                       <a:prstDash val="solid"/>
                     </a:lnL>
                     <a:lnR w="9525" cap="flat" cmpd="sng" algn="ctr">
                       <a:solidFill>
-                        <a:srgbClr val="D4E3F7"/>
+                        <a:srgbClr val="D1E2FA"/>
                       </a:solidFill>
                       <a:prstDash val="solid"/>
                     </a:lnR>
                     <a:lnT w="9525" cap="flat" cmpd="sng" algn="ctr">
                       <a:solidFill>
-                        <a:srgbClr val="D4E3F7"/>
+                        <a:srgbClr val="D1E2FA"/>
                       </a:solidFill>
                       <a:prstDash val="solid"/>
                     </a:lnT>
                     <a:lnB w="9525" cap="flat" cmpd="sng" algn="ctr">
                       <a:solidFill>
-                        <a:srgbClr val="D4E3F7"/>
+                        <a:srgbClr val="D1E2FA"/>
                       </a:solidFill>
                       <a:prstDash val="solid"/>
                     </a:lnB>
@@ -5047,7 +5255,7 @@
                       <a:r>
                         <a:rPr sz="1400" b="0">
                           <a:solidFill>
-                            <a:srgbClr val="2B2B2B"/>
+                            <a:srgbClr val="26231F"/>
                           </a:solidFill>
                         </a:rPr>
                         <a:t/>
@@ -5057,25 +5265,25 @@
                   <a:tcPr anchor="ctr" marL="73152" marR="73152">
                     <a:lnL w="9525" cap="flat" cmpd="sng" algn="ctr">
                       <a:solidFill>
-                        <a:srgbClr val="D4E3F7"/>
+                        <a:srgbClr val="D1E2FA"/>
                       </a:solidFill>
                       <a:prstDash val="solid"/>
                     </a:lnL>
                     <a:lnR w="9525" cap="flat" cmpd="sng" algn="ctr">
                       <a:solidFill>
-                        <a:srgbClr val="D4E3F7"/>
+                        <a:srgbClr val="D1E2FA"/>
                       </a:solidFill>
                       <a:prstDash val="solid"/>
                     </a:lnR>
                     <a:lnT w="9525" cap="flat" cmpd="sng" algn="ctr">
                       <a:solidFill>
-                        <a:srgbClr val="D4E3F7"/>
+                        <a:srgbClr val="D1E2FA"/>
                       </a:solidFill>
                       <a:prstDash val="solid"/>
                     </a:lnT>
                     <a:lnB w="9525" cap="flat" cmpd="sng" algn="ctr">
                       <a:solidFill>
-                        <a:srgbClr val="D4E3F7"/>
+                        <a:srgbClr val="D1E2FA"/>
                       </a:solidFill>
                       <a:prstDash val="solid"/>
                     </a:lnB>
@@ -5095,7 +5303,7 @@
                       <a:r>
                         <a:rPr sz="1400" b="0">
                           <a:solidFill>
-                            <a:srgbClr val="2B2B2B"/>
+                            <a:srgbClr val="26231F"/>
                           </a:solidFill>
                         </a:rPr>
                         <a:t/>
@@ -5105,30 +5313,30 @@
                   <a:tcPr anchor="ctr" marL="73152" marR="73152">
                     <a:lnL w="9525" cap="flat" cmpd="sng" algn="ctr">
                       <a:solidFill>
-                        <a:srgbClr val="D4E3F7"/>
+                        <a:srgbClr val="D1E2FA"/>
                       </a:solidFill>
                       <a:prstDash val="solid"/>
                     </a:lnL>
                     <a:lnR w="9525" cap="flat" cmpd="sng" algn="ctr">
                       <a:solidFill>
-                        <a:srgbClr val="D4E3F7"/>
+                        <a:srgbClr val="D1E2FA"/>
                       </a:solidFill>
                       <a:prstDash val="solid"/>
                     </a:lnR>
                     <a:lnT w="9525" cap="flat" cmpd="sng" algn="ctr">
                       <a:solidFill>
-                        <a:srgbClr val="D4E3F7"/>
+                        <a:srgbClr val="D1E2FA"/>
                       </a:solidFill>
                       <a:prstDash val="solid"/>
                     </a:lnT>
                     <a:lnB w="9525" cap="flat" cmpd="sng" algn="ctr">
                       <a:solidFill>
-                        <a:srgbClr val="D4E3F7"/>
+                        <a:srgbClr val="D1E2FA"/>
                       </a:solidFill>
                       <a:prstDash val="solid"/>
                     </a:lnB>
                     <a:solidFill>
-                      <a:srgbClr val="F3F7FC"/>
+                      <a:srgbClr val="EAF2FD"/>
                     </a:solidFill>
                   </a:tcPr>
                 </a:tc>
@@ -5141,7 +5349,7 @@
                       <a:r>
                         <a:rPr sz="1400" b="0">
                           <a:solidFill>
-                            <a:srgbClr val="2B2B2B"/>
+                            <a:srgbClr val="26231F"/>
                           </a:solidFill>
                         </a:rPr>
                         <a:t/>
@@ -5151,30 +5359,30 @@
                   <a:tcPr anchor="ctr" marL="73152" marR="73152">
                     <a:lnL w="9525" cap="flat" cmpd="sng" algn="ctr">
                       <a:solidFill>
-                        <a:srgbClr val="D4E3F7"/>
+                        <a:srgbClr val="D1E2FA"/>
                       </a:solidFill>
                       <a:prstDash val="solid"/>
                     </a:lnL>
                     <a:lnR w="9525" cap="flat" cmpd="sng" algn="ctr">
                       <a:solidFill>
-                        <a:srgbClr val="D4E3F7"/>
+                        <a:srgbClr val="D1E2FA"/>
                       </a:solidFill>
                       <a:prstDash val="solid"/>
                     </a:lnR>
                     <a:lnT w="9525" cap="flat" cmpd="sng" algn="ctr">
                       <a:solidFill>
-                        <a:srgbClr val="D4E3F7"/>
+                        <a:srgbClr val="D1E2FA"/>
                       </a:solidFill>
                       <a:prstDash val="solid"/>
                     </a:lnT>
                     <a:lnB w="9525" cap="flat" cmpd="sng" algn="ctr">
                       <a:solidFill>
-                        <a:srgbClr val="D4E3F7"/>
+                        <a:srgbClr val="D1E2FA"/>
                       </a:solidFill>
                       <a:prstDash val="solid"/>
                     </a:lnB>
                     <a:solidFill>
-                      <a:srgbClr val="F3F7FC"/>
+                      <a:srgbClr val="EAF2FD"/>
                     </a:solidFill>
                   </a:tcPr>
                 </a:tc>
@@ -5187,7 +5395,7 @@
                       <a:r>
                         <a:rPr sz="1400" b="0">
                           <a:solidFill>
-                            <a:srgbClr val="2B2B2B"/>
+                            <a:srgbClr val="26231F"/>
                           </a:solidFill>
                         </a:rPr>
                         <a:t/>
@@ -5197,30 +5405,30 @@
                   <a:tcPr anchor="ctr" marL="73152" marR="73152">
                     <a:lnL w="9525" cap="flat" cmpd="sng" algn="ctr">
                       <a:solidFill>
-                        <a:srgbClr val="D4E3F7"/>
+                        <a:srgbClr val="D1E2FA"/>
                       </a:solidFill>
                       <a:prstDash val="solid"/>
                     </a:lnL>
                     <a:lnR w="9525" cap="flat" cmpd="sng" algn="ctr">
                       <a:solidFill>
-                        <a:srgbClr val="D4E3F7"/>
+                        <a:srgbClr val="D1E2FA"/>
                       </a:solidFill>
                       <a:prstDash val="solid"/>
                     </a:lnR>
                     <a:lnT w="9525" cap="flat" cmpd="sng" algn="ctr">
                       <a:solidFill>
-                        <a:srgbClr val="D4E3F7"/>
+                        <a:srgbClr val="D1E2FA"/>
                       </a:solidFill>
                       <a:prstDash val="solid"/>
                     </a:lnT>
                     <a:lnB w="9525" cap="flat" cmpd="sng" algn="ctr">
                       <a:solidFill>
-                        <a:srgbClr val="D4E3F7"/>
+                        <a:srgbClr val="D1E2FA"/>
                       </a:solidFill>
                       <a:prstDash val="solid"/>
                     </a:lnB>
                     <a:solidFill>
-                      <a:srgbClr val="F3F7FC"/>
+                      <a:srgbClr val="EAF2FD"/>
                     </a:solidFill>
                   </a:tcPr>
                 </a:tc>
@@ -5233,7 +5441,7 @@
                       <a:r>
                         <a:rPr sz="1400" b="0">
                           <a:solidFill>
-                            <a:srgbClr val="2B2B2B"/>
+                            <a:srgbClr val="26231F"/>
                           </a:solidFill>
                         </a:rPr>
                         <a:t/>
@@ -5243,30 +5451,30 @@
                   <a:tcPr anchor="ctr" marL="73152" marR="73152">
                     <a:lnL w="9525" cap="flat" cmpd="sng" algn="ctr">
                       <a:solidFill>
-                        <a:srgbClr val="D4E3F7"/>
+                        <a:srgbClr val="D1E2FA"/>
                       </a:solidFill>
                       <a:prstDash val="solid"/>
                     </a:lnL>
                     <a:lnR w="9525" cap="flat" cmpd="sng" algn="ctr">
                       <a:solidFill>
-                        <a:srgbClr val="D4E3F7"/>
+                        <a:srgbClr val="D1E2FA"/>
                       </a:solidFill>
                       <a:prstDash val="solid"/>
                     </a:lnR>
                     <a:lnT w="9525" cap="flat" cmpd="sng" algn="ctr">
                       <a:solidFill>
-                        <a:srgbClr val="D4E3F7"/>
+                        <a:srgbClr val="D1E2FA"/>
                       </a:solidFill>
                       <a:prstDash val="solid"/>
                     </a:lnT>
                     <a:lnB w="9525" cap="flat" cmpd="sng" algn="ctr">
                       <a:solidFill>
-                        <a:srgbClr val="D4E3F7"/>
+                        <a:srgbClr val="D1E2FA"/>
                       </a:solidFill>
                       <a:prstDash val="solid"/>
                     </a:lnB>
                     <a:solidFill>
-                      <a:srgbClr val="F3F7FC"/>
+                      <a:srgbClr val="EAF2FD"/>
                     </a:solidFill>
                   </a:tcPr>
                 </a:tc>
@@ -5279,7 +5487,7 @@
                       <a:r>
                         <a:rPr sz="1400" b="0">
                           <a:solidFill>
-                            <a:srgbClr val="2B2B2B"/>
+                            <a:srgbClr val="26231F"/>
                           </a:solidFill>
                         </a:rPr>
                         <a:t/>
@@ -5289,30 +5497,30 @@
                   <a:tcPr anchor="ctr" marL="73152" marR="73152">
                     <a:lnL w="9525" cap="flat" cmpd="sng" algn="ctr">
                       <a:solidFill>
-                        <a:srgbClr val="D4E3F7"/>
+                        <a:srgbClr val="D1E2FA"/>
                       </a:solidFill>
                       <a:prstDash val="solid"/>
                     </a:lnL>
                     <a:lnR w="9525" cap="flat" cmpd="sng" algn="ctr">
                       <a:solidFill>
-                        <a:srgbClr val="D4E3F7"/>
+                        <a:srgbClr val="D1E2FA"/>
                       </a:solidFill>
                       <a:prstDash val="solid"/>
                     </a:lnR>
                     <a:lnT w="9525" cap="flat" cmpd="sng" algn="ctr">
                       <a:solidFill>
-                        <a:srgbClr val="D4E3F7"/>
+                        <a:srgbClr val="D1E2FA"/>
                       </a:solidFill>
                       <a:prstDash val="solid"/>
                     </a:lnT>
                     <a:lnB w="9525" cap="flat" cmpd="sng" algn="ctr">
                       <a:solidFill>
-                        <a:srgbClr val="D4E3F7"/>
+                        <a:srgbClr val="D1E2FA"/>
                       </a:solidFill>
                       <a:prstDash val="solid"/>
                     </a:lnB>
                     <a:solidFill>
-                      <a:srgbClr val="F3F7FC"/>
+                      <a:srgbClr val="EAF2FD"/>
                     </a:solidFill>
                   </a:tcPr>
                 </a:tc>
@@ -5327,7 +5535,7 @@
                       <a:r>
                         <a:rPr sz="1400" b="0">
                           <a:solidFill>
-                            <a:srgbClr val="2B2B2B"/>
+                            <a:srgbClr val="26231F"/>
                           </a:solidFill>
                         </a:rPr>
                         <a:t/>
@@ -5337,25 +5545,25 @@
                   <a:tcPr anchor="ctr" marL="73152" marR="73152">
                     <a:lnL w="9525" cap="flat" cmpd="sng" algn="ctr">
                       <a:solidFill>
-                        <a:srgbClr val="D4E3F7"/>
+                        <a:srgbClr val="D1E2FA"/>
                       </a:solidFill>
                       <a:prstDash val="solid"/>
                     </a:lnL>
                     <a:lnR w="9525" cap="flat" cmpd="sng" algn="ctr">
                       <a:solidFill>
-                        <a:srgbClr val="D4E3F7"/>
+                        <a:srgbClr val="D1E2FA"/>
                       </a:solidFill>
                       <a:prstDash val="solid"/>
                     </a:lnR>
                     <a:lnT w="9525" cap="flat" cmpd="sng" algn="ctr">
                       <a:solidFill>
-                        <a:srgbClr val="D4E3F7"/>
+                        <a:srgbClr val="D1E2FA"/>
                       </a:solidFill>
                       <a:prstDash val="solid"/>
                     </a:lnT>
                     <a:lnB w="9525" cap="flat" cmpd="sng" algn="ctr">
                       <a:solidFill>
-                        <a:srgbClr val="D4E3F7"/>
+                        <a:srgbClr val="D1E2FA"/>
                       </a:solidFill>
                       <a:prstDash val="solid"/>
                     </a:lnB>
@@ -5373,7 +5581,7 @@
                       <a:r>
                         <a:rPr sz="1400" b="0">
                           <a:solidFill>
-                            <a:srgbClr val="2B2B2B"/>
+                            <a:srgbClr val="26231F"/>
                           </a:solidFill>
                         </a:rPr>
                         <a:t/>
@@ -5383,25 +5591,25 @@
                   <a:tcPr anchor="ctr" marL="73152" marR="73152">
                     <a:lnL w="9525" cap="flat" cmpd="sng" algn="ctr">
                       <a:solidFill>
-                        <a:srgbClr val="D4E3F7"/>
+                        <a:srgbClr val="D1E2FA"/>
                       </a:solidFill>
                       <a:prstDash val="solid"/>
                     </a:lnL>
                     <a:lnR w="9525" cap="flat" cmpd="sng" algn="ctr">
                       <a:solidFill>
-                        <a:srgbClr val="D4E3F7"/>
+                        <a:srgbClr val="D1E2FA"/>
                       </a:solidFill>
                       <a:prstDash val="solid"/>
                     </a:lnR>
                     <a:lnT w="9525" cap="flat" cmpd="sng" algn="ctr">
                       <a:solidFill>
-                        <a:srgbClr val="D4E3F7"/>
+                        <a:srgbClr val="D1E2FA"/>
                       </a:solidFill>
                       <a:prstDash val="solid"/>
                     </a:lnT>
                     <a:lnB w="9525" cap="flat" cmpd="sng" algn="ctr">
                       <a:solidFill>
-                        <a:srgbClr val="D4E3F7"/>
+                        <a:srgbClr val="D1E2FA"/>
                       </a:solidFill>
                       <a:prstDash val="solid"/>
                     </a:lnB>
@@ -5419,7 +5627,7 @@
                       <a:r>
                         <a:rPr sz="1400" b="0">
                           <a:solidFill>
-                            <a:srgbClr val="2B2B2B"/>
+                            <a:srgbClr val="26231F"/>
                           </a:solidFill>
                         </a:rPr>
                         <a:t/>
@@ -5429,25 +5637,25 @@
                   <a:tcPr anchor="ctr" marL="73152" marR="73152">
                     <a:lnL w="9525" cap="flat" cmpd="sng" algn="ctr">
                       <a:solidFill>
-                        <a:srgbClr val="D4E3F7"/>
+                        <a:srgbClr val="D1E2FA"/>
                       </a:solidFill>
                       <a:prstDash val="solid"/>
                     </a:lnL>
                     <a:lnR w="9525" cap="flat" cmpd="sng" algn="ctr">
                       <a:solidFill>
-                        <a:srgbClr val="D4E3F7"/>
+                        <a:srgbClr val="D1E2FA"/>
                       </a:solidFill>
                       <a:prstDash val="solid"/>
                     </a:lnR>
                     <a:lnT w="9525" cap="flat" cmpd="sng" algn="ctr">
                       <a:solidFill>
-                        <a:srgbClr val="D4E3F7"/>
+                        <a:srgbClr val="D1E2FA"/>
                       </a:solidFill>
                       <a:prstDash val="solid"/>
                     </a:lnT>
                     <a:lnB w="9525" cap="flat" cmpd="sng" algn="ctr">
                       <a:solidFill>
-                        <a:srgbClr val="D4E3F7"/>
+                        <a:srgbClr val="D1E2FA"/>
                       </a:solidFill>
                       <a:prstDash val="solid"/>
                     </a:lnB>
@@ -5465,7 +5673,7 @@
                       <a:r>
                         <a:rPr sz="1400" b="0">
                           <a:solidFill>
-                            <a:srgbClr val="2B2B2B"/>
+                            <a:srgbClr val="26231F"/>
                           </a:solidFill>
                         </a:rPr>
                         <a:t/>
@@ -5475,25 +5683,25 @@
                   <a:tcPr anchor="ctr" marL="73152" marR="73152">
                     <a:lnL w="9525" cap="flat" cmpd="sng" algn="ctr">
                       <a:solidFill>
-                        <a:srgbClr val="D4E3F7"/>
+                        <a:srgbClr val="D1E2FA"/>
                       </a:solidFill>
                       <a:prstDash val="solid"/>
                     </a:lnL>
                     <a:lnR w="9525" cap="flat" cmpd="sng" algn="ctr">
                       <a:solidFill>
-                        <a:srgbClr val="D4E3F7"/>
+                        <a:srgbClr val="D1E2FA"/>
                       </a:solidFill>
                       <a:prstDash val="solid"/>
                     </a:lnR>
                     <a:lnT w="9525" cap="flat" cmpd="sng" algn="ctr">
                       <a:solidFill>
-                        <a:srgbClr val="D4E3F7"/>
+                        <a:srgbClr val="D1E2FA"/>
                       </a:solidFill>
                       <a:prstDash val="solid"/>
                     </a:lnT>
                     <a:lnB w="9525" cap="flat" cmpd="sng" algn="ctr">
                       <a:solidFill>
-                        <a:srgbClr val="D4E3F7"/>
+                        <a:srgbClr val="D1E2FA"/>
                       </a:solidFill>
                       <a:prstDash val="solid"/>
                     </a:lnB>
@@ -5511,7 +5719,7 @@
                       <a:r>
                         <a:rPr sz="1400" b="0">
                           <a:solidFill>
-                            <a:srgbClr val="2B2B2B"/>
+                            <a:srgbClr val="26231F"/>
                           </a:solidFill>
                         </a:rPr>
                         <a:t/>
@@ -5521,25 +5729,25 @@
                   <a:tcPr anchor="ctr" marL="73152" marR="73152">
                     <a:lnL w="9525" cap="flat" cmpd="sng" algn="ctr">
                       <a:solidFill>
-                        <a:srgbClr val="D4E3F7"/>
+                        <a:srgbClr val="D1E2FA"/>
                       </a:solidFill>
                       <a:prstDash val="solid"/>
                     </a:lnL>
                     <a:lnR w="9525" cap="flat" cmpd="sng" algn="ctr">
                       <a:solidFill>
-                        <a:srgbClr val="D4E3F7"/>
+                        <a:srgbClr val="D1E2FA"/>
                       </a:solidFill>
                       <a:prstDash val="solid"/>
                     </a:lnR>
                     <a:lnT w="9525" cap="flat" cmpd="sng" algn="ctr">
                       <a:solidFill>
-                        <a:srgbClr val="D4E3F7"/>
+                        <a:srgbClr val="D1E2FA"/>
                       </a:solidFill>
                       <a:prstDash val="solid"/>
                     </a:lnT>
                     <a:lnB w="9525" cap="flat" cmpd="sng" algn="ctr">
                       <a:solidFill>
-                        <a:srgbClr val="D4E3F7"/>
+                        <a:srgbClr val="D1E2FA"/>
                       </a:solidFill>
                       <a:prstDash val="solid"/>
                     </a:lnB>
@@ -5559,7 +5767,7 @@
                       <a:r>
                         <a:rPr sz="1400" b="0">
                           <a:solidFill>
-                            <a:srgbClr val="2B2B2B"/>
+                            <a:srgbClr val="26231F"/>
                           </a:solidFill>
                         </a:rPr>
                         <a:t/>
@@ -5569,30 +5777,30 @@
                   <a:tcPr anchor="ctr" marL="73152" marR="73152">
                     <a:lnL w="9525" cap="flat" cmpd="sng" algn="ctr">
                       <a:solidFill>
-                        <a:srgbClr val="D4E3F7"/>
+                        <a:srgbClr val="D1E2FA"/>
                       </a:solidFill>
                       <a:prstDash val="solid"/>
                     </a:lnL>
                     <a:lnR w="9525" cap="flat" cmpd="sng" algn="ctr">
                       <a:solidFill>
-                        <a:srgbClr val="D4E3F7"/>
+                        <a:srgbClr val="D1E2FA"/>
                       </a:solidFill>
                       <a:prstDash val="solid"/>
                     </a:lnR>
                     <a:lnT w="9525" cap="flat" cmpd="sng" algn="ctr">
                       <a:solidFill>
-                        <a:srgbClr val="D4E3F7"/>
+                        <a:srgbClr val="D1E2FA"/>
                       </a:solidFill>
                       <a:prstDash val="solid"/>
                     </a:lnT>
                     <a:lnB w="9525" cap="flat" cmpd="sng" algn="ctr">
                       <a:solidFill>
-                        <a:srgbClr val="D4E3F7"/>
+                        <a:srgbClr val="D1E2FA"/>
                       </a:solidFill>
                       <a:prstDash val="solid"/>
                     </a:lnB>
                     <a:solidFill>
-                      <a:srgbClr val="F3F7FC"/>
+                      <a:srgbClr val="EAF2FD"/>
                     </a:solidFill>
                   </a:tcPr>
                 </a:tc>
@@ -5605,7 +5813,7 @@
                       <a:r>
                         <a:rPr sz="1400" b="0">
                           <a:solidFill>
-                            <a:srgbClr val="2B2B2B"/>
+                            <a:srgbClr val="26231F"/>
                           </a:solidFill>
                         </a:rPr>
                         <a:t/>
@@ -5615,30 +5823,30 @@
                   <a:tcPr anchor="ctr" marL="73152" marR="73152">
                     <a:lnL w="9525" cap="flat" cmpd="sng" algn="ctr">
                       <a:solidFill>
-                        <a:srgbClr val="D4E3F7"/>
+                        <a:srgbClr val="D1E2FA"/>
                       </a:solidFill>
                       <a:prstDash val="solid"/>
                     </a:lnL>
                     <a:lnR w="9525" cap="flat" cmpd="sng" algn="ctr">
                       <a:solidFill>
-                        <a:srgbClr val="D4E3F7"/>
+                        <a:srgbClr val="D1E2FA"/>
                       </a:solidFill>
                       <a:prstDash val="solid"/>
                     </a:lnR>
                     <a:lnT w="9525" cap="flat" cmpd="sng" algn="ctr">
                       <a:solidFill>
-                        <a:srgbClr val="D4E3F7"/>
+                        <a:srgbClr val="D1E2FA"/>
                       </a:solidFill>
                       <a:prstDash val="solid"/>
                     </a:lnT>
                     <a:lnB w="9525" cap="flat" cmpd="sng" algn="ctr">
                       <a:solidFill>
-                        <a:srgbClr val="D4E3F7"/>
+                        <a:srgbClr val="D1E2FA"/>
                       </a:solidFill>
                       <a:prstDash val="solid"/>
                     </a:lnB>
                     <a:solidFill>
-                      <a:srgbClr val="F3F7FC"/>
+                      <a:srgbClr val="EAF2FD"/>
                     </a:solidFill>
                   </a:tcPr>
                 </a:tc>
@@ -5651,7 +5859,7 @@
                       <a:r>
                         <a:rPr sz="1400" b="0">
                           <a:solidFill>
-                            <a:srgbClr val="2B2B2B"/>
+                            <a:srgbClr val="26231F"/>
                           </a:solidFill>
                         </a:rPr>
                         <a:t/>
@@ -5661,30 +5869,30 @@
                   <a:tcPr anchor="ctr" marL="73152" marR="73152">
                     <a:lnL w="9525" cap="flat" cmpd="sng" algn="ctr">
                       <a:solidFill>
-                        <a:srgbClr val="D4E3F7"/>
+                        <a:srgbClr val="D1E2FA"/>
                       </a:solidFill>
                       <a:prstDash val="solid"/>
                     </a:lnL>
                     <a:lnR w="9525" cap="flat" cmpd="sng" algn="ctr">
                       <a:solidFill>
-                        <a:srgbClr val="D4E3F7"/>
+                        <a:srgbClr val="D1E2FA"/>
                       </a:solidFill>
                       <a:prstDash val="solid"/>
                     </a:lnR>
                     <a:lnT w="9525" cap="flat" cmpd="sng" algn="ctr">
                       <a:solidFill>
-                        <a:srgbClr val="D4E3F7"/>
+                        <a:srgbClr val="D1E2FA"/>
                       </a:solidFill>
                       <a:prstDash val="solid"/>
                     </a:lnT>
                     <a:lnB w="9525" cap="flat" cmpd="sng" algn="ctr">
                       <a:solidFill>
-                        <a:srgbClr val="D4E3F7"/>
+                        <a:srgbClr val="D1E2FA"/>
                       </a:solidFill>
                       <a:prstDash val="solid"/>
                     </a:lnB>
                     <a:solidFill>
-                      <a:srgbClr val="F3F7FC"/>
+                      <a:srgbClr val="EAF2FD"/>
                     </a:solidFill>
                   </a:tcPr>
                 </a:tc>
@@ -5697,7 +5905,7 @@
                       <a:r>
                         <a:rPr sz="1400" b="0">
                           <a:solidFill>
-                            <a:srgbClr val="2B2B2B"/>
+                            <a:srgbClr val="26231F"/>
                           </a:solidFill>
                         </a:rPr>
                         <a:t/>
@@ -5707,30 +5915,30 @@
                   <a:tcPr anchor="ctr" marL="73152" marR="73152">
                     <a:lnL w="9525" cap="flat" cmpd="sng" algn="ctr">
                       <a:solidFill>
-                        <a:srgbClr val="D4E3F7"/>
+                        <a:srgbClr val="D1E2FA"/>
                       </a:solidFill>
                       <a:prstDash val="solid"/>
                     </a:lnL>
                     <a:lnR w="9525" cap="flat" cmpd="sng" algn="ctr">
                       <a:solidFill>
-                        <a:srgbClr val="D4E3F7"/>
+                        <a:srgbClr val="D1E2FA"/>
                       </a:solidFill>
                       <a:prstDash val="solid"/>
                     </a:lnR>
                     <a:lnT w="9525" cap="flat" cmpd="sng" algn="ctr">
                       <a:solidFill>
-                        <a:srgbClr val="D4E3F7"/>
+                        <a:srgbClr val="D1E2FA"/>
                       </a:solidFill>
                       <a:prstDash val="solid"/>
                     </a:lnT>
                     <a:lnB w="9525" cap="flat" cmpd="sng" algn="ctr">
                       <a:solidFill>
-                        <a:srgbClr val="D4E3F7"/>
+                        <a:srgbClr val="D1E2FA"/>
                       </a:solidFill>
                       <a:prstDash val="solid"/>
                     </a:lnB>
                     <a:solidFill>
-                      <a:srgbClr val="F3F7FC"/>
+                      <a:srgbClr val="EAF2FD"/>
                     </a:solidFill>
                   </a:tcPr>
                 </a:tc>
@@ -5743,7 +5951,7 @@
                       <a:r>
                         <a:rPr sz="1400" b="0">
                           <a:solidFill>
-                            <a:srgbClr val="2B2B2B"/>
+                            <a:srgbClr val="26231F"/>
                           </a:solidFill>
                         </a:rPr>
                         <a:t/>
@@ -5753,30 +5961,30 @@
                   <a:tcPr anchor="ctr" marL="73152" marR="73152">
                     <a:lnL w="9525" cap="flat" cmpd="sng" algn="ctr">
                       <a:solidFill>
-                        <a:srgbClr val="D4E3F7"/>
+                        <a:srgbClr val="D1E2FA"/>
                       </a:solidFill>
                       <a:prstDash val="solid"/>
                     </a:lnL>
                     <a:lnR w="9525" cap="flat" cmpd="sng" algn="ctr">
                       <a:solidFill>
-                        <a:srgbClr val="D4E3F7"/>
+                        <a:srgbClr val="D1E2FA"/>
                       </a:solidFill>
                       <a:prstDash val="solid"/>
                     </a:lnR>
                     <a:lnT w="9525" cap="flat" cmpd="sng" algn="ctr">
                       <a:solidFill>
-                        <a:srgbClr val="D4E3F7"/>
+                        <a:srgbClr val="D1E2FA"/>
                       </a:solidFill>
                       <a:prstDash val="solid"/>
                     </a:lnT>
                     <a:lnB w="9525" cap="flat" cmpd="sng" algn="ctr">
                       <a:solidFill>
-                        <a:srgbClr val="D4E3F7"/>
+                        <a:srgbClr val="D1E2FA"/>
                       </a:solidFill>
                       <a:prstDash val="solid"/>
                     </a:lnB>
                     <a:solidFill>
-                      <a:srgbClr val="F3F7FC"/>
+                      <a:srgbClr val="EAF2FD"/>
                     </a:solidFill>
                   </a:tcPr>
                 </a:tc>
@@ -5791,7 +5999,7 @@
                       <a:r>
                         <a:rPr sz="1400" b="0">
                           <a:solidFill>
-                            <a:srgbClr val="2B2B2B"/>
+                            <a:srgbClr val="26231F"/>
                           </a:solidFill>
                         </a:rPr>
                         <a:t/>
@@ -5801,25 +6009,25 @@
                   <a:tcPr anchor="ctr" marL="73152" marR="73152">
                     <a:lnL w="9525" cap="flat" cmpd="sng" algn="ctr">
                       <a:solidFill>
-                        <a:srgbClr val="D4E3F7"/>
+                        <a:srgbClr val="D1E2FA"/>
                       </a:solidFill>
                       <a:prstDash val="solid"/>
                     </a:lnL>
                     <a:lnR w="9525" cap="flat" cmpd="sng" algn="ctr">
                       <a:solidFill>
-                        <a:srgbClr val="D4E3F7"/>
+                        <a:srgbClr val="D1E2FA"/>
                       </a:solidFill>
                       <a:prstDash val="solid"/>
                     </a:lnR>
                     <a:lnT w="9525" cap="flat" cmpd="sng" algn="ctr">
                       <a:solidFill>
-                        <a:srgbClr val="D4E3F7"/>
+                        <a:srgbClr val="D1E2FA"/>
                       </a:solidFill>
                       <a:prstDash val="solid"/>
                     </a:lnT>
                     <a:lnB w="9525" cap="flat" cmpd="sng" algn="ctr">
                       <a:solidFill>
-                        <a:srgbClr val="D4E3F7"/>
+                        <a:srgbClr val="D1E2FA"/>
                       </a:solidFill>
                       <a:prstDash val="solid"/>
                     </a:lnB>
@@ -5837,7 +6045,7 @@
                       <a:r>
                         <a:rPr sz="1400" b="0">
                           <a:solidFill>
-                            <a:srgbClr val="2B2B2B"/>
+                            <a:srgbClr val="26231F"/>
                           </a:solidFill>
                         </a:rPr>
                         <a:t/>
@@ -5847,25 +6055,25 @@
                   <a:tcPr anchor="ctr" marL="73152" marR="73152">
                     <a:lnL w="9525" cap="flat" cmpd="sng" algn="ctr">
                       <a:solidFill>
-                        <a:srgbClr val="D4E3F7"/>
+                        <a:srgbClr val="D1E2FA"/>
                       </a:solidFill>
                       <a:prstDash val="solid"/>
                     </a:lnL>
                     <a:lnR w="9525" cap="flat" cmpd="sng" algn="ctr">
                       <a:solidFill>
-                        <a:srgbClr val="D4E3F7"/>
+                        <a:srgbClr val="D1E2FA"/>
                       </a:solidFill>
                       <a:prstDash val="solid"/>
                     </a:lnR>
                     <a:lnT w="9525" cap="flat" cmpd="sng" algn="ctr">
                       <a:solidFill>
-                        <a:srgbClr val="D4E3F7"/>
+                        <a:srgbClr val="D1E2FA"/>
                       </a:solidFill>
                       <a:prstDash val="solid"/>
                     </a:lnT>
                     <a:lnB w="9525" cap="flat" cmpd="sng" algn="ctr">
                       <a:solidFill>
-                        <a:srgbClr val="D4E3F7"/>
+                        <a:srgbClr val="D1E2FA"/>
                       </a:solidFill>
                       <a:prstDash val="solid"/>
                     </a:lnB>
@@ -5883,7 +6091,7 @@
                       <a:r>
                         <a:rPr sz="1400" b="0">
                           <a:solidFill>
-                            <a:srgbClr val="2B2B2B"/>
+                            <a:srgbClr val="26231F"/>
                           </a:solidFill>
                         </a:rPr>
                         <a:t/>
@@ -5893,25 +6101,25 @@
                   <a:tcPr anchor="ctr" marL="73152" marR="73152">
                     <a:lnL w="9525" cap="flat" cmpd="sng" algn="ctr">
                       <a:solidFill>
-                        <a:srgbClr val="D4E3F7"/>
+                        <a:srgbClr val="D1E2FA"/>
                       </a:solidFill>
                       <a:prstDash val="solid"/>
                     </a:lnL>
                     <a:lnR w="9525" cap="flat" cmpd="sng" algn="ctr">
                       <a:solidFill>
-                        <a:srgbClr val="D4E3F7"/>
+                        <a:srgbClr val="D1E2FA"/>
                       </a:solidFill>
                       <a:prstDash val="solid"/>
                     </a:lnR>
                     <a:lnT w="9525" cap="flat" cmpd="sng" algn="ctr">
                       <a:solidFill>
-                        <a:srgbClr val="D4E3F7"/>
+                        <a:srgbClr val="D1E2FA"/>
                       </a:solidFill>
                       <a:prstDash val="solid"/>
                     </a:lnT>
                     <a:lnB w="9525" cap="flat" cmpd="sng" algn="ctr">
                       <a:solidFill>
-                        <a:srgbClr val="D4E3F7"/>
+                        <a:srgbClr val="D1E2FA"/>
                       </a:solidFill>
                       <a:prstDash val="solid"/>
                     </a:lnB>
@@ -5929,7 +6137,7 @@
                       <a:r>
                         <a:rPr sz="1400" b="0">
                           <a:solidFill>
-                            <a:srgbClr val="2B2B2B"/>
+                            <a:srgbClr val="26231F"/>
                           </a:solidFill>
                         </a:rPr>
                         <a:t/>
@@ -5939,25 +6147,25 @@
                   <a:tcPr anchor="ctr" marL="73152" marR="73152">
                     <a:lnL w="9525" cap="flat" cmpd="sng" algn="ctr">
                       <a:solidFill>
-                        <a:srgbClr val="D4E3F7"/>
+                        <a:srgbClr val="D1E2FA"/>
                       </a:solidFill>
                       <a:prstDash val="solid"/>
                     </a:lnL>
                     <a:lnR w="9525" cap="flat" cmpd="sng" algn="ctr">
                       <a:solidFill>
-                        <a:srgbClr val="D4E3F7"/>
+                        <a:srgbClr val="D1E2FA"/>
                       </a:solidFill>
                       <a:prstDash val="solid"/>
                     </a:lnR>
                     <a:lnT w="9525" cap="flat" cmpd="sng" algn="ctr">
                       <a:solidFill>
-                        <a:srgbClr val="D4E3F7"/>
+                        <a:srgbClr val="D1E2FA"/>
                       </a:solidFill>
                       <a:prstDash val="solid"/>
                     </a:lnT>
                     <a:lnB w="9525" cap="flat" cmpd="sng" algn="ctr">
                       <a:solidFill>
-                        <a:srgbClr val="D4E3F7"/>
+                        <a:srgbClr val="D1E2FA"/>
                       </a:solidFill>
                       <a:prstDash val="solid"/>
                     </a:lnB>
@@ -5975,7 +6183,7 @@
                       <a:r>
                         <a:rPr sz="1400" b="0">
                           <a:solidFill>
-                            <a:srgbClr val="2B2B2B"/>
+                            <a:srgbClr val="26231F"/>
                           </a:solidFill>
                         </a:rPr>
                         <a:t/>
@@ -5985,25 +6193,25 @@
                   <a:tcPr anchor="ctr" marL="73152" marR="73152">
                     <a:lnL w="9525" cap="flat" cmpd="sng" algn="ctr">
                       <a:solidFill>
-                        <a:srgbClr val="D4E3F7"/>
+                        <a:srgbClr val="D1E2FA"/>
                       </a:solidFill>
                       <a:prstDash val="solid"/>
                     </a:lnL>
                     <a:lnR w="9525" cap="flat" cmpd="sng" algn="ctr">
                       <a:solidFill>
-                        <a:srgbClr val="D4E3F7"/>
+                        <a:srgbClr val="D1E2FA"/>
                       </a:solidFill>
                       <a:prstDash val="solid"/>
                     </a:lnR>
                     <a:lnT w="9525" cap="flat" cmpd="sng" algn="ctr">
                       <a:solidFill>
-                        <a:srgbClr val="D4E3F7"/>
+                        <a:srgbClr val="D1E2FA"/>
                       </a:solidFill>
                       <a:prstDash val="solid"/>
                     </a:lnT>
                     <a:lnB w="9525" cap="flat" cmpd="sng" algn="ctr">
                       <a:solidFill>
-                        <a:srgbClr val="D4E3F7"/>
+                        <a:srgbClr val="D1E2FA"/>
                       </a:solidFill>
                       <a:prstDash val="solid"/>
                     </a:lnB>
@@ -6023,7 +6231,7 @@
                       <a:r>
                         <a:rPr sz="1400" b="0">
                           <a:solidFill>
-                            <a:srgbClr val="2B2B2B"/>
+                            <a:srgbClr val="26231F"/>
                           </a:solidFill>
                         </a:rPr>
                         <a:t/>
@@ -6033,30 +6241,30 @@
                   <a:tcPr anchor="ctr" marL="73152" marR="73152">
                     <a:lnL w="9525" cap="flat" cmpd="sng" algn="ctr">
                       <a:solidFill>
-                        <a:srgbClr val="D4E3F7"/>
+                        <a:srgbClr val="D1E2FA"/>
                       </a:solidFill>
                       <a:prstDash val="solid"/>
                     </a:lnL>
                     <a:lnR w="9525" cap="flat" cmpd="sng" algn="ctr">
                       <a:solidFill>
-                        <a:srgbClr val="D4E3F7"/>
+                        <a:srgbClr val="D1E2FA"/>
                       </a:solidFill>
                       <a:prstDash val="solid"/>
                     </a:lnR>
                     <a:lnT w="9525" cap="flat" cmpd="sng" algn="ctr">
                       <a:solidFill>
-                        <a:srgbClr val="D4E3F7"/>
+                        <a:srgbClr val="D1E2FA"/>
                       </a:solidFill>
                       <a:prstDash val="solid"/>
                     </a:lnT>
                     <a:lnB w="9525" cap="flat" cmpd="sng" algn="ctr">
                       <a:solidFill>
-                        <a:srgbClr val="D4E3F7"/>
+                        <a:srgbClr val="D1E2FA"/>
                       </a:solidFill>
                       <a:prstDash val="solid"/>
                     </a:lnB>
                     <a:solidFill>
-                      <a:srgbClr val="F3F7FC"/>
+                      <a:srgbClr val="EAF2FD"/>
                     </a:solidFill>
                   </a:tcPr>
                 </a:tc>
@@ -6069,7 +6277,7 @@
                       <a:r>
                         <a:rPr sz="1400" b="0">
                           <a:solidFill>
-                            <a:srgbClr val="2B2B2B"/>
+                            <a:srgbClr val="26231F"/>
                           </a:solidFill>
                         </a:rPr>
                         <a:t/>
@@ -6079,30 +6287,30 @@
                   <a:tcPr anchor="ctr" marL="73152" marR="73152">
                     <a:lnL w="9525" cap="flat" cmpd="sng" algn="ctr">
                       <a:solidFill>
-                        <a:srgbClr val="D4E3F7"/>
+                        <a:srgbClr val="D1E2FA"/>
                       </a:solidFill>
                       <a:prstDash val="solid"/>
                     </a:lnL>
                     <a:lnR w="9525" cap="flat" cmpd="sng" algn="ctr">
                       <a:solidFill>
-                        <a:srgbClr val="D4E3F7"/>
+                        <a:srgbClr val="D1E2FA"/>
                       </a:solidFill>
                       <a:prstDash val="solid"/>
                     </a:lnR>
                     <a:lnT w="9525" cap="flat" cmpd="sng" algn="ctr">
                       <a:solidFill>
-                        <a:srgbClr val="D4E3F7"/>
+                        <a:srgbClr val="D1E2FA"/>
                       </a:solidFill>
                       <a:prstDash val="solid"/>
                     </a:lnT>
                     <a:lnB w="9525" cap="flat" cmpd="sng" algn="ctr">
                       <a:solidFill>
-                        <a:srgbClr val="D4E3F7"/>
+                        <a:srgbClr val="D1E2FA"/>
                       </a:solidFill>
                       <a:prstDash val="solid"/>
                     </a:lnB>
                     <a:solidFill>
-                      <a:srgbClr val="F3F7FC"/>
+                      <a:srgbClr val="EAF2FD"/>
                     </a:solidFill>
                   </a:tcPr>
                 </a:tc>
@@ -6115,7 +6323,7 @@
                       <a:r>
                         <a:rPr sz="1400" b="0">
                           <a:solidFill>
-                            <a:srgbClr val="2B2B2B"/>
+                            <a:srgbClr val="26231F"/>
                           </a:solidFill>
                         </a:rPr>
                         <a:t/>
@@ -6125,30 +6333,30 @@
                   <a:tcPr anchor="ctr" marL="73152" marR="73152">
                     <a:lnL w="9525" cap="flat" cmpd="sng" algn="ctr">
                       <a:solidFill>
-                        <a:srgbClr val="D4E3F7"/>
+                        <a:srgbClr val="D1E2FA"/>
                       </a:solidFill>
                       <a:prstDash val="solid"/>
                     </a:lnL>
                     <a:lnR w="9525" cap="flat" cmpd="sng" algn="ctr">
                       <a:solidFill>
-                        <a:srgbClr val="D4E3F7"/>
+                        <a:srgbClr val="D1E2FA"/>
                       </a:solidFill>
                       <a:prstDash val="solid"/>
                     </a:lnR>
                     <a:lnT w="9525" cap="flat" cmpd="sng" algn="ctr">
                       <a:solidFill>
-                        <a:srgbClr val="D4E3F7"/>
+                        <a:srgbClr val="D1E2FA"/>
                       </a:solidFill>
                       <a:prstDash val="solid"/>
                     </a:lnT>
                     <a:lnB w="9525" cap="flat" cmpd="sng" algn="ctr">
                       <a:solidFill>
-                        <a:srgbClr val="D4E3F7"/>
+                        <a:srgbClr val="D1E2FA"/>
                       </a:solidFill>
                       <a:prstDash val="solid"/>
                     </a:lnB>
                     <a:solidFill>
-                      <a:srgbClr val="F3F7FC"/>
+                      <a:srgbClr val="EAF2FD"/>
                     </a:solidFill>
                   </a:tcPr>
                 </a:tc>
@@ -6161,7 +6369,7 @@
                       <a:r>
                         <a:rPr sz="1400" b="0">
                           <a:solidFill>
-                            <a:srgbClr val="2B2B2B"/>
+                            <a:srgbClr val="26231F"/>
                           </a:solidFill>
                         </a:rPr>
                         <a:t/>
@@ -6171,30 +6379,30 @@
                   <a:tcPr anchor="ctr" marL="73152" marR="73152">
                     <a:lnL w="9525" cap="flat" cmpd="sng" algn="ctr">
                       <a:solidFill>
-                        <a:srgbClr val="D4E3F7"/>
+                        <a:srgbClr val="D1E2FA"/>
                       </a:solidFill>
                       <a:prstDash val="solid"/>
                     </a:lnL>
                     <a:lnR w="9525" cap="flat" cmpd="sng" algn="ctr">
                       <a:solidFill>
-                        <a:srgbClr val="D4E3F7"/>
+                        <a:srgbClr val="D1E2FA"/>
                       </a:solidFill>
                       <a:prstDash val="solid"/>
                     </a:lnR>
                     <a:lnT w="9525" cap="flat" cmpd="sng" algn="ctr">
                       <a:solidFill>
-                        <a:srgbClr val="D4E3F7"/>
+                        <a:srgbClr val="D1E2FA"/>
                       </a:solidFill>
                       <a:prstDash val="solid"/>
                     </a:lnT>
                     <a:lnB w="9525" cap="flat" cmpd="sng" algn="ctr">
                       <a:solidFill>
-                        <a:srgbClr val="D4E3F7"/>
+                        <a:srgbClr val="D1E2FA"/>
                       </a:solidFill>
                       <a:prstDash val="solid"/>
                     </a:lnB>
                     <a:solidFill>
-                      <a:srgbClr val="F3F7FC"/>
+                      <a:srgbClr val="EAF2FD"/>
                     </a:solidFill>
                   </a:tcPr>
                 </a:tc>
@@ -6207,7 +6415,7 @@
                       <a:r>
                         <a:rPr sz="1400" b="0">
                           <a:solidFill>
-                            <a:srgbClr val="2B2B2B"/>
+                            <a:srgbClr val="26231F"/>
                           </a:solidFill>
                         </a:rPr>
                         <a:t/>
@@ -6217,30 +6425,30 @@
                   <a:tcPr anchor="ctr" marL="73152" marR="73152">
                     <a:lnL w="9525" cap="flat" cmpd="sng" algn="ctr">
                       <a:solidFill>
-                        <a:srgbClr val="D4E3F7"/>
+                        <a:srgbClr val="D1E2FA"/>
                       </a:solidFill>
                       <a:prstDash val="solid"/>
                     </a:lnL>
                     <a:lnR w="9525" cap="flat" cmpd="sng" algn="ctr">
                       <a:solidFill>
-                        <a:srgbClr val="D4E3F7"/>
+                        <a:srgbClr val="D1E2FA"/>
                       </a:solidFill>
                       <a:prstDash val="solid"/>
                     </a:lnR>
                     <a:lnT w="9525" cap="flat" cmpd="sng" algn="ctr">
                       <a:solidFill>
-                        <a:srgbClr val="D4E3F7"/>
+                        <a:srgbClr val="D1E2FA"/>
                       </a:solidFill>
                       <a:prstDash val="solid"/>
                     </a:lnT>
                     <a:lnB w="9525" cap="flat" cmpd="sng" algn="ctr">
                       <a:solidFill>
-                        <a:srgbClr val="D4E3F7"/>
+                        <a:srgbClr val="D1E2FA"/>
                       </a:solidFill>
                       <a:prstDash val="solid"/>
                     </a:lnB>
                     <a:solidFill>
-                      <a:srgbClr val="F3F7FC"/>
+                      <a:srgbClr val="EAF2FD"/>
                     </a:solidFill>
                   </a:tcPr>
                 </a:tc>
@@ -6263,7 +6471,7 @@
     <p:bg>
       <p:bgPr>
         <a:solidFill>
-          <a:srgbClr val="F3F7FC"/>
+          <a:srgbClr val="FAFBFD"/>
         </a:solidFill>
         <a:effectLst/>
       </p:bgPr>
@@ -6282,18 +6490,82 @@
           <p:nvPr/>
         </p:nvSpPr>
         <p:spPr>
-          <a:xfrm rot="10800000">
-            <a:off x="10637215" y="0"/>
-            <a:ext cx="914400" cy="1554480"/>
-          </a:xfrm>
-          <a:prstGeom prst="round2SameRect">
-            <a:avLst>
-              <a:gd name="adj1" fmla="val 50000"/>
-              <a:gd name="adj2" fmla="val 0"/>
-            </a:avLst>
+          <a:xfrm>
+            <a:off x="10180015" y="-1645920"/>
+            <a:ext cx="3474720" cy="3474720"/>
+          </a:xfrm>
+          <a:prstGeom prst="ellipse">
+            <a:avLst/>
           </a:prstGeom>
           <a:solidFill>
-            <a:srgbClr val="D4E3F7"/>
+            <a:srgbClr val="A6C6F2"/>
+          </a:solidFill>
+          <a:ln>
+            <a:noFill/>
+          </a:ln>
+        </p:spPr>
+        <p:txBody>
+          <a:bodyPr rtlCol="0" anchor="ctr"/>
+          <a:lstStyle/>
+          <a:p>
+            <a:pPr algn="ctr"/>
+          </a:p>
+        </p:txBody>
+      </p:sp>
+      <p:sp>
+        <p:nvSpPr>
+          <p:cNvPr id="4" name="상단 라벨"/>
+          <p:cNvSpPr txBox="1"/>
+          <p:nvPr/>
+        </p:nvSpPr>
+        <p:spPr>
+          <a:xfrm>
+            <a:off x="640080" y="274320"/>
+            <a:ext cx="5486400" cy="274320"/>
+          </a:xfrm>
+          <a:prstGeom prst="rect">
+            <a:avLst/>
+          </a:prstGeom>
+          <a:noFill/>
+        </p:spPr>
+        <p:txBody>
+          <a:bodyPr wrap="square" lIns="54864" rIns="54864" tIns="27432" bIns="27432" anchor="ctr">
+            <a:noAutofit/>
+          </a:bodyPr>
+          <a:lstStyle/>
+          <a:p>
+            <a:pPr algn="l">
+              <a:lnSpc>
+                <a:spcPct val="115000"/>
+              </a:lnSpc>
+            </a:pPr>
+            <a:r>
+              <a:rPr sz="900" b="1" i="0" spc="250">
+                <a:solidFill>
+                  <a:srgbClr val="26231F"/>
+                </a:solidFill>
+              </a:rPr>
+              <a:t>INSURANCE CHECK</a:t>
+            </a:r>
+          </a:p>
+        </p:txBody>
+      </p:sp>
+      <p:sp>
+        <p:nvSpPr>
+          <p:cNvPr id="5" name="포인트"/>
+          <p:cNvSpPr/>
+          <p:nvPr/>
+        </p:nvSpPr>
+        <p:spPr>
+          <a:xfrm>
+            <a:off x="11048695" y="502919"/>
+            <a:ext cx="274320" cy="274320"/>
+          </a:xfrm>
+          <a:prstGeom prst="ellipse">
+            <a:avLst/>
+          </a:prstGeom>
+          <a:solidFill>
+            <a:srgbClr val="FFFFFF"/>
           </a:solidFill>
           <a:ln>
             <a:noFill/>
@@ -6319,8 +6591,8 @@
         </p:nvSpPr>
         <p:spPr>
           <a:xfrm>
-            <a:off x="640080" y="457200"/>
-            <a:ext cx="9722815" cy="868680"/>
+            <a:off x="640080" y="658368"/>
+            <a:ext cx="9082735" cy="868680"/>
           </a:xfrm>
         </p:spPr>
         <p:txBody>
@@ -6337,7 +6609,7 @@
             <a:r>
               <a:rPr sz="3000" b="1" i="0">
                 <a:solidFill>
-                  <a:srgbClr val="1D4072"/>
+                  <a:srgbClr val="26231F"/>
                 </a:solidFill>
               </a:rPr>
               <a:t>보장 항목 체크</a:t>
@@ -6347,14 +6619,14 @@
       </p:sp>
       <p:graphicFrame>
         <p:nvGraphicFramePr>
-          <p:cNvPr id="4" name="표"/>
+          <p:cNvPr id="6" name="표"/>
           <p:cNvGraphicFramePr>
             <a:graphicFrameLocks noGrp="1"/>
           </p:cNvGraphicFramePr>
           <p:nvPr/>
         </p:nvGraphicFramePr>
         <p:xfrm>
-          <a:off x="640080" y="1600200"/>
+          <a:off x="640080" y="1783080"/>
           <a:ext cx="10911534" cy="4773168"/>
         </p:xfrm>
         <a:graphic>
@@ -6379,7 +6651,7 @@
                       <a:r>
                         <a:rPr sz="1400" b="1">
                           <a:solidFill>
-                            <a:srgbClr val="FFFFFF"/>
+                            <a:srgbClr val="26231F"/>
                           </a:solidFill>
                         </a:rPr>
                         <a:t>보장 항목</a:t>
@@ -6389,30 +6661,30 @@
                   <a:tcPr anchor="ctr" marL="73152" marR="73152">
                     <a:lnL w="9525" cap="flat" cmpd="sng" algn="ctr">
                       <a:solidFill>
-                        <a:srgbClr val="4981D0"/>
+                        <a:srgbClr val="97BBED"/>
                       </a:solidFill>
                       <a:prstDash val="solid"/>
                     </a:lnL>
                     <a:lnR w="9525" cap="flat" cmpd="sng" algn="ctr">
                       <a:solidFill>
-                        <a:srgbClr val="4981D0"/>
+                        <a:srgbClr val="97BBED"/>
                       </a:solidFill>
                       <a:prstDash val="solid"/>
                     </a:lnR>
                     <a:lnT w="9525" cap="flat" cmpd="sng" algn="ctr">
                       <a:solidFill>
-                        <a:srgbClr val="4981D0"/>
+                        <a:srgbClr val="97BBED"/>
                       </a:solidFill>
                       <a:prstDash val="solid"/>
                     </a:lnT>
                     <a:lnB w="9525" cap="flat" cmpd="sng" algn="ctr">
                       <a:solidFill>
-                        <a:srgbClr val="4981D0"/>
+                        <a:srgbClr val="97BBED"/>
                       </a:solidFill>
                       <a:prstDash val="solid"/>
                     </a:lnB>
                     <a:solidFill>
-                      <a:srgbClr val="4981D0"/>
+                      <a:srgbClr val="97BBED"/>
                     </a:solidFill>
                   </a:tcPr>
                 </a:tc>
@@ -6425,7 +6697,7 @@
                       <a:r>
                         <a:rPr sz="1400" b="1">
                           <a:solidFill>
-                            <a:srgbClr val="FFFFFF"/>
+                            <a:srgbClr val="26231F"/>
                           </a:solidFill>
                         </a:rPr>
                         <a:t>가입 확인</a:t>
@@ -6435,30 +6707,30 @@
                   <a:tcPr anchor="ctr" marL="73152" marR="73152">
                     <a:lnL w="9525" cap="flat" cmpd="sng" algn="ctr">
                       <a:solidFill>
-                        <a:srgbClr val="4981D0"/>
+                        <a:srgbClr val="97BBED"/>
                       </a:solidFill>
                       <a:prstDash val="solid"/>
                     </a:lnL>
                     <a:lnR w="9525" cap="flat" cmpd="sng" algn="ctr">
                       <a:solidFill>
-                        <a:srgbClr val="4981D0"/>
+                        <a:srgbClr val="97BBED"/>
                       </a:solidFill>
                       <a:prstDash val="solid"/>
                     </a:lnR>
                     <a:lnT w="9525" cap="flat" cmpd="sng" algn="ctr">
                       <a:solidFill>
-                        <a:srgbClr val="4981D0"/>
+                        <a:srgbClr val="97BBED"/>
                       </a:solidFill>
                       <a:prstDash val="solid"/>
                     </a:lnT>
                     <a:lnB w="9525" cap="flat" cmpd="sng" algn="ctr">
                       <a:solidFill>
-                        <a:srgbClr val="4981D0"/>
+                        <a:srgbClr val="97BBED"/>
                       </a:solidFill>
                       <a:prstDash val="solid"/>
                     </a:lnB>
                     <a:solidFill>
-                      <a:srgbClr val="4981D0"/>
+                      <a:srgbClr val="97BBED"/>
                     </a:solidFill>
                   </a:tcPr>
                 </a:tc>
@@ -6471,7 +6743,7 @@
                       <a:r>
                         <a:rPr sz="1400" b="1">
                           <a:solidFill>
-                            <a:srgbClr val="FFFFFF"/>
+                            <a:srgbClr val="26231F"/>
                           </a:solidFill>
                         </a:rPr>
                         <a:t>확인 필요</a:t>
@@ -6481,30 +6753,30 @@
                   <a:tcPr anchor="ctr" marL="73152" marR="73152">
                     <a:lnL w="9525" cap="flat" cmpd="sng" algn="ctr">
                       <a:solidFill>
-                        <a:srgbClr val="4981D0"/>
+                        <a:srgbClr val="97BBED"/>
                       </a:solidFill>
                       <a:prstDash val="solid"/>
                     </a:lnL>
                     <a:lnR w="9525" cap="flat" cmpd="sng" algn="ctr">
                       <a:solidFill>
-                        <a:srgbClr val="4981D0"/>
+                        <a:srgbClr val="97BBED"/>
                       </a:solidFill>
                       <a:prstDash val="solid"/>
                     </a:lnR>
                     <a:lnT w="9525" cap="flat" cmpd="sng" algn="ctr">
                       <a:solidFill>
-                        <a:srgbClr val="4981D0"/>
+                        <a:srgbClr val="97BBED"/>
                       </a:solidFill>
                       <a:prstDash val="solid"/>
                     </a:lnT>
                     <a:lnB w="9525" cap="flat" cmpd="sng" algn="ctr">
                       <a:solidFill>
-                        <a:srgbClr val="4981D0"/>
+                        <a:srgbClr val="97BBED"/>
                       </a:solidFill>
                       <a:prstDash val="solid"/>
                     </a:lnB>
                     <a:solidFill>
-                      <a:srgbClr val="4981D0"/>
+                      <a:srgbClr val="97BBED"/>
                     </a:solidFill>
                   </a:tcPr>
                 </a:tc>
@@ -6517,7 +6789,7 @@
                       <a:r>
                         <a:rPr sz="1400" b="1">
                           <a:solidFill>
-                            <a:srgbClr val="FFFFFF"/>
+                            <a:srgbClr val="26231F"/>
                           </a:solidFill>
                         </a:rPr>
                         <a:t>해당 없음</a:t>
@@ -6527,30 +6799,30 @@
                   <a:tcPr anchor="ctr" marL="73152" marR="73152">
                     <a:lnL w="9525" cap="flat" cmpd="sng" algn="ctr">
                       <a:solidFill>
-                        <a:srgbClr val="4981D0"/>
+                        <a:srgbClr val="97BBED"/>
                       </a:solidFill>
                       <a:prstDash val="solid"/>
                     </a:lnL>
                     <a:lnR w="9525" cap="flat" cmpd="sng" algn="ctr">
                       <a:solidFill>
-                        <a:srgbClr val="4981D0"/>
+                        <a:srgbClr val="97BBED"/>
                       </a:solidFill>
                       <a:prstDash val="solid"/>
                     </a:lnR>
                     <a:lnT w="9525" cap="flat" cmpd="sng" algn="ctr">
                       <a:solidFill>
-                        <a:srgbClr val="4981D0"/>
+                        <a:srgbClr val="97BBED"/>
                       </a:solidFill>
                       <a:prstDash val="solid"/>
                     </a:lnT>
                     <a:lnB w="9525" cap="flat" cmpd="sng" algn="ctr">
                       <a:solidFill>
-                        <a:srgbClr val="4981D0"/>
+                        <a:srgbClr val="97BBED"/>
                       </a:solidFill>
                       <a:prstDash val="solid"/>
                     </a:lnB>
                     <a:solidFill>
-                      <a:srgbClr val="4981D0"/>
+                      <a:srgbClr val="97BBED"/>
                     </a:solidFill>
                   </a:tcPr>
                 </a:tc>
@@ -6565,7 +6837,7 @@
                       <a:r>
                         <a:rPr sz="1400" b="1">
                           <a:solidFill>
-                            <a:srgbClr val="1D4072"/>
+                            <a:srgbClr val="273549"/>
                           </a:solidFill>
                         </a:rPr>
                         <a:t>사망·재해</a:t>
@@ -6575,30 +6847,30 @@
                   <a:tcPr anchor="ctr" marL="73152" marR="73152">
                     <a:lnL w="9525" cap="flat" cmpd="sng" algn="ctr">
                       <a:solidFill>
-                        <a:srgbClr val="D4E3F7"/>
+                        <a:srgbClr val="D1E2FA"/>
                       </a:solidFill>
                       <a:prstDash val="solid"/>
                     </a:lnL>
                     <a:lnR w="9525" cap="flat" cmpd="sng" algn="ctr">
                       <a:solidFill>
-                        <a:srgbClr val="D4E3F7"/>
+                        <a:srgbClr val="D1E2FA"/>
                       </a:solidFill>
                       <a:prstDash val="solid"/>
                     </a:lnR>
                     <a:lnT w="9525" cap="flat" cmpd="sng" algn="ctr">
                       <a:solidFill>
-                        <a:srgbClr val="D4E3F7"/>
+                        <a:srgbClr val="D1E2FA"/>
                       </a:solidFill>
                       <a:prstDash val="solid"/>
                     </a:lnT>
                     <a:lnB w="9525" cap="flat" cmpd="sng" algn="ctr">
                       <a:solidFill>
-                        <a:srgbClr val="D4E3F7"/>
+                        <a:srgbClr val="D1E2FA"/>
                       </a:solidFill>
                       <a:prstDash val="solid"/>
                     </a:lnB>
                     <a:solidFill>
-                      <a:srgbClr val="D4E3F7"/>
+                      <a:srgbClr val="D1E2FA"/>
                     </a:solidFill>
                   </a:tcPr>
                 </a:tc>
@@ -6611,7 +6883,7 @@
                       <a:r>
                         <a:rPr sz="1400" b="0">
                           <a:solidFill>
-                            <a:srgbClr val="2B2B2B"/>
+                            <a:srgbClr val="26231F"/>
                           </a:solidFill>
                         </a:rPr>
                         <a:t>□</a:t>
@@ -6621,25 +6893,25 @@
                   <a:tcPr anchor="ctr" marL="73152" marR="73152">
                     <a:lnL w="9525" cap="flat" cmpd="sng" algn="ctr">
                       <a:solidFill>
-                        <a:srgbClr val="D4E3F7"/>
+                        <a:srgbClr val="D1E2FA"/>
                       </a:solidFill>
                       <a:prstDash val="solid"/>
                     </a:lnL>
                     <a:lnR w="9525" cap="flat" cmpd="sng" algn="ctr">
                       <a:solidFill>
-                        <a:srgbClr val="D4E3F7"/>
+                        <a:srgbClr val="D1E2FA"/>
                       </a:solidFill>
                       <a:prstDash val="solid"/>
                     </a:lnR>
                     <a:lnT w="9525" cap="flat" cmpd="sng" algn="ctr">
                       <a:solidFill>
-                        <a:srgbClr val="D4E3F7"/>
+                        <a:srgbClr val="D1E2FA"/>
                       </a:solidFill>
                       <a:prstDash val="solid"/>
                     </a:lnT>
                     <a:lnB w="9525" cap="flat" cmpd="sng" algn="ctr">
                       <a:solidFill>
-                        <a:srgbClr val="D4E3F7"/>
+                        <a:srgbClr val="D1E2FA"/>
                       </a:solidFill>
                       <a:prstDash val="solid"/>
                     </a:lnB>
@@ -6657,7 +6929,7 @@
                       <a:r>
                         <a:rPr sz="1400" b="0">
                           <a:solidFill>
-                            <a:srgbClr val="2B2B2B"/>
+                            <a:srgbClr val="26231F"/>
                           </a:solidFill>
                         </a:rPr>
                         <a:t>□</a:t>
@@ -6667,25 +6939,25 @@
                   <a:tcPr anchor="ctr" marL="73152" marR="73152">
                     <a:lnL w="9525" cap="flat" cmpd="sng" algn="ctr">
                       <a:solidFill>
-                        <a:srgbClr val="D4E3F7"/>
+                        <a:srgbClr val="D1E2FA"/>
                       </a:solidFill>
                       <a:prstDash val="solid"/>
                     </a:lnL>
                     <a:lnR w="9525" cap="flat" cmpd="sng" algn="ctr">
                       <a:solidFill>
-                        <a:srgbClr val="D4E3F7"/>
+                        <a:srgbClr val="D1E2FA"/>
                       </a:solidFill>
                       <a:prstDash val="solid"/>
                     </a:lnR>
                     <a:lnT w="9525" cap="flat" cmpd="sng" algn="ctr">
                       <a:solidFill>
-                        <a:srgbClr val="D4E3F7"/>
+                        <a:srgbClr val="D1E2FA"/>
                       </a:solidFill>
                       <a:prstDash val="solid"/>
                     </a:lnT>
                     <a:lnB w="9525" cap="flat" cmpd="sng" algn="ctr">
                       <a:solidFill>
-                        <a:srgbClr val="D4E3F7"/>
+                        <a:srgbClr val="D1E2FA"/>
                       </a:solidFill>
                       <a:prstDash val="solid"/>
                     </a:lnB>
@@ -6703,7 +6975,7 @@
                       <a:r>
                         <a:rPr sz="1400" b="0">
                           <a:solidFill>
-                            <a:srgbClr val="2B2B2B"/>
+                            <a:srgbClr val="26231F"/>
                           </a:solidFill>
                         </a:rPr>
                         <a:t>□</a:t>
@@ -6713,25 +6985,25 @@
                   <a:tcPr anchor="ctr" marL="73152" marR="73152">
                     <a:lnL w="9525" cap="flat" cmpd="sng" algn="ctr">
                       <a:solidFill>
-                        <a:srgbClr val="D4E3F7"/>
+                        <a:srgbClr val="D1E2FA"/>
                       </a:solidFill>
                       <a:prstDash val="solid"/>
                     </a:lnL>
                     <a:lnR w="9525" cap="flat" cmpd="sng" algn="ctr">
                       <a:solidFill>
-                        <a:srgbClr val="D4E3F7"/>
+                        <a:srgbClr val="D1E2FA"/>
                       </a:solidFill>
                       <a:prstDash val="solid"/>
                     </a:lnR>
                     <a:lnT w="9525" cap="flat" cmpd="sng" algn="ctr">
                       <a:solidFill>
-                        <a:srgbClr val="D4E3F7"/>
+                        <a:srgbClr val="D1E2FA"/>
                       </a:solidFill>
                       <a:prstDash val="solid"/>
                     </a:lnT>
                     <a:lnB w="9525" cap="flat" cmpd="sng" algn="ctr">
                       <a:solidFill>
-                        <a:srgbClr val="D4E3F7"/>
+                        <a:srgbClr val="D1E2FA"/>
                       </a:solidFill>
                       <a:prstDash val="solid"/>
                     </a:lnB>
@@ -6751,7 +7023,7 @@
                       <a:r>
                         <a:rPr sz="1400" b="1">
                           <a:solidFill>
-                            <a:srgbClr val="1D4072"/>
+                            <a:srgbClr val="273549"/>
                           </a:solidFill>
                         </a:rPr>
                         <a:t>질병 진단</a:t>
@@ -6761,30 +7033,30 @@
                   <a:tcPr anchor="ctr" marL="73152" marR="73152">
                     <a:lnL w="9525" cap="flat" cmpd="sng" algn="ctr">
                       <a:solidFill>
-                        <a:srgbClr val="D4E3F7"/>
+                        <a:srgbClr val="D1E2FA"/>
                       </a:solidFill>
                       <a:prstDash val="solid"/>
                     </a:lnL>
                     <a:lnR w="9525" cap="flat" cmpd="sng" algn="ctr">
                       <a:solidFill>
-                        <a:srgbClr val="D4E3F7"/>
+                        <a:srgbClr val="D1E2FA"/>
                       </a:solidFill>
                       <a:prstDash val="solid"/>
                     </a:lnR>
                     <a:lnT w="9525" cap="flat" cmpd="sng" algn="ctr">
                       <a:solidFill>
-                        <a:srgbClr val="D4E3F7"/>
+                        <a:srgbClr val="D1E2FA"/>
                       </a:solidFill>
                       <a:prstDash val="solid"/>
                     </a:lnT>
                     <a:lnB w="9525" cap="flat" cmpd="sng" algn="ctr">
                       <a:solidFill>
-                        <a:srgbClr val="D4E3F7"/>
+                        <a:srgbClr val="D1E2FA"/>
                       </a:solidFill>
                       <a:prstDash val="solid"/>
                     </a:lnB>
                     <a:solidFill>
-                      <a:srgbClr val="D4E3F7"/>
+                      <a:srgbClr val="D1E2FA"/>
                     </a:solidFill>
                   </a:tcPr>
                 </a:tc>
@@ -6797,7 +7069,7 @@
                       <a:r>
                         <a:rPr sz="1400" b="0">
                           <a:solidFill>
-                            <a:srgbClr val="2B2B2B"/>
+                            <a:srgbClr val="26231F"/>
                           </a:solidFill>
                         </a:rPr>
                         <a:t>□</a:t>
@@ -6807,30 +7079,30 @@
                   <a:tcPr anchor="ctr" marL="73152" marR="73152">
                     <a:lnL w="9525" cap="flat" cmpd="sng" algn="ctr">
                       <a:solidFill>
-                        <a:srgbClr val="D4E3F7"/>
+                        <a:srgbClr val="D1E2FA"/>
                       </a:solidFill>
                       <a:prstDash val="solid"/>
                     </a:lnL>
                     <a:lnR w="9525" cap="flat" cmpd="sng" algn="ctr">
                       <a:solidFill>
-                        <a:srgbClr val="D4E3F7"/>
+                        <a:srgbClr val="D1E2FA"/>
                       </a:solidFill>
                       <a:prstDash val="solid"/>
                     </a:lnR>
                     <a:lnT w="9525" cap="flat" cmpd="sng" algn="ctr">
                       <a:solidFill>
-                        <a:srgbClr val="D4E3F7"/>
+                        <a:srgbClr val="D1E2FA"/>
                       </a:solidFill>
                       <a:prstDash val="solid"/>
                     </a:lnT>
                     <a:lnB w="9525" cap="flat" cmpd="sng" algn="ctr">
                       <a:solidFill>
-                        <a:srgbClr val="D4E3F7"/>
+                        <a:srgbClr val="D1E2FA"/>
                       </a:solidFill>
                       <a:prstDash val="solid"/>
                     </a:lnB>
                     <a:solidFill>
-                      <a:srgbClr val="F3F7FC"/>
+                      <a:srgbClr val="EAF2FD"/>
                     </a:solidFill>
                   </a:tcPr>
                 </a:tc>
@@ -6843,7 +7115,7 @@
                       <a:r>
                         <a:rPr sz="1400" b="0">
                           <a:solidFill>
-                            <a:srgbClr val="2B2B2B"/>
+                            <a:srgbClr val="26231F"/>
                           </a:solidFill>
                         </a:rPr>
                         <a:t>□</a:t>
@@ -6853,30 +7125,30 @@
                   <a:tcPr anchor="ctr" marL="73152" marR="73152">
                     <a:lnL w="9525" cap="flat" cmpd="sng" algn="ctr">
                       <a:solidFill>
-                        <a:srgbClr val="D4E3F7"/>
+                        <a:srgbClr val="D1E2FA"/>
                       </a:solidFill>
                       <a:prstDash val="solid"/>
                     </a:lnL>
                     <a:lnR w="9525" cap="flat" cmpd="sng" algn="ctr">
                       <a:solidFill>
-                        <a:srgbClr val="D4E3F7"/>
+                        <a:srgbClr val="D1E2FA"/>
                       </a:solidFill>
                       <a:prstDash val="solid"/>
                     </a:lnR>
                     <a:lnT w="9525" cap="flat" cmpd="sng" algn="ctr">
                       <a:solidFill>
-                        <a:srgbClr val="D4E3F7"/>
+                        <a:srgbClr val="D1E2FA"/>
                       </a:solidFill>
                       <a:prstDash val="solid"/>
                     </a:lnT>
                     <a:lnB w="9525" cap="flat" cmpd="sng" algn="ctr">
                       <a:solidFill>
-                        <a:srgbClr val="D4E3F7"/>
+                        <a:srgbClr val="D1E2FA"/>
                       </a:solidFill>
                       <a:prstDash val="solid"/>
                     </a:lnB>
                     <a:solidFill>
-                      <a:srgbClr val="F3F7FC"/>
+                      <a:srgbClr val="EAF2FD"/>
                     </a:solidFill>
                   </a:tcPr>
                 </a:tc>
@@ -6889,7 +7161,7 @@
                       <a:r>
                         <a:rPr sz="1400" b="0">
                           <a:solidFill>
-                            <a:srgbClr val="2B2B2B"/>
+                            <a:srgbClr val="26231F"/>
                           </a:solidFill>
                         </a:rPr>
                         <a:t>□</a:t>
@@ -6899,30 +7171,30 @@
                   <a:tcPr anchor="ctr" marL="73152" marR="73152">
                     <a:lnL w="9525" cap="flat" cmpd="sng" algn="ctr">
                       <a:solidFill>
-                        <a:srgbClr val="D4E3F7"/>
+                        <a:srgbClr val="D1E2FA"/>
                       </a:solidFill>
                       <a:prstDash val="solid"/>
                     </a:lnL>
                     <a:lnR w="9525" cap="flat" cmpd="sng" algn="ctr">
                       <a:solidFill>
-                        <a:srgbClr val="D4E3F7"/>
+                        <a:srgbClr val="D1E2FA"/>
                       </a:solidFill>
                       <a:prstDash val="solid"/>
                     </a:lnR>
                     <a:lnT w="9525" cap="flat" cmpd="sng" algn="ctr">
                       <a:solidFill>
-                        <a:srgbClr val="D4E3F7"/>
+                        <a:srgbClr val="D1E2FA"/>
                       </a:solidFill>
                       <a:prstDash val="solid"/>
                     </a:lnT>
                     <a:lnB w="9525" cap="flat" cmpd="sng" algn="ctr">
                       <a:solidFill>
-                        <a:srgbClr val="D4E3F7"/>
+                        <a:srgbClr val="D1E2FA"/>
                       </a:solidFill>
                       <a:prstDash val="solid"/>
                     </a:lnB>
                     <a:solidFill>
-                      <a:srgbClr val="F3F7FC"/>
+                      <a:srgbClr val="EAF2FD"/>
                     </a:solidFill>
                   </a:tcPr>
                 </a:tc>
@@ -6937,7 +7209,7 @@
                       <a:r>
                         <a:rPr sz="1400" b="1">
                           <a:solidFill>
-                            <a:srgbClr val="1D4072"/>
+                            <a:srgbClr val="273549"/>
                           </a:solidFill>
                         </a:rPr>
                         <a:t>암</a:t>
@@ -6947,30 +7219,30 @@
                   <a:tcPr anchor="ctr" marL="73152" marR="73152">
                     <a:lnL w="9525" cap="flat" cmpd="sng" algn="ctr">
                       <a:solidFill>
-                        <a:srgbClr val="D4E3F7"/>
+                        <a:srgbClr val="D1E2FA"/>
                       </a:solidFill>
                       <a:prstDash val="solid"/>
                     </a:lnL>
                     <a:lnR w="9525" cap="flat" cmpd="sng" algn="ctr">
                       <a:solidFill>
-                        <a:srgbClr val="D4E3F7"/>
+                        <a:srgbClr val="D1E2FA"/>
                       </a:solidFill>
                       <a:prstDash val="solid"/>
                     </a:lnR>
                     <a:lnT w="9525" cap="flat" cmpd="sng" algn="ctr">
                       <a:solidFill>
-                        <a:srgbClr val="D4E3F7"/>
+                        <a:srgbClr val="D1E2FA"/>
                       </a:solidFill>
                       <a:prstDash val="solid"/>
                     </a:lnT>
                     <a:lnB w="9525" cap="flat" cmpd="sng" algn="ctr">
                       <a:solidFill>
-                        <a:srgbClr val="D4E3F7"/>
+                        <a:srgbClr val="D1E2FA"/>
                       </a:solidFill>
                       <a:prstDash val="solid"/>
                     </a:lnB>
                     <a:solidFill>
-                      <a:srgbClr val="D4E3F7"/>
+                      <a:srgbClr val="D1E2FA"/>
                     </a:solidFill>
                   </a:tcPr>
                 </a:tc>
@@ -6983,7 +7255,7 @@
                       <a:r>
                         <a:rPr sz="1400" b="0">
                           <a:solidFill>
-                            <a:srgbClr val="2B2B2B"/>
+                            <a:srgbClr val="26231F"/>
                           </a:solidFill>
                         </a:rPr>
                         <a:t>□</a:t>
@@ -6993,25 +7265,25 @@
                   <a:tcPr anchor="ctr" marL="73152" marR="73152">
                     <a:lnL w="9525" cap="flat" cmpd="sng" algn="ctr">
                       <a:solidFill>
-                        <a:srgbClr val="D4E3F7"/>
+                        <a:srgbClr val="D1E2FA"/>
                       </a:solidFill>
                       <a:prstDash val="solid"/>
                     </a:lnL>
                     <a:lnR w="9525" cap="flat" cmpd="sng" algn="ctr">
                       <a:solidFill>
-                        <a:srgbClr val="D4E3F7"/>
+                        <a:srgbClr val="D1E2FA"/>
                       </a:solidFill>
                       <a:prstDash val="solid"/>
                     </a:lnR>
                     <a:lnT w="9525" cap="flat" cmpd="sng" algn="ctr">
                       <a:solidFill>
-                        <a:srgbClr val="D4E3F7"/>
+                        <a:srgbClr val="D1E2FA"/>
                       </a:solidFill>
                       <a:prstDash val="solid"/>
                     </a:lnT>
                     <a:lnB w="9525" cap="flat" cmpd="sng" algn="ctr">
                       <a:solidFill>
-                        <a:srgbClr val="D4E3F7"/>
+                        <a:srgbClr val="D1E2FA"/>
                       </a:solidFill>
                       <a:prstDash val="solid"/>
                     </a:lnB>
@@ -7029,7 +7301,7 @@
                       <a:r>
                         <a:rPr sz="1400" b="0">
                           <a:solidFill>
-                            <a:srgbClr val="2B2B2B"/>
+                            <a:srgbClr val="26231F"/>
                           </a:solidFill>
                         </a:rPr>
                         <a:t>□</a:t>
@@ -7039,25 +7311,25 @@
                   <a:tcPr anchor="ctr" marL="73152" marR="73152">
                     <a:lnL w="9525" cap="flat" cmpd="sng" algn="ctr">
                       <a:solidFill>
-                        <a:srgbClr val="D4E3F7"/>
+                        <a:srgbClr val="D1E2FA"/>
                       </a:solidFill>
                       <a:prstDash val="solid"/>
                     </a:lnL>
                     <a:lnR w="9525" cap="flat" cmpd="sng" algn="ctr">
                       <a:solidFill>
-                        <a:srgbClr val="D4E3F7"/>
+                        <a:srgbClr val="D1E2FA"/>
                       </a:solidFill>
                       <a:prstDash val="solid"/>
                     </a:lnR>
                     <a:lnT w="9525" cap="flat" cmpd="sng" algn="ctr">
                       <a:solidFill>
-                        <a:srgbClr val="D4E3F7"/>
+                        <a:srgbClr val="D1E2FA"/>
                       </a:solidFill>
                       <a:prstDash val="solid"/>
                     </a:lnT>
                     <a:lnB w="9525" cap="flat" cmpd="sng" algn="ctr">
                       <a:solidFill>
-                        <a:srgbClr val="D4E3F7"/>
+                        <a:srgbClr val="D1E2FA"/>
                       </a:solidFill>
                       <a:prstDash val="solid"/>
                     </a:lnB>
@@ -7075,7 +7347,7 @@
                       <a:r>
                         <a:rPr sz="1400" b="0">
                           <a:solidFill>
-                            <a:srgbClr val="2B2B2B"/>
+                            <a:srgbClr val="26231F"/>
                           </a:solidFill>
                         </a:rPr>
                         <a:t>□</a:t>
@@ -7085,25 +7357,25 @@
                   <a:tcPr anchor="ctr" marL="73152" marR="73152">
                     <a:lnL w="9525" cap="flat" cmpd="sng" algn="ctr">
                       <a:solidFill>
-                        <a:srgbClr val="D4E3F7"/>
+                        <a:srgbClr val="D1E2FA"/>
                       </a:solidFill>
                       <a:prstDash val="solid"/>
                     </a:lnL>
                     <a:lnR w="9525" cap="flat" cmpd="sng" algn="ctr">
                       <a:solidFill>
-                        <a:srgbClr val="D4E3F7"/>
+                        <a:srgbClr val="D1E2FA"/>
                       </a:solidFill>
                       <a:prstDash val="solid"/>
                     </a:lnR>
                     <a:lnT w="9525" cap="flat" cmpd="sng" algn="ctr">
                       <a:solidFill>
-                        <a:srgbClr val="D4E3F7"/>
+                        <a:srgbClr val="D1E2FA"/>
                       </a:solidFill>
                       <a:prstDash val="solid"/>
                     </a:lnT>
                     <a:lnB w="9525" cap="flat" cmpd="sng" algn="ctr">
                       <a:solidFill>
-                        <a:srgbClr val="D4E3F7"/>
+                        <a:srgbClr val="D1E2FA"/>
                       </a:solidFill>
                       <a:prstDash val="solid"/>
                     </a:lnB>
@@ -7123,7 +7395,7 @@
                       <a:r>
                         <a:rPr sz="1400" b="1">
                           <a:solidFill>
-                            <a:srgbClr val="1D4072"/>
+                            <a:srgbClr val="273549"/>
                           </a:solidFill>
                         </a:rPr>
                         <a:t>뇌·심장</a:t>
@@ -7133,30 +7405,30 @@
                   <a:tcPr anchor="ctr" marL="73152" marR="73152">
                     <a:lnL w="9525" cap="flat" cmpd="sng" algn="ctr">
                       <a:solidFill>
-                        <a:srgbClr val="D4E3F7"/>
+                        <a:srgbClr val="D1E2FA"/>
                       </a:solidFill>
                       <a:prstDash val="solid"/>
                     </a:lnL>
                     <a:lnR w="9525" cap="flat" cmpd="sng" algn="ctr">
                       <a:solidFill>
-                        <a:srgbClr val="D4E3F7"/>
+                        <a:srgbClr val="D1E2FA"/>
                       </a:solidFill>
                       <a:prstDash val="solid"/>
                     </a:lnR>
                     <a:lnT w="9525" cap="flat" cmpd="sng" algn="ctr">
                       <a:solidFill>
-                        <a:srgbClr val="D4E3F7"/>
+                        <a:srgbClr val="D1E2FA"/>
                       </a:solidFill>
                       <a:prstDash val="solid"/>
                     </a:lnT>
                     <a:lnB w="9525" cap="flat" cmpd="sng" algn="ctr">
                       <a:solidFill>
-                        <a:srgbClr val="D4E3F7"/>
+                        <a:srgbClr val="D1E2FA"/>
                       </a:solidFill>
                       <a:prstDash val="solid"/>
                     </a:lnB>
                     <a:solidFill>
-                      <a:srgbClr val="D4E3F7"/>
+                      <a:srgbClr val="D1E2FA"/>
                     </a:solidFill>
                   </a:tcPr>
                 </a:tc>
@@ -7169,7 +7441,7 @@
                       <a:r>
                         <a:rPr sz="1400" b="0">
                           <a:solidFill>
-                            <a:srgbClr val="2B2B2B"/>
+                            <a:srgbClr val="26231F"/>
                           </a:solidFill>
                         </a:rPr>
                         <a:t>□</a:t>
@@ -7179,30 +7451,30 @@
                   <a:tcPr anchor="ctr" marL="73152" marR="73152">
                     <a:lnL w="9525" cap="flat" cmpd="sng" algn="ctr">
                       <a:solidFill>
-                        <a:srgbClr val="D4E3F7"/>
+                        <a:srgbClr val="D1E2FA"/>
                       </a:solidFill>
                       <a:prstDash val="solid"/>
                     </a:lnL>
                     <a:lnR w="9525" cap="flat" cmpd="sng" algn="ctr">
                       <a:solidFill>
-                        <a:srgbClr val="D4E3F7"/>
+                        <a:srgbClr val="D1E2FA"/>
                       </a:solidFill>
                       <a:prstDash val="solid"/>
                     </a:lnR>
                     <a:lnT w="9525" cap="flat" cmpd="sng" algn="ctr">
                       <a:solidFill>
-                        <a:srgbClr val="D4E3F7"/>
+                        <a:srgbClr val="D1E2FA"/>
                       </a:solidFill>
                       <a:prstDash val="solid"/>
                     </a:lnT>
                     <a:lnB w="9525" cap="flat" cmpd="sng" algn="ctr">
                       <a:solidFill>
-                        <a:srgbClr val="D4E3F7"/>
+                        <a:srgbClr val="D1E2FA"/>
                       </a:solidFill>
                       <a:prstDash val="solid"/>
                     </a:lnB>
                     <a:solidFill>
-                      <a:srgbClr val="F3F7FC"/>
+                      <a:srgbClr val="EAF2FD"/>
                     </a:solidFill>
                   </a:tcPr>
                 </a:tc>
@@ -7215,7 +7487,7 @@
                       <a:r>
                         <a:rPr sz="1400" b="0">
                           <a:solidFill>
-                            <a:srgbClr val="2B2B2B"/>
+                            <a:srgbClr val="26231F"/>
                           </a:solidFill>
                         </a:rPr>
                         <a:t>□</a:t>
@@ -7225,30 +7497,30 @@
                   <a:tcPr anchor="ctr" marL="73152" marR="73152">
                     <a:lnL w="9525" cap="flat" cmpd="sng" algn="ctr">
                       <a:solidFill>
-                        <a:srgbClr val="D4E3F7"/>
+                        <a:srgbClr val="D1E2FA"/>
                       </a:solidFill>
                       <a:prstDash val="solid"/>
                     </a:lnL>
                     <a:lnR w="9525" cap="flat" cmpd="sng" algn="ctr">
                       <a:solidFill>
-                        <a:srgbClr val="D4E3F7"/>
+                        <a:srgbClr val="D1E2FA"/>
                       </a:solidFill>
                       <a:prstDash val="solid"/>
                     </a:lnR>
                     <a:lnT w="9525" cap="flat" cmpd="sng" algn="ctr">
                       <a:solidFill>
-                        <a:srgbClr val="D4E3F7"/>
+                        <a:srgbClr val="D1E2FA"/>
                       </a:solidFill>
                       <a:prstDash val="solid"/>
                     </a:lnT>
                     <a:lnB w="9525" cap="flat" cmpd="sng" algn="ctr">
                       <a:solidFill>
-                        <a:srgbClr val="D4E3F7"/>
+                        <a:srgbClr val="D1E2FA"/>
                       </a:solidFill>
                       <a:prstDash val="solid"/>
                     </a:lnB>
                     <a:solidFill>
-                      <a:srgbClr val="F3F7FC"/>
+                      <a:srgbClr val="EAF2FD"/>
                     </a:solidFill>
                   </a:tcPr>
                 </a:tc>
@@ -7261,7 +7533,7 @@
                       <a:r>
                         <a:rPr sz="1400" b="0">
                           <a:solidFill>
-                            <a:srgbClr val="2B2B2B"/>
+                            <a:srgbClr val="26231F"/>
                           </a:solidFill>
                         </a:rPr>
                         <a:t>□</a:t>
@@ -7271,30 +7543,30 @@
                   <a:tcPr anchor="ctr" marL="73152" marR="73152">
                     <a:lnL w="9525" cap="flat" cmpd="sng" algn="ctr">
                       <a:solidFill>
-                        <a:srgbClr val="D4E3F7"/>
+                        <a:srgbClr val="D1E2FA"/>
                       </a:solidFill>
                       <a:prstDash val="solid"/>
                     </a:lnL>
                     <a:lnR w="9525" cap="flat" cmpd="sng" algn="ctr">
                       <a:solidFill>
-                        <a:srgbClr val="D4E3F7"/>
+                        <a:srgbClr val="D1E2FA"/>
                       </a:solidFill>
                       <a:prstDash val="solid"/>
                     </a:lnR>
                     <a:lnT w="9525" cap="flat" cmpd="sng" algn="ctr">
                       <a:solidFill>
-                        <a:srgbClr val="D4E3F7"/>
+                        <a:srgbClr val="D1E2FA"/>
                       </a:solidFill>
                       <a:prstDash val="solid"/>
                     </a:lnT>
                     <a:lnB w="9525" cap="flat" cmpd="sng" algn="ctr">
                       <a:solidFill>
-                        <a:srgbClr val="D4E3F7"/>
+                        <a:srgbClr val="D1E2FA"/>
                       </a:solidFill>
                       <a:prstDash val="solid"/>
                     </a:lnB>
                     <a:solidFill>
-                      <a:srgbClr val="F3F7FC"/>
+                      <a:srgbClr val="EAF2FD"/>
                     </a:solidFill>
                   </a:tcPr>
                 </a:tc>
@@ -7309,7 +7581,7 @@
                       <a:r>
                         <a:rPr sz="1400" b="1">
                           <a:solidFill>
-                            <a:srgbClr val="1D4072"/>
+                            <a:srgbClr val="273549"/>
                           </a:solidFill>
                         </a:rPr>
                         <a:t>입원·수술</a:t>
@@ -7319,30 +7591,30 @@
                   <a:tcPr anchor="ctr" marL="73152" marR="73152">
                     <a:lnL w="9525" cap="flat" cmpd="sng" algn="ctr">
                       <a:solidFill>
-                        <a:srgbClr val="D4E3F7"/>
+                        <a:srgbClr val="D1E2FA"/>
                       </a:solidFill>
                       <a:prstDash val="solid"/>
                     </a:lnL>
                     <a:lnR w="9525" cap="flat" cmpd="sng" algn="ctr">
                       <a:solidFill>
-                        <a:srgbClr val="D4E3F7"/>
+                        <a:srgbClr val="D1E2FA"/>
                       </a:solidFill>
                       <a:prstDash val="solid"/>
                     </a:lnR>
                     <a:lnT w="9525" cap="flat" cmpd="sng" algn="ctr">
                       <a:solidFill>
-                        <a:srgbClr val="D4E3F7"/>
+                        <a:srgbClr val="D1E2FA"/>
                       </a:solidFill>
                       <a:prstDash val="solid"/>
                     </a:lnT>
                     <a:lnB w="9525" cap="flat" cmpd="sng" algn="ctr">
                       <a:solidFill>
-                        <a:srgbClr val="D4E3F7"/>
+                        <a:srgbClr val="D1E2FA"/>
                       </a:solidFill>
                       <a:prstDash val="solid"/>
                     </a:lnB>
                     <a:solidFill>
-                      <a:srgbClr val="D4E3F7"/>
+                      <a:srgbClr val="D1E2FA"/>
                     </a:solidFill>
                   </a:tcPr>
                 </a:tc>
@@ -7355,7 +7627,7 @@
                       <a:r>
                         <a:rPr sz="1400" b="0">
                           <a:solidFill>
-                            <a:srgbClr val="2B2B2B"/>
+                            <a:srgbClr val="26231F"/>
                           </a:solidFill>
                         </a:rPr>
                         <a:t>□</a:t>
@@ -7365,25 +7637,25 @@
                   <a:tcPr anchor="ctr" marL="73152" marR="73152">
                     <a:lnL w="9525" cap="flat" cmpd="sng" algn="ctr">
                       <a:solidFill>
-                        <a:srgbClr val="D4E3F7"/>
+                        <a:srgbClr val="D1E2FA"/>
                       </a:solidFill>
                       <a:prstDash val="solid"/>
                     </a:lnL>
                     <a:lnR w="9525" cap="flat" cmpd="sng" algn="ctr">
                       <a:solidFill>
-                        <a:srgbClr val="D4E3F7"/>
+                        <a:srgbClr val="D1E2FA"/>
                       </a:solidFill>
                       <a:prstDash val="solid"/>
                     </a:lnR>
                     <a:lnT w="9525" cap="flat" cmpd="sng" algn="ctr">
                       <a:solidFill>
-                        <a:srgbClr val="D4E3F7"/>
+                        <a:srgbClr val="D1E2FA"/>
                       </a:solidFill>
                       <a:prstDash val="solid"/>
                     </a:lnT>
                     <a:lnB w="9525" cap="flat" cmpd="sng" algn="ctr">
                       <a:solidFill>
-                        <a:srgbClr val="D4E3F7"/>
+                        <a:srgbClr val="D1E2FA"/>
                       </a:solidFill>
                       <a:prstDash val="solid"/>
                     </a:lnB>
@@ -7401,7 +7673,7 @@
                       <a:r>
                         <a:rPr sz="1400" b="0">
                           <a:solidFill>
-                            <a:srgbClr val="2B2B2B"/>
+                            <a:srgbClr val="26231F"/>
                           </a:solidFill>
                         </a:rPr>
                         <a:t>□</a:t>
@@ -7411,25 +7683,25 @@
                   <a:tcPr anchor="ctr" marL="73152" marR="73152">
                     <a:lnL w="9525" cap="flat" cmpd="sng" algn="ctr">
                       <a:solidFill>
-                        <a:srgbClr val="D4E3F7"/>
+                        <a:srgbClr val="D1E2FA"/>
                       </a:solidFill>
                       <a:prstDash val="solid"/>
                     </a:lnL>
                     <a:lnR w="9525" cap="flat" cmpd="sng" algn="ctr">
                       <a:solidFill>
-                        <a:srgbClr val="D4E3F7"/>
+                        <a:srgbClr val="D1E2FA"/>
                       </a:solidFill>
                       <a:prstDash val="solid"/>
                     </a:lnR>
                     <a:lnT w="9525" cap="flat" cmpd="sng" algn="ctr">
                       <a:solidFill>
-                        <a:srgbClr val="D4E3F7"/>
+                        <a:srgbClr val="D1E2FA"/>
                       </a:solidFill>
                       <a:prstDash val="solid"/>
                     </a:lnT>
                     <a:lnB w="9525" cap="flat" cmpd="sng" algn="ctr">
                       <a:solidFill>
-                        <a:srgbClr val="D4E3F7"/>
+                        <a:srgbClr val="D1E2FA"/>
                       </a:solidFill>
                       <a:prstDash val="solid"/>
                     </a:lnB>
@@ -7447,7 +7719,7 @@
                       <a:r>
                         <a:rPr sz="1400" b="0">
                           <a:solidFill>
-                            <a:srgbClr val="2B2B2B"/>
+                            <a:srgbClr val="26231F"/>
                           </a:solidFill>
                         </a:rPr>
                         <a:t>□</a:t>
@@ -7457,25 +7729,25 @@
                   <a:tcPr anchor="ctr" marL="73152" marR="73152">
                     <a:lnL w="9525" cap="flat" cmpd="sng" algn="ctr">
                       <a:solidFill>
-                        <a:srgbClr val="D4E3F7"/>
+                        <a:srgbClr val="D1E2FA"/>
                       </a:solidFill>
                       <a:prstDash val="solid"/>
                     </a:lnL>
                     <a:lnR w="9525" cap="flat" cmpd="sng" algn="ctr">
                       <a:solidFill>
-                        <a:srgbClr val="D4E3F7"/>
+                        <a:srgbClr val="D1E2FA"/>
                       </a:solidFill>
                       <a:prstDash val="solid"/>
                     </a:lnR>
                     <a:lnT w="9525" cap="flat" cmpd="sng" algn="ctr">
                       <a:solidFill>
-                        <a:srgbClr val="D4E3F7"/>
+                        <a:srgbClr val="D1E2FA"/>
                       </a:solidFill>
                       <a:prstDash val="solid"/>
                     </a:lnT>
                     <a:lnB w="9525" cap="flat" cmpd="sng" algn="ctr">
                       <a:solidFill>
-                        <a:srgbClr val="D4E3F7"/>
+                        <a:srgbClr val="D1E2FA"/>
                       </a:solidFill>
                       <a:prstDash val="solid"/>
                     </a:lnB>
@@ -7495,7 +7767,7 @@
                       <a:r>
                         <a:rPr sz="1400" b="1">
                           <a:solidFill>
-                            <a:srgbClr val="1D4072"/>
+                            <a:srgbClr val="273549"/>
                           </a:solidFill>
                         </a:rPr>
                         <a:t>상해</a:t>
@@ -7505,30 +7777,30 @@
                   <a:tcPr anchor="ctr" marL="73152" marR="73152">
                     <a:lnL w="9525" cap="flat" cmpd="sng" algn="ctr">
                       <a:solidFill>
-                        <a:srgbClr val="D4E3F7"/>
+                        <a:srgbClr val="D1E2FA"/>
                       </a:solidFill>
                       <a:prstDash val="solid"/>
                     </a:lnL>
                     <a:lnR w="9525" cap="flat" cmpd="sng" algn="ctr">
                       <a:solidFill>
-                        <a:srgbClr val="D4E3F7"/>
+                        <a:srgbClr val="D1E2FA"/>
                       </a:solidFill>
                       <a:prstDash val="solid"/>
                     </a:lnR>
                     <a:lnT w="9525" cap="flat" cmpd="sng" algn="ctr">
                       <a:solidFill>
-                        <a:srgbClr val="D4E3F7"/>
+                        <a:srgbClr val="D1E2FA"/>
                       </a:solidFill>
                       <a:prstDash val="solid"/>
                     </a:lnT>
                     <a:lnB w="9525" cap="flat" cmpd="sng" algn="ctr">
                       <a:solidFill>
-                        <a:srgbClr val="D4E3F7"/>
+                        <a:srgbClr val="D1E2FA"/>
                       </a:solidFill>
                       <a:prstDash val="solid"/>
                     </a:lnB>
                     <a:solidFill>
-                      <a:srgbClr val="D4E3F7"/>
+                      <a:srgbClr val="D1E2FA"/>
                     </a:solidFill>
                   </a:tcPr>
                 </a:tc>
@@ -7541,7 +7813,7 @@
                       <a:r>
                         <a:rPr sz="1400" b="0">
                           <a:solidFill>
-                            <a:srgbClr val="2B2B2B"/>
+                            <a:srgbClr val="26231F"/>
                           </a:solidFill>
                         </a:rPr>
                         <a:t>□</a:t>
@@ -7551,30 +7823,30 @@
                   <a:tcPr anchor="ctr" marL="73152" marR="73152">
                     <a:lnL w="9525" cap="flat" cmpd="sng" algn="ctr">
                       <a:solidFill>
-                        <a:srgbClr val="D4E3F7"/>
+                        <a:srgbClr val="D1E2FA"/>
                       </a:solidFill>
                       <a:prstDash val="solid"/>
                     </a:lnL>
                     <a:lnR w="9525" cap="flat" cmpd="sng" algn="ctr">
                       <a:solidFill>
-                        <a:srgbClr val="D4E3F7"/>
+                        <a:srgbClr val="D1E2FA"/>
                       </a:solidFill>
                       <a:prstDash val="solid"/>
                     </a:lnR>
                     <a:lnT w="9525" cap="flat" cmpd="sng" algn="ctr">
                       <a:solidFill>
-                        <a:srgbClr val="D4E3F7"/>
+                        <a:srgbClr val="D1E2FA"/>
                       </a:solidFill>
                       <a:prstDash val="solid"/>
                     </a:lnT>
                     <a:lnB w="9525" cap="flat" cmpd="sng" algn="ctr">
                       <a:solidFill>
-                        <a:srgbClr val="D4E3F7"/>
+                        <a:srgbClr val="D1E2FA"/>
                       </a:solidFill>
                       <a:prstDash val="solid"/>
                     </a:lnB>
                     <a:solidFill>
-                      <a:srgbClr val="F3F7FC"/>
+                      <a:srgbClr val="EAF2FD"/>
                     </a:solidFill>
                   </a:tcPr>
                 </a:tc>
@@ -7587,7 +7859,7 @@
                       <a:r>
                         <a:rPr sz="1400" b="0">
                           <a:solidFill>
-                            <a:srgbClr val="2B2B2B"/>
+                            <a:srgbClr val="26231F"/>
                           </a:solidFill>
                         </a:rPr>
                         <a:t>□</a:t>
@@ -7597,30 +7869,30 @@
                   <a:tcPr anchor="ctr" marL="73152" marR="73152">
                     <a:lnL w="9525" cap="flat" cmpd="sng" algn="ctr">
                       <a:solidFill>
-                        <a:srgbClr val="D4E3F7"/>
+                        <a:srgbClr val="D1E2FA"/>
                       </a:solidFill>
                       <a:prstDash val="solid"/>
                     </a:lnL>
                     <a:lnR w="9525" cap="flat" cmpd="sng" algn="ctr">
                       <a:solidFill>
-                        <a:srgbClr val="D4E3F7"/>
+                        <a:srgbClr val="D1E2FA"/>
                       </a:solidFill>
                       <a:prstDash val="solid"/>
                     </a:lnR>
                     <a:lnT w="9525" cap="flat" cmpd="sng" algn="ctr">
                       <a:solidFill>
-                        <a:srgbClr val="D4E3F7"/>
+                        <a:srgbClr val="D1E2FA"/>
                       </a:solidFill>
                       <a:prstDash val="solid"/>
                     </a:lnT>
                     <a:lnB w="9525" cap="flat" cmpd="sng" algn="ctr">
                       <a:solidFill>
-                        <a:srgbClr val="D4E3F7"/>
+                        <a:srgbClr val="D1E2FA"/>
                       </a:solidFill>
                       <a:prstDash val="solid"/>
                     </a:lnB>
                     <a:solidFill>
-                      <a:srgbClr val="F3F7FC"/>
+                      <a:srgbClr val="EAF2FD"/>
                     </a:solidFill>
                   </a:tcPr>
                 </a:tc>
@@ -7633,7 +7905,7 @@
                       <a:r>
                         <a:rPr sz="1400" b="0">
                           <a:solidFill>
-                            <a:srgbClr val="2B2B2B"/>
+                            <a:srgbClr val="26231F"/>
                           </a:solidFill>
                         </a:rPr>
                         <a:t>□</a:t>
@@ -7643,30 +7915,30 @@
                   <a:tcPr anchor="ctr" marL="73152" marR="73152">
                     <a:lnL w="9525" cap="flat" cmpd="sng" algn="ctr">
                       <a:solidFill>
-                        <a:srgbClr val="D4E3F7"/>
+                        <a:srgbClr val="D1E2FA"/>
                       </a:solidFill>
                       <a:prstDash val="solid"/>
                     </a:lnL>
                     <a:lnR w="9525" cap="flat" cmpd="sng" algn="ctr">
                       <a:solidFill>
-                        <a:srgbClr val="D4E3F7"/>
+                        <a:srgbClr val="D1E2FA"/>
                       </a:solidFill>
                       <a:prstDash val="solid"/>
                     </a:lnR>
                     <a:lnT w="9525" cap="flat" cmpd="sng" algn="ctr">
                       <a:solidFill>
-                        <a:srgbClr val="D4E3F7"/>
+                        <a:srgbClr val="D1E2FA"/>
                       </a:solidFill>
                       <a:prstDash val="solid"/>
                     </a:lnT>
                     <a:lnB w="9525" cap="flat" cmpd="sng" algn="ctr">
                       <a:solidFill>
-                        <a:srgbClr val="D4E3F7"/>
+                        <a:srgbClr val="D1E2FA"/>
                       </a:solidFill>
                       <a:prstDash val="solid"/>
                     </a:lnB>
                     <a:solidFill>
-                      <a:srgbClr val="F3F7FC"/>
+                      <a:srgbClr val="EAF2FD"/>
                     </a:solidFill>
                   </a:tcPr>
                 </a:tc>
@@ -7681,7 +7953,7 @@
                       <a:r>
                         <a:rPr sz="1400" b="1">
                           <a:solidFill>
-                            <a:srgbClr val="1D4072"/>
+                            <a:srgbClr val="273549"/>
                           </a:solidFill>
                         </a:rPr>
                         <a:t>실손의료</a:t>
@@ -7691,30 +7963,30 @@
                   <a:tcPr anchor="ctr" marL="73152" marR="73152">
                     <a:lnL w="9525" cap="flat" cmpd="sng" algn="ctr">
                       <a:solidFill>
-                        <a:srgbClr val="D4E3F7"/>
+                        <a:srgbClr val="D1E2FA"/>
                       </a:solidFill>
                       <a:prstDash val="solid"/>
                     </a:lnL>
                     <a:lnR w="9525" cap="flat" cmpd="sng" algn="ctr">
                       <a:solidFill>
-                        <a:srgbClr val="D4E3F7"/>
+                        <a:srgbClr val="D1E2FA"/>
                       </a:solidFill>
                       <a:prstDash val="solid"/>
                     </a:lnR>
                     <a:lnT w="9525" cap="flat" cmpd="sng" algn="ctr">
                       <a:solidFill>
-                        <a:srgbClr val="D4E3F7"/>
+                        <a:srgbClr val="D1E2FA"/>
                       </a:solidFill>
                       <a:prstDash val="solid"/>
                     </a:lnT>
                     <a:lnB w="9525" cap="flat" cmpd="sng" algn="ctr">
                       <a:solidFill>
-                        <a:srgbClr val="D4E3F7"/>
+                        <a:srgbClr val="D1E2FA"/>
                       </a:solidFill>
                       <a:prstDash val="solid"/>
                     </a:lnB>
                     <a:solidFill>
-                      <a:srgbClr val="D4E3F7"/>
+                      <a:srgbClr val="D1E2FA"/>
                     </a:solidFill>
                   </a:tcPr>
                 </a:tc>
@@ -7727,7 +7999,7 @@
                       <a:r>
                         <a:rPr sz="1400" b="0">
                           <a:solidFill>
-                            <a:srgbClr val="2B2B2B"/>
+                            <a:srgbClr val="26231F"/>
                           </a:solidFill>
                         </a:rPr>
                         <a:t>□</a:t>
@@ -7737,25 +8009,25 @@
                   <a:tcPr anchor="ctr" marL="73152" marR="73152">
                     <a:lnL w="9525" cap="flat" cmpd="sng" algn="ctr">
                       <a:solidFill>
-                        <a:srgbClr val="D4E3F7"/>
+                        <a:srgbClr val="D1E2FA"/>
                       </a:solidFill>
                       <a:prstDash val="solid"/>
                     </a:lnL>
                     <a:lnR w="9525" cap="flat" cmpd="sng" algn="ctr">
                       <a:solidFill>
-                        <a:srgbClr val="D4E3F7"/>
+                        <a:srgbClr val="D1E2FA"/>
                       </a:solidFill>
                       <a:prstDash val="solid"/>
                     </a:lnR>
                     <a:lnT w="9525" cap="flat" cmpd="sng" algn="ctr">
                       <a:solidFill>
-                        <a:srgbClr val="D4E3F7"/>
+                        <a:srgbClr val="D1E2FA"/>
                       </a:solidFill>
                       <a:prstDash val="solid"/>
                     </a:lnT>
                     <a:lnB w="9525" cap="flat" cmpd="sng" algn="ctr">
                       <a:solidFill>
-                        <a:srgbClr val="D4E3F7"/>
+                        <a:srgbClr val="D1E2FA"/>
                       </a:solidFill>
                       <a:prstDash val="solid"/>
                     </a:lnB>
@@ -7773,7 +8045,7 @@
                       <a:r>
                         <a:rPr sz="1400" b="0">
                           <a:solidFill>
-                            <a:srgbClr val="2B2B2B"/>
+                            <a:srgbClr val="26231F"/>
                           </a:solidFill>
                         </a:rPr>
                         <a:t>□</a:t>
@@ -7783,25 +8055,25 @@
                   <a:tcPr anchor="ctr" marL="73152" marR="73152">
                     <a:lnL w="9525" cap="flat" cmpd="sng" algn="ctr">
                       <a:solidFill>
-                        <a:srgbClr val="D4E3F7"/>
+                        <a:srgbClr val="D1E2FA"/>
                       </a:solidFill>
                       <a:prstDash val="solid"/>
                     </a:lnL>
                     <a:lnR w="9525" cap="flat" cmpd="sng" algn="ctr">
                       <a:solidFill>
-                        <a:srgbClr val="D4E3F7"/>
+                        <a:srgbClr val="D1E2FA"/>
                       </a:solidFill>
                       <a:prstDash val="solid"/>
                     </a:lnR>
                     <a:lnT w="9525" cap="flat" cmpd="sng" algn="ctr">
                       <a:solidFill>
-                        <a:srgbClr val="D4E3F7"/>
+                        <a:srgbClr val="D1E2FA"/>
                       </a:solidFill>
                       <a:prstDash val="solid"/>
                     </a:lnT>
                     <a:lnB w="9525" cap="flat" cmpd="sng" algn="ctr">
                       <a:solidFill>
-                        <a:srgbClr val="D4E3F7"/>
+                        <a:srgbClr val="D1E2FA"/>
                       </a:solidFill>
                       <a:prstDash val="solid"/>
                     </a:lnB>
@@ -7819,7 +8091,7 @@
                       <a:r>
                         <a:rPr sz="1400" b="0">
                           <a:solidFill>
-                            <a:srgbClr val="2B2B2B"/>
+                            <a:srgbClr val="26231F"/>
                           </a:solidFill>
                         </a:rPr>
                         <a:t>□</a:t>
@@ -7829,25 +8101,25 @@
                   <a:tcPr anchor="ctr" marL="73152" marR="73152">
                     <a:lnL w="9525" cap="flat" cmpd="sng" algn="ctr">
                       <a:solidFill>
-                        <a:srgbClr val="D4E3F7"/>
+                        <a:srgbClr val="D1E2FA"/>
                       </a:solidFill>
                       <a:prstDash val="solid"/>
                     </a:lnL>
                     <a:lnR w="9525" cap="flat" cmpd="sng" algn="ctr">
                       <a:solidFill>
-                        <a:srgbClr val="D4E3F7"/>
+                        <a:srgbClr val="D1E2FA"/>
                       </a:solidFill>
                       <a:prstDash val="solid"/>
                     </a:lnR>
                     <a:lnT w="9525" cap="flat" cmpd="sng" algn="ctr">
                       <a:solidFill>
-                        <a:srgbClr val="D4E3F7"/>
+                        <a:srgbClr val="D1E2FA"/>
                       </a:solidFill>
                       <a:prstDash val="solid"/>
                     </a:lnT>
                     <a:lnB w="9525" cap="flat" cmpd="sng" algn="ctr">
                       <a:solidFill>
-                        <a:srgbClr val="D4E3F7"/>
+                        <a:srgbClr val="D1E2FA"/>
                       </a:solidFill>
                       <a:prstDash val="solid"/>
                     </a:lnB>
@@ -7867,7 +8139,7 @@
                       <a:r>
                         <a:rPr sz="1400" b="1">
                           <a:solidFill>
-                            <a:srgbClr val="1D4072"/>
+                            <a:srgbClr val="273549"/>
                           </a:solidFill>
                         </a:rPr>
                         <a:t>연금·노후자금</a:t>
@@ -7877,30 +8149,30 @@
                   <a:tcPr anchor="ctr" marL="73152" marR="73152">
                     <a:lnL w="9525" cap="flat" cmpd="sng" algn="ctr">
                       <a:solidFill>
-                        <a:srgbClr val="D4E3F7"/>
+                        <a:srgbClr val="D1E2FA"/>
                       </a:solidFill>
                       <a:prstDash val="solid"/>
                     </a:lnL>
                     <a:lnR w="9525" cap="flat" cmpd="sng" algn="ctr">
                       <a:solidFill>
-                        <a:srgbClr val="D4E3F7"/>
+                        <a:srgbClr val="D1E2FA"/>
                       </a:solidFill>
                       <a:prstDash val="solid"/>
                     </a:lnR>
                     <a:lnT w="9525" cap="flat" cmpd="sng" algn="ctr">
                       <a:solidFill>
-                        <a:srgbClr val="D4E3F7"/>
+                        <a:srgbClr val="D1E2FA"/>
                       </a:solidFill>
                       <a:prstDash val="solid"/>
                     </a:lnT>
                     <a:lnB w="9525" cap="flat" cmpd="sng" algn="ctr">
                       <a:solidFill>
-                        <a:srgbClr val="D4E3F7"/>
+                        <a:srgbClr val="D1E2FA"/>
                       </a:solidFill>
                       <a:prstDash val="solid"/>
                     </a:lnB>
                     <a:solidFill>
-                      <a:srgbClr val="D4E3F7"/>
+                      <a:srgbClr val="D1E2FA"/>
                     </a:solidFill>
                   </a:tcPr>
                 </a:tc>
@@ -7913,7 +8185,7 @@
                       <a:r>
                         <a:rPr sz="1400" b="0">
                           <a:solidFill>
-                            <a:srgbClr val="2B2B2B"/>
+                            <a:srgbClr val="26231F"/>
                           </a:solidFill>
                         </a:rPr>
                         <a:t>□</a:t>
@@ -7923,30 +8195,30 @@
                   <a:tcPr anchor="ctr" marL="73152" marR="73152">
                     <a:lnL w="9525" cap="flat" cmpd="sng" algn="ctr">
                       <a:solidFill>
-                        <a:srgbClr val="D4E3F7"/>
+                        <a:srgbClr val="D1E2FA"/>
                       </a:solidFill>
                       <a:prstDash val="solid"/>
                     </a:lnL>
                     <a:lnR w="9525" cap="flat" cmpd="sng" algn="ctr">
                       <a:solidFill>
-                        <a:srgbClr val="D4E3F7"/>
+                        <a:srgbClr val="D1E2FA"/>
                       </a:solidFill>
                       <a:prstDash val="solid"/>
                     </a:lnR>
                     <a:lnT w="9525" cap="flat" cmpd="sng" algn="ctr">
                       <a:solidFill>
-                        <a:srgbClr val="D4E3F7"/>
+                        <a:srgbClr val="D1E2FA"/>
                       </a:solidFill>
                       <a:prstDash val="solid"/>
                     </a:lnT>
                     <a:lnB w="9525" cap="flat" cmpd="sng" algn="ctr">
                       <a:solidFill>
-                        <a:srgbClr val="D4E3F7"/>
+                        <a:srgbClr val="D1E2FA"/>
                       </a:solidFill>
                       <a:prstDash val="solid"/>
                     </a:lnB>
                     <a:solidFill>
-                      <a:srgbClr val="F3F7FC"/>
+                      <a:srgbClr val="EAF2FD"/>
                     </a:solidFill>
                   </a:tcPr>
                 </a:tc>
@@ -7959,7 +8231,7 @@
                       <a:r>
                         <a:rPr sz="1400" b="0">
                           <a:solidFill>
-                            <a:srgbClr val="2B2B2B"/>
+                            <a:srgbClr val="26231F"/>
                           </a:solidFill>
                         </a:rPr>
                         <a:t>□</a:t>
@@ -7969,30 +8241,30 @@
                   <a:tcPr anchor="ctr" marL="73152" marR="73152">
                     <a:lnL w="9525" cap="flat" cmpd="sng" algn="ctr">
                       <a:solidFill>
-                        <a:srgbClr val="D4E3F7"/>
+                        <a:srgbClr val="D1E2FA"/>
                       </a:solidFill>
                       <a:prstDash val="solid"/>
                     </a:lnL>
                     <a:lnR w="9525" cap="flat" cmpd="sng" algn="ctr">
                       <a:solidFill>
-                        <a:srgbClr val="D4E3F7"/>
+                        <a:srgbClr val="D1E2FA"/>
                       </a:solidFill>
                       <a:prstDash val="solid"/>
                     </a:lnR>
                     <a:lnT w="9525" cap="flat" cmpd="sng" algn="ctr">
                       <a:solidFill>
-                        <a:srgbClr val="D4E3F7"/>
+                        <a:srgbClr val="D1E2FA"/>
                       </a:solidFill>
                       <a:prstDash val="solid"/>
                     </a:lnT>
                     <a:lnB w="9525" cap="flat" cmpd="sng" algn="ctr">
                       <a:solidFill>
-                        <a:srgbClr val="D4E3F7"/>
+                        <a:srgbClr val="D1E2FA"/>
                       </a:solidFill>
                       <a:prstDash val="solid"/>
                     </a:lnB>
                     <a:solidFill>
-                      <a:srgbClr val="F3F7FC"/>
+                      <a:srgbClr val="EAF2FD"/>
                     </a:solidFill>
                   </a:tcPr>
                 </a:tc>
@@ -8005,7 +8277,7 @@
                       <a:r>
                         <a:rPr sz="1400" b="0">
                           <a:solidFill>
-                            <a:srgbClr val="2B2B2B"/>
+                            <a:srgbClr val="26231F"/>
                           </a:solidFill>
                         </a:rPr>
                         <a:t>□</a:t>
@@ -8015,30 +8287,30 @@
                   <a:tcPr anchor="ctr" marL="73152" marR="73152">
                     <a:lnL w="9525" cap="flat" cmpd="sng" algn="ctr">
                       <a:solidFill>
-                        <a:srgbClr val="D4E3F7"/>
+                        <a:srgbClr val="D1E2FA"/>
                       </a:solidFill>
                       <a:prstDash val="solid"/>
                     </a:lnL>
                     <a:lnR w="9525" cap="flat" cmpd="sng" algn="ctr">
                       <a:solidFill>
-                        <a:srgbClr val="D4E3F7"/>
+                        <a:srgbClr val="D1E2FA"/>
                       </a:solidFill>
                       <a:prstDash val="solid"/>
                     </a:lnR>
                     <a:lnT w="9525" cap="flat" cmpd="sng" algn="ctr">
                       <a:solidFill>
-                        <a:srgbClr val="D4E3F7"/>
+                        <a:srgbClr val="D1E2FA"/>
                       </a:solidFill>
                       <a:prstDash val="solid"/>
                     </a:lnT>
                     <a:lnB w="9525" cap="flat" cmpd="sng" algn="ctr">
                       <a:solidFill>
-                        <a:srgbClr val="D4E3F7"/>
+                        <a:srgbClr val="D1E2FA"/>
                       </a:solidFill>
                       <a:prstDash val="solid"/>
                     </a:lnB>
                     <a:solidFill>
-                      <a:srgbClr val="F3F7FC"/>
+                      <a:srgbClr val="EAF2FD"/>
                     </a:solidFill>
                   </a:tcPr>
                 </a:tc>
@@ -8061,7 +8333,7 @@
     <p:bg>
       <p:bgPr>
         <a:solidFill>
-          <a:srgbClr val="F3F7FC"/>
+          <a:srgbClr val="FAFBFD"/>
         </a:solidFill>
         <a:effectLst/>
       </p:bgPr>
@@ -8080,18 +8352,82 @@
           <p:nvPr/>
         </p:nvSpPr>
         <p:spPr>
-          <a:xfrm rot="10800000">
-            <a:off x="10637215" y="0"/>
-            <a:ext cx="914400" cy="1554480"/>
-          </a:xfrm>
-          <a:prstGeom prst="round2SameRect">
-            <a:avLst>
-              <a:gd name="adj1" fmla="val 50000"/>
-              <a:gd name="adj2" fmla="val 0"/>
-            </a:avLst>
+          <a:xfrm>
+            <a:off x="10180015" y="-1645920"/>
+            <a:ext cx="3474720" cy="3474720"/>
+          </a:xfrm>
+          <a:prstGeom prst="ellipse">
+            <a:avLst/>
           </a:prstGeom>
           <a:solidFill>
-            <a:srgbClr val="D4E3F7"/>
+            <a:srgbClr val="A6C6F2"/>
+          </a:solidFill>
+          <a:ln>
+            <a:noFill/>
+          </a:ln>
+        </p:spPr>
+        <p:txBody>
+          <a:bodyPr rtlCol="0" anchor="ctr"/>
+          <a:lstStyle/>
+          <a:p>
+            <a:pPr algn="ctr"/>
+          </a:p>
+        </p:txBody>
+      </p:sp>
+      <p:sp>
+        <p:nvSpPr>
+          <p:cNvPr id="4" name="상단 라벨"/>
+          <p:cNvSpPr txBox="1"/>
+          <p:nvPr/>
+        </p:nvSpPr>
+        <p:spPr>
+          <a:xfrm>
+            <a:off x="640080" y="274320"/>
+            <a:ext cx="5486400" cy="274320"/>
+          </a:xfrm>
+          <a:prstGeom prst="rect">
+            <a:avLst/>
+          </a:prstGeom>
+          <a:noFill/>
+        </p:spPr>
+        <p:txBody>
+          <a:bodyPr wrap="square" lIns="54864" rIns="54864" tIns="27432" bIns="27432" anchor="ctr">
+            <a:noAutofit/>
+          </a:bodyPr>
+          <a:lstStyle/>
+          <a:p>
+            <a:pPr algn="l">
+              <a:lnSpc>
+                <a:spcPct val="115000"/>
+              </a:lnSpc>
+            </a:pPr>
+            <a:r>
+              <a:rPr sz="900" b="1" i="0" spc="250">
+                <a:solidFill>
+                  <a:srgbClr val="26231F"/>
+                </a:solidFill>
+              </a:rPr>
+              <a:t>INSURANCE CHECK</a:t>
+            </a:r>
+          </a:p>
+        </p:txBody>
+      </p:sp>
+      <p:sp>
+        <p:nvSpPr>
+          <p:cNvPr id="5" name="포인트"/>
+          <p:cNvSpPr/>
+          <p:nvPr/>
+        </p:nvSpPr>
+        <p:spPr>
+          <a:xfrm>
+            <a:off x="11048695" y="502919"/>
+            <a:ext cx="274320" cy="274320"/>
+          </a:xfrm>
+          <a:prstGeom prst="ellipse">
+            <a:avLst/>
+          </a:prstGeom>
+          <a:solidFill>
+            <a:srgbClr val="FFFFFF"/>
           </a:solidFill>
           <a:ln>
             <a:noFill/>
@@ -8117,8 +8453,8 @@
         </p:nvSpPr>
         <p:spPr>
           <a:xfrm>
-            <a:off x="640080" y="457200"/>
-            <a:ext cx="9722815" cy="868680"/>
+            <a:off x="640080" y="658368"/>
+            <a:ext cx="9082735" cy="868680"/>
           </a:xfrm>
         </p:spPr>
         <p:txBody>
@@ -8135,7 +8471,7 @@
             <a:r>
               <a:rPr sz="3000" b="1" i="0">
                 <a:solidFill>
-                  <a:srgbClr val="1D4072"/>
+                  <a:srgbClr val="26231F"/>
                 </a:solidFill>
               </a:rPr>
               <a:t>월 보험료 한눈에</a:t>
@@ -8145,26 +8481,26 @@
       </p:sp>
       <p:sp>
         <p:nvSpPr>
-          <p:cNvPr id="4" name="카드 1"/>
+          <p:cNvPr id="6" name="카드 1"/>
           <p:cNvSpPr/>
           <p:nvPr/>
         </p:nvSpPr>
         <p:spPr>
           <a:xfrm>
-            <a:off x="640080" y="1600200"/>
+            <a:off x="640080" y="1783080"/>
             <a:ext cx="3484778" cy="2926080"/>
           </a:xfrm>
           <a:prstGeom prst="roundRect">
             <a:avLst>
-              <a:gd name="adj" fmla="val 8000"/>
+              <a:gd name="adj" fmla="val 3000"/>
             </a:avLst>
           </a:prstGeom>
           <a:solidFill>
-            <a:srgbClr val="F3F7FC"/>
+            <a:srgbClr val="FFFFFF"/>
           </a:solidFill>
-          <a:ln w="15875">
+          <a:ln w="9525">
             <a:solidFill>
-              <a:srgbClr val="D4E3F7"/>
+              <a:srgbClr val="D1E2FA"/>
             </a:solidFill>
           </a:ln>
         </p:spPr>
@@ -8178,20 +8514,49 @@
       </p:sp>
       <p:sp>
         <p:nvSpPr>
-          <p:cNvPr id="5" name="번호 1"/>
+          <p:cNvPr id="7" name="위쪽 띠"/>
           <p:cNvSpPr/>
           <p:nvPr/>
         </p:nvSpPr>
         <p:spPr>
           <a:xfrm>
-            <a:off x="822959" y="1783080"/>
+            <a:off x="649224" y="1792224"/>
+            <a:ext cx="3466490" cy="82296"/>
+          </a:xfrm>
+          <a:prstGeom prst="rect">
+            <a:avLst/>
+          </a:prstGeom>
+          <a:solidFill>
+            <a:srgbClr val="97BBED"/>
+          </a:solidFill>
+          <a:ln>
+            <a:noFill/>
+          </a:ln>
+        </p:spPr>
+        <p:txBody>
+          <a:bodyPr rtlCol="0" anchor="ctr"/>
+          <a:lstStyle/>
+          <a:p>
+            <a:pPr algn="ctr"/>
+          </a:p>
+        </p:txBody>
+      </p:sp>
+      <p:sp>
+        <p:nvSpPr>
+          <p:cNvPr id="8" name="번호 1"/>
+          <p:cNvSpPr/>
+          <p:nvPr/>
+        </p:nvSpPr>
+        <p:spPr>
+          <a:xfrm>
+            <a:off x="822959" y="1965960"/>
             <a:ext cx="457200" cy="457200"/>
           </a:xfrm>
           <a:prstGeom prst="ellipse">
             <a:avLst/>
           </a:prstGeom>
           <a:solidFill>
-            <a:srgbClr val="4981D0"/>
+            <a:srgbClr val="BCBAF3"/>
           </a:solidFill>
           <a:ln>
             <a:noFill/>
@@ -8211,7 +8576,7 @@
             <a:r>
               <a:rPr sz="1600" b="1" i="0">
                 <a:solidFill>
-                  <a:srgbClr val="FFFFFF"/>
+                  <a:srgbClr val="26231F"/>
                 </a:solidFill>
               </a:rPr>
               <a:t>1</a:t>
@@ -8221,13 +8586,13 @@
       </p:sp>
       <p:sp>
         <p:nvSpPr>
-          <p:cNvPr id="6" name="TextBox 5"/>
+          <p:cNvPr id="9" name="TextBox 8"/>
           <p:cNvSpPr txBox="1"/>
           <p:nvPr/>
         </p:nvSpPr>
         <p:spPr>
           <a:xfrm>
-            <a:off x="777240" y="2377440"/>
+            <a:off x="777240" y="2560320"/>
             <a:ext cx="3210458" cy="640080"/>
           </a:xfrm>
           <a:prstGeom prst="rect">
@@ -8249,7 +8614,7 @@
             <a:r>
               <a:rPr sz="1700" b="1" i="0">
                 <a:solidFill>
-                  <a:srgbClr val="1D4072"/>
+                  <a:srgbClr val="273549"/>
                 </a:solidFill>
               </a:rPr>
               <a:t>월 보험료 합계</a:t>
@@ -8259,13 +8624,13 @@
       </p:sp>
       <p:sp>
         <p:nvSpPr>
-          <p:cNvPr id="7" name="TextBox 6"/>
+          <p:cNvPr id="10" name="TextBox 9"/>
           <p:cNvSpPr txBox="1"/>
           <p:nvPr/>
         </p:nvSpPr>
         <p:spPr>
           <a:xfrm>
-            <a:off x="777240" y="3063240"/>
+            <a:off x="777240" y="3246120"/>
             <a:ext cx="3210458" cy="1325880"/>
           </a:xfrm>
           <a:prstGeom prst="rect">
@@ -8287,7 +8652,7 @@
             <a:r>
               <a:rPr sz="3000" b="0" i="0">
                 <a:solidFill>
-                  <a:srgbClr val="2B2B2B"/>
+                  <a:srgbClr val="26231F"/>
                 </a:solidFill>
               </a:rPr>
               <a:t>0원</a:t>
@@ -8297,26 +8662,26 @@
       </p:sp>
       <p:sp>
         <p:nvSpPr>
-          <p:cNvPr id="8" name="카드 2"/>
+          <p:cNvPr id="11" name="카드 2"/>
           <p:cNvSpPr/>
           <p:nvPr/>
         </p:nvSpPr>
         <p:spPr>
           <a:xfrm>
-            <a:off x="4353458" y="1600200"/>
+            <a:off x="4353458" y="1783080"/>
             <a:ext cx="3484778" cy="2926080"/>
           </a:xfrm>
           <a:prstGeom prst="roundRect">
             <a:avLst>
-              <a:gd name="adj" fmla="val 8000"/>
+              <a:gd name="adj" fmla="val 3000"/>
             </a:avLst>
           </a:prstGeom>
           <a:solidFill>
-            <a:srgbClr val="F3F7FC"/>
+            <a:srgbClr val="FFFFFF"/>
           </a:solidFill>
-          <a:ln w="15875">
+          <a:ln w="9525">
             <a:solidFill>
-              <a:srgbClr val="D4E3F7"/>
+              <a:srgbClr val="D1E2FA"/>
             </a:solidFill>
           </a:ln>
         </p:spPr>
@@ -8330,20 +8695,49 @@
       </p:sp>
       <p:sp>
         <p:nvSpPr>
-          <p:cNvPr id="9" name="번호 2"/>
+          <p:cNvPr id="12" name="위쪽 띠"/>
           <p:cNvSpPr/>
           <p:nvPr/>
         </p:nvSpPr>
         <p:spPr>
           <a:xfrm>
-            <a:off x="4536338" y="1783080"/>
+            <a:off x="4362602" y="1792224"/>
+            <a:ext cx="3466490" cy="82296"/>
+          </a:xfrm>
+          <a:prstGeom prst="rect">
+            <a:avLst/>
+          </a:prstGeom>
+          <a:solidFill>
+            <a:srgbClr val="97BBED"/>
+          </a:solidFill>
+          <a:ln>
+            <a:noFill/>
+          </a:ln>
+        </p:spPr>
+        <p:txBody>
+          <a:bodyPr rtlCol="0" anchor="ctr"/>
+          <a:lstStyle/>
+          <a:p>
+            <a:pPr algn="ctr"/>
+          </a:p>
+        </p:txBody>
+      </p:sp>
+      <p:sp>
+        <p:nvSpPr>
+          <p:cNvPr id="13" name="번호 2"/>
+          <p:cNvSpPr/>
+          <p:nvPr/>
+        </p:nvSpPr>
+        <p:spPr>
+          <a:xfrm>
+            <a:off x="4536338" y="1965960"/>
             <a:ext cx="457200" cy="457200"/>
           </a:xfrm>
           <a:prstGeom prst="ellipse">
             <a:avLst/>
           </a:prstGeom>
           <a:solidFill>
-            <a:srgbClr val="4981D0"/>
+            <a:srgbClr val="BCBAF3"/>
           </a:solidFill>
           <a:ln>
             <a:noFill/>
@@ -8363,7 +8757,7 @@
             <a:r>
               <a:rPr sz="1600" b="1" i="0">
                 <a:solidFill>
-                  <a:srgbClr val="FFFFFF"/>
+                  <a:srgbClr val="26231F"/>
                 </a:solidFill>
               </a:rPr>
               <a:t>2</a:t>
@@ -8373,13 +8767,13 @@
       </p:sp>
       <p:sp>
         <p:nvSpPr>
-          <p:cNvPr id="10" name="TextBox 9"/>
+          <p:cNvPr id="14" name="TextBox 13"/>
           <p:cNvSpPr txBox="1"/>
           <p:nvPr/>
         </p:nvSpPr>
         <p:spPr>
           <a:xfrm>
-            <a:off x="4490618" y="2377440"/>
+            <a:off x="4490618" y="2560320"/>
             <a:ext cx="3210458" cy="640080"/>
           </a:xfrm>
           <a:prstGeom prst="rect">
@@ -8401,7 +8795,7 @@
             <a:r>
               <a:rPr sz="1700" b="1" i="0">
                 <a:solidFill>
-                  <a:srgbClr val="1D4072"/>
+                  <a:srgbClr val="273549"/>
                 </a:solidFill>
               </a:rPr>
               <a:t>연 보험료 합계</a:t>
@@ -8411,13 +8805,13 @@
       </p:sp>
       <p:sp>
         <p:nvSpPr>
-          <p:cNvPr id="11" name="TextBox 10"/>
+          <p:cNvPr id="15" name="TextBox 14"/>
           <p:cNvSpPr txBox="1"/>
           <p:nvPr/>
         </p:nvSpPr>
         <p:spPr>
           <a:xfrm>
-            <a:off x="4490618" y="3063240"/>
+            <a:off x="4490618" y="3246120"/>
             <a:ext cx="3210458" cy="1325880"/>
           </a:xfrm>
           <a:prstGeom prst="rect">
@@ -8439,7 +8833,7 @@
             <a:r>
               <a:rPr sz="3000" b="0" i="0">
                 <a:solidFill>
-                  <a:srgbClr val="2B2B2B"/>
+                  <a:srgbClr val="26231F"/>
                 </a:solidFill>
               </a:rPr>
               <a:t>0원</a:t>
@@ -8449,26 +8843,26 @@
       </p:sp>
       <p:sp>
         <p:nvSpPr>
-          <p:cNvPr id="12" name="카드 3"/>
+          <p:cNvPr id="16" name="카드 3"/>
           <p:cNvSpPr/>
           <p:nvPr/>
         </p:nvSpPr>
         <p:spPr>
           <a:xfrm>
-            <a:off x="8066836" y="1600200"/>
+            <a:off x="8066836" y="1783080"/>
             <a:ext cx="3484778" cy="2926080"/>
           </a:xfrm>
           <a:prstGeom prst="roundRect">
             <a:avLst>
-              <a:gd name="adj" fmla="val 8000"/>
+              <a:gd name="adj" fmla="val 3000"/>
             </a:avLst>
           </a:prstGeom>
           <a:solidFill>
-            <a:srgbClr val="F3F7FC"/>
+            <a:srgbClr val="FFFFFF"/>
           </a:solidFill>
-          <a:ln w="15875">
+          <a:ln w="9525">
             <a:solidFill>
-              <a:srgbClr val="D4E3F7"/>
+              <a:srgbClr val="D1E2FA"/>
             </a:solidFill>
           </a:ln>
         </p:spPr>
@@ -8482,20 +8876,49 @@
       </p:sp>
       <p:sp>
         <p:nvSpPr>
-          <p:cNvPr id="13" name="번호 3"/>
+          <p:cNvPr id="17" name="위쪽 띠"/>
           <p:cNvSpPr/>
           <p:nvPr/>
         </p:nvSpPr>
         <p:spPr>
           <a:xfrm>
-            <a:off x="8249716" y="1783080"/>
+            <a:off x="8075980" y="1792224"/>
+            <a:ext cx="3466490" cy="82296"/>
+          </a:xfrm>
+          <a:prstGeom prst="rect">
+            <a:avLst/>
+          </a:prstGeom>
+          <a:solidFill>
+            <a:srgbClr val="97BBED"/>
+          </a:solidFill>
+          <a:ln>
+            <a:noFill/>
+          </a:ln>
+        </p:spPr>
+        <p:txBody>
+          <a:bodyPr rtlCol="0" anchor="ctr"/>
+          <a:lstStyle/>
+          <a:p>
+            <a:pPr algn="ctr"/>
+          </a:p>
+        </p:txBody>
+      </p:sp>
+      <p:sp>
+        <p:nvSpPr>
+          <p:cNvPr id="18" name="번호 3"/>
+          <p:cNvSpPr/>
+          <p:nvPr/>
+        </p:nvSpPr>
+        <p:spPr>
+          <a:xfrm>
+            <a:off x="8249716" y="1965960"/>
             <a:ext cx="457200" cy="457200"/>
           </a:xfrm>
           <a:prstGeom prst="ellipse">
             <a:avLst/>
           </a:prstGeom>
           <a:solidFill>
-            <a:srgbClr val="4981D0"/>
+            <a:srgbClr val="BCBAF3"/>
           </a:solidFill>
           <a:ln>
             <a:noFill/>
@@ -8515,7 +8938,7 @@
             <a:r>
               <a:rPr sz="1600" b="1" i="0">
                 <a:solidFill>
-                  <a:srgbClr val="FFFFFF"/>
+                  <a:srgbClr val="26231F"/>
                 </a:solidFill>
               </a:rPr>
               <a:t>3</a:t>
@@ -8525,13 +8948,13 @@
       </p:sp>
       <p:sp>
         <p:nvSpPr>
-          <p:cNvPr id="14" name="TextBox 13"/>
+          <p:cNvPr id="19" name="TextBox 18"/>
           <p:cNvSpPr txBox="1"/>
           <p:nvPr/>
         </p:nvSpPr>
         <p:spPr>
           <a:xfrm>
-            <a:off x="8203996" y="2377440"/>
+            <a:off x="8203996" y="2560320"/>
             <a:ext cx="3210458" cy="640080"/>
           </a:xfrm>
           <a:prstGeom prst="rect">
@@ -8553,7 +8976,7 @@
             <a:r>
               <a:rPr sz="1700" b="1" i="0">
                 <a:solidFill>
-                  <a:srgbClr val="1D4072"/>
+                  <a:srgbClr val="273549"/>
                 </a:solidFill>
               </a:rPr>
               <a:t>월 소득 대비</a:t>
@@ -8563,13 +8986,13 @@
       </p:sp>
       <p:sp>
         <p:nvSpPr>
-          <p:cNvPr id="15" name="TextBox 14"/>
+          <p:cNvPr id="20" name="TextBox 19"/>
           <p:cNvSpPr txBox="1"/>
           <p:nvPr/>
         </p:nvSpPr>
         <p:spPr>
           <a:xfrm>
-            <a:off x="8203996" y="3063240"/>
+            <a:off x="8203996" y="3246120"/>
             <a:ext cx="3210458" cy="1325880"/>
           </a:xfrm>
           <a:prstGeom prst="rect">
@@ -8591,7 +9014,7 @@
             <a:r>
               <a:rPr sz="3000" b="0" i="0">
                 <a:solidFill>
-                  <a:srgbClr val="2B2B2B"/>
+                  <a:srgbClr val="26231F"/>
                 </a:solidFill>
               </a:rPr>
               <a:t>0 %</a:t>
@@ -8601,13 +9024,13 @@
       </p:sp>
       <p:sp>
         <p:nvSpPr>
-          <p:cNvPr id="16" name="안내"/>
+          <p:cNvPr id="21" name="안내"/>
           <p:cNvSpPr txBox="1"/>
           <p:nvPr/>
         </p:nvSpPr>
         <p:spPr>
           <a:xfrm>
-            <a:off x="640080" y="4709160"/>
+            <a:off x="640080" y="4892040"/>
             <a:ext cx="10911535" cy="365760"/>
           </a:xfrm>
           <a:prstGeom prst="rect">
@@ -8651,7 +9074,7 @@
     <p:bg>
       <p:bgPr>
         <a:solidFill>
-          <a:srgbClr val="F3F7FC"/>
+          <a:srgbClr val="FAFBFD"/>
         </a:solidFill>
         <a:effectLst/>
       </p:bgPr>
@@ -8670,18 +9093,82 @@
           <p:nvPr/>
         </p:nvSpPr>
         <p:spPr>
-          <a:xfrm rot="10800000">
-            <a:off x="10637215" y="0"/>
-            <a:ext cx="914400" cy="1554480"/>
-          </a:xfrm>
-          <a:prstGeom prst="round2SameRect">
-            <a:avLst>
-              <a:gd name="adj1" fmla="val 50000"/>
-              <a:gd name="adj2" fmla="val 0"/>
-            </a:avLst>
+          <a:xfrm>
+            <a:off x="10180015" y="-1645920"/>
+            <a:ext cx="3474720" cy="3474720"/>
+          </a:xfrm>
+          <a:prstGeom prst="ellipse">
+            <a:avLst/>
           </a:prstGeom>
           <a:solidFill>
-            <a:srgbClr val="D4E3F7"/>
+            <a:srgbClr val="A6C6F2"/>
+          </a:solidFill>
+          <a:ln>
+            <a:noFill/>
+          </a:ln>
+        </p:spPr>
+        <p:txBody>
+          <a:bodyPr rtlCol="0" anchor="ctr"/>
+          <a:lstStyle/>
+          <a:p>
+            <a:pPr algn="ctr"/>
+          </a:p>
+        </p:txBody>
+      </p:sp>
+      <p:sp>
+        <p:nvSpPr>
+          <p:cNvPr id="4" name="상단 라벨"/>
+          <p:cNvSpPr txBox="1"/>
+          <p:nvPr/>
+        </p:nvSpPr>
+        <p:spPr>
+          <a:xfrm>
+            <a:off x="640080" y="274320"/>
+            <a:ext cx="5486400" cy="274320"/>
+          </a:xfrm>
+          <a:prstGeom prst="rect">
+            <a:avLst/>
+          </a:prstGeom>
+          <a:noFill/>
+        </p:spPr>
+        <p:txBody>
+          <a:bodyPr wrap="square" lIns="54864" rIns="54864" tIns="27432" bIns="27432" anchor="ctr">
+            <a:noAutofit/>
+          </a:bodyPr>
+          <a:lstStyle/>
+          <a:p>
+            <a:pPr algn="l">
+              <a:lnSpc>
+                <a:spcPct val="115000"/>
+              </a:lnSpc>
+            </a:pPr>
+            <a:r>
+              <a:rPr sz="900" b="1" i="0" spc="250">
+                <a:solidFill>
+                  <a:srgbClr val="26231F"/>
+                </a:solidFill>
+              </a:rPr>
+              <a:t>INSURANCE CHECK</a:t>
+            </a:r>
+          </a:p>
+        </p:txBody>
+      </p:sp>
+      <p:sp>
+        <p:nvSpPr>
+          <p:cNvPr id="5" name="포인트"/>
+          <p:cNvSpPr/>
+          <p:nvPr/>
+        </p:nvSpPr>
+        <p:spPr>
+          <a:xfrm>
+            <a:off x="11048695" y="502919"/>
+            <a:ext cx="274320" cy="274320"/>
+          </a:xfrm>
+          <a:prstGeom prst="ellipse">
+            <a:avLst/>
+          </a:prstGeom>
+          <a:solidFill>
+            <a:srgbClr val="FFFFFF"/>
           </a:solidFill>
           <a:ln>
             <a:noFill/>
@@ -8707,8 +9194,8 @@
         </p:nvSpPr>
         <p:spPr>
           <a:xfrm>
-            <a:off x="640080" y="457200"/>
-            <a:ext cx="9722815" cy="868680"/>
+            <a:off x="640080" y="658368"/>
+            <a:ext cx="9082735" cy="868680"/>
           </a:xfrm>
         </p:spPr>
         <p:txBody>
@@ -8725,7 +9212,7 @@
             <a:r>
               <a:rPr sz="3000" b="1" i="0">
                 <a:solidFill>
-                  <a:srgbClr val="1D4072"/>
+                  <a:srgbClr val="26231F"/>
                 </a:solidFill>
               </a:rPr>
               <a:t>점검 메모와 다음 할 일</a:t>
@@ -8735,26 +9222,26 @@
       </p:sp>
       <p:sp>
         <p:nvSpPr>
-          <p:cNvPr id="4" name="카드 1"/>
+          <p:cNvPr id="6" name="카드 1"/>
           <p:cNvSpPr/>
           <p:nvPr/>
         </p:nvSpPr>
         <p:spPr>
           <a:xfrm>
-            <a:off x="640080" y="1600200"/>
-            <a:ext cx="3484778" cy="4160520"/>
+            <a:off x="640080" y="1783080"/>
+            <a:ext cx="3484778" cy="3931920"/>
           </a:xfrm>
           <a:prstGeom prst="roundRect">
             <a:avLst>
-              <a:gd name="adj" fmla="val 8000"/>
+              <a:gd name="adj" fmla="val 3000"/>
             </a:avLst>
           </a:prstGeom>
           <a:solidFill>
-            <a:srgbClr val="F3F7FC"/>
+            <a:srgbClr val="FFFFFF"/>
           </a:solidFill>
-          <a:ln w="15875">
+          <a:ln w="9525">
             <a:solidFill>
-              <a:srgbClr val="D4E3F7"/>
+              <a:srgbClr val="D1E2FA"/>
             </a:solidFill>
           </a:ln>
         </p:spPr>
@@ -8768,20 +9255,49 @@
       </p:sp>
       <p:sp>
         <p:nvSpPr>
-          <p:cNvPr id="5" name="번호 1"/>
+          <p:cNvPr id="7" name="위쪽 띠"/>
           <p:cNvSpPr/>
           <p:nvPr/>
         </p:nvSpPr>
         <p:spPr>
           <a:xfrm>
-            <a:off x="822959" y="1783080"/>
+            <a:off x="649224" y="1792224"/>
+            <a:ext cx="3466490" cy="82296"/>
+          </a:xfrm>
+          <a:prstGeom prst="rect">
+            <a:avLst/>
+          </a:prstGeom>
+          <a:solidFill>
+            <a:srgbClr val="97BBED"/>
+          </a:solidFill>
+          <a:ln>
+            <a:noFill/>
+          </a:ln>
+        </p:spPr>
+        <p:txBody>
+          <a:bodyPr rtlCol="0" anchor="ctr"/>
+          <a:lstStyle/>
+          <a:p>
+            <a:pPr algn="ctr"/>
+          </a:p>
+        </p:txBody>
+      </p:sp>
+      <p:sp>
+        <p:nvSpPr>
+          <p:cNvPr id="8" name="번호 1"/>
+          <p:cNvSpPr/>
+          <p:nvPr/>
+        </p:nvSpPr>
+        <p:spPr>
+          <a:xfrm>
+            <a:off x="822959" y="1965960"/>
             <a:ext cx="457200" cy="457200"/>
           </a:xfrm>
           <a:prstGeom prst="ellipse">
             <a:avLst/>
           </a:prstGeom>
           <a:solidFill>
-            <a:srgbClr val="4981D0"/>
+            <a:srgbClr val="BCBAF3"/>
           </a:solidFill>
           <a:ln>
             <a:noFill/>
@@ -8801,7 +9317,7 @@
             <a:r>
               <a:rPr sz="1600" b="1" i="0">
                 <a:solidFill>
-                  <a:srgbClr val="FFFFFF"/>
+                  <a:srgbClr val="26231F"/>
                 </a:solidFill>
               </a:rPr>
               <a:t>1</a:t>
@@ -8811,13 +9327,13 @@
       </p:sp>
       <p:sp>
         <p:nvSpPr>
-          <p:cNvPr id="6" name="TextBox 5"/>
+          <p:cNvPr id="9" name="TextBox 8"/>
           <p:cNvSpPr txBox="1"/>
           <p:nvPr/>
         </p:nvSpPr>
         <p:spPr>
           <a:xfrm>
-            <a:off x="777240" y="2377440"/>
+            <a:off x="777240" y="2560320"/>
             <a:ext cx="3210458" cy="640080"/>
           </a:xfrm>
           <a:prstGeom prst="rect">
@@ -8839,7 +9355,7 @@
             <a:r>
               <a:rPr sz="1800" b="1" i="0">
                 <a:solidFill>
-                  <a:srgbClr val="1D4072"/>
+                  <a:srgbClr val="273549"/>
                 </a:solidFill>
               </a:rPr>
               <a:t>확인할 것</a:t>
@@ -8849,14 +9365,14 @@
       </p:sp>
       <p:sp>
         <p:nvSpPr>
-          <p:cNvPr id="7" name="TextBox 6"/>
+          <p:cNvPr id="10" name="TextBox 9"/>
           <p:cNvSpPr txBox="1"/>
           <p:nvPr/>
         </p:nvSpPr>
         <p:spPr>
           <a:xfrm>
-            <a:off x="777240" y="3063240"/>
-            <a:ext cx="3210458" cy="2560320"/>
+            <a:off x="777240" y="3246120"/>
+            <a:ext cx="3210458" cy="2331720"/>
           </a:xfrm>
           <a:prstGeom prst="rect">
             <a:avLst/>
@@ -8877,7 +9393,7 @@
             <a:r>
               <a:rPr sz="1500" b="0" i="0">
                 <a:solidFill>
-                  <a:srgbClr val="2B2B2B"/>
+                  <a:srgbClr val="26231F"/>
                 </a:solidFill>
               </a:rPr>
               <a:t>내용을 입력하세요</a:t>
@@ -8887,26 +9403,26 @@
       </p:sp>
       <p:sp>
         <p:nvSpPr>
-          <p:cNvPr id="8" name="카드 2"/>
+          <p:cNvPr id="11" name="카드 2"/>
           <p:cNvSpPr/>
           <p:nvPr/>
         </p:nvSpPr>
         <p:spPr>
           <a:xfrm>
-            <a:off x="4353458" y="1600200"/>
-            <a:ext cx="3484778" cy="4160520"/>
+            <a:off x="4353458" y="1783080"/>
+            <a:ext cx="3484778" cy="3931920"/>
           </a:xfrm>
           <a:prstGeom prst="roundRect">
             <a:avLst>
-              <a:gd name="adj" fmla="val 8000"/>
+              <a:gd name="adj" fmla="val 3000"/>
             </a:avLst>
           </a:prstGeom>
           <a:solidFill>
-            <a:srgbClr val="F3F7FC"/>
+            <a:srgbClr val="FFFFFF"/>
           </a:solidFill>
-          <a:ln w="15875">
+          <a:ln w="9525">
             <a:solidFill>
-              <a:srgbClr val="D4E3F7"/>
+              <a:srgbClr val="D1E2FA"/>
             </a:solidFill>
           </a:ln>
         </p:spPr>
@@ -8920,20 +9436,49 @@
       </p:sp>
       <p:sp>
         <p:nvSpPr>
-          <p:cNvPr id="9" name="번호 2"/>
+          <p:cNvPr id="12" name="위쪽 띠"/>
           <p:cNvSpPr/>
           <p:nvPr/>
         </p:nvSpPr>
         <p:spPr>
           <a:xfrm>
-            <a:off x="4536338" y="1783080"/>
+            <a:off x="4362602" y="1792224"/>
+            <a:ext cx="3466490" cy="82296"/>
+          </a:xfrm>
+          <a:prstGeom prst="rect">
+            <a:avLst/>
+          </a:prstGeom>
+          <a:solidFill>
+            <a:srgbClr val="97BBED"/>
+          </a:solidFill>
+          <a:ln>
+            <a:noFill/>
+          </a:ln>
+        </p:spPr>
+        <p:txBody>
+          <a:bodyPr rtlCol="0" anchor="ctr"/>
+          <a:lstStyle/>
+          <a:p>
+            <a:pPr algn="ctr"/>
+          </a:p>
+        </p:txBody>
+      </p:sp>
+      <p:sp>
+        <p:nvSpPr>
+          <p:cNvPr id="13" name="번호 2"/>
+          <p:cNvSpPr/>
+          <p:nvPr/>
+        </p:nvSpPr>
+        <p:spPr>
+          <a:xfrm>
+            <a:off x="4536338" y="1965960"/>
             <a:ext cx="457200" cy="457200"/>
           </a:xfrm>
           <a:prstGeom prst="ellipse">
             <a:avLst/>
           </a:prstGeom>
           <a:solidFill>
-            <a:srgbClr val="4981D0"/>
+            <a:srgbClr val="BCBAF3"/>
           </a:solidFill>
           <a:ln>
             <a:noFill/>
@@ -8953,7 +9498,7 @@
             <a:r>
               <a:rPr sz="1600" b="1" i="0">
                 <a:solidFill>
-                  <a:srgbClr val="FFFFFF"/>
+                  <a:srgbClr val="26231F"/>
                 </a:solidFill>
               </a:rPr>
               <a:t>2</a:t>
@@ -8963,13 +9508,13 @@
       </p:sp>
       <p:sp>
         <p:nvSpPr>
-          <p:cNvPr id="10" name="TextBox 9"/>
+          <p:cNvPr id="14" name="TextBox 13"/>
           <p:cNvSpPr txBox="1"/>
           <p:nvPr/>
         </p:nvSpPr>
         <p:spPr>
           <a:xfrm>
-            <a:off x="4490618" y="2377440"/>
+            <a:off x="4490618" y="2560320"/>
             <a:ext cx="3210458" cy="640080"/>
           </a:xfrm>
           <a:prstGeom prst="rect">
@@ -8991,7 +9536,7 @@
             <a:r>
               <a:rPr sz="1800" b="1" i="0">
                 <a:solidFill>
-                  <a:srgbClr val="1D4072"/>
+                  <a:srgbClr val="273549"/>
                 </a:solidFill>
               </a:rPr>
               <a:t>문의할 것</a:t>
@@ -9001,14 +9546,14 @@
       </p:sp>
       <p:sp>
         <p:nvSpPr>
-          <p:cNvPr id="11" name="TextBox 10"/>
+          <p:cNvPr id="15" name="TextBox 14"/>
           <p:cNvSpPr txBox="1"/>
           <p:nvPr/>
         </p:nvSpPr>
         <p:spPr>
           <a:xfrm>
-            <a:off x="4490618" y="3063240"/>
-            <a:ext cx="3210458" cy="2560320"/>
+            <a:off x="4490618" y="3246120"/>
+            <a:ext cx="3210458" cy="2331720"/>
           </a:xfrm>
           <a:prstGeom prst="rect">
             <a:avLst/>
@@ -9029,7 +9574,7 @@
             <a:r>
               <a:rPr sz="1500" b="0" i="0">
                 <a:solidFill>
-                  <a:srgbClr val="2B2B2B"/>
+                  <a:srgbClr val="26231F"/>
                 </a:solidFill>
               </a:rPr>
               <a:t>내용을 입력하세요</a:t>
@@ -9039,26 +9584,26 @@
       </p:sp>
       <p:sp>
         <p:nvSpPr>
-          <p:cNvPr id="12" name="카드 3"/>
+          <p:cNvPr id="16" name="카드 3"/>
           <p:cNvSpPr/>
           <p:nvPr/>
         </p:nvSpPr>
         <p:spPr>
           <a:xfrm>
-            <a:off x="8066836" y="1600200"/>
-            <a:ext cx="3484778" cy="4160520"/>
+            <a:off x="8066836" y="1783080"/>
+            <a:ext cx="3484778" cy="3931920"/>
           </a:xfrm>
           <a:prstGeom prst="roundRect">
             <a:avLst>
-              <a:gd name="adj" fmla="val 8000"/>
+              <a:gd name="adj" fmla="val 3000"/>
             </a:avLst>
           </a:prstGeom>
           <a:solidFill>
-            <a:srgbClr val="F3F7FC"/>
+            <a:srgbClr val="FFFFFF"/>
           </a:solidFill>
-          <a:ln w="15875">
+          <a:ln w="9525">
             <a:solidFill>
-              <a:srgbClr val="D4E3F7"/>
+              <a:srgbClr val="D1E2FA"/>
             </a:solidFill>
           </a:ln>
         </p:spPr>
@@ -9072,20 +9617,49 @@
       </p:sp>
       <p:sp>
         <p:nvSpPr>
-          <p:cNvPr id="13" name="번호 3"/>
+          <p:cNvPr id="17" name="위쪽 띠"/>
           <p:cNvSpPr/>
           <p:nvPr/>
         </p:nvSpPr>
         <p:spPr>
           <a:xfrm>
-            <a:off x="8249716" y="1783080"/>
+            <a:off x="8075980" y="1792224"/>
+            <a:ext cx="3466490" cy="82296"/>
+          </a:xfrm>
+          <a:prstGeom prst="rect">
+            <a:avLst/>
+          </a:prstGeom>
+          <a:solidFill>
+            <a:srgbClr val="97BBED"/>
+          </a:solidFill>
+          <a:ln>
+            <a:noFill/>
+          </a:ln>
+        </p:spPr>
+        <p:txBody>
+          <a:bodyPr rtlCol="0" anchor="ctr"/>
+          <a:lstStyle/>
+          <a:p>
+            <a:pPr algn="ctr"/>
+          </a:p>
+        </p:txBody>
+      </p:sp>
+      <p:sp>
+        <p:nvSpPr>
+          <p:cNvPr id="18" name="번호 3"/>
+          <p:cNvSpPr/>
+          <p:nvPr/>
+        </p:nvSpPr>
+        <p:spPr>
+          <a:xfrm>
+            <a:off x="8249716" y="1965960"/>
             <a:ext cx="457200" cy="457200"/>
           </a:xfrm>
           <a:prstGeom prst="ellipse">
             <a:avLst/>
           </a:prstGeom>
           <a:solidFill>
-            <a:srgbClr val="4981D0"/>
+            <a:srgbClr val="BCBAF3"/>
           </a:solidFill>
           <a:ln>
             <a:noFill/>
@@ -9105,7 +9679,7 @@
             <a:r>
               <a:rPr sz="1600" b="1" i="0">
                 <a:solidFill>
-                  <a:srgbClr val="FFFFFF"/>
+                  <a:srgbClr val="26231F"/>
                 </a:solidFill>
               </a:rPr>
               <a:t>3</a:t>
@@ -9115,13 +9689,13 @@
       </p:sp>
       <p:sp>
         <p:nvSpPr>
-          <p:cNvPr id="14" name="TextBox 13"/>
+          <p:cNvPr id="19" name="TextBox 18"/>
           <p:cNvSpPr txBox="1"/>
           <p:nvPr/>
         </p:nvSpPr>
         <p:spPr>
           <a:xfrm>
-            <a:off x="8203996" y="2377440"/>
+            <a:off x="8203996" y="2560320"/>
             <a:ext cx="3210458" cy="640080"/>
           </a:xfrm>
           <a:prstGeom prst="rect">
@@ -9143,7 +9717,7 @@
             <a:r>
               <a:rPr sz="1800" b="1" i="0">
                 <a:solidFill>
-                  <a:srgbClr val="1D4072"/>
+                  <a:srgbClr val="273549"/>
                 </a:solidFill>
               </a:rPr>
               <a:t>정리할 날짜</a:t>
@@ -9153,14 +9727,14 @@
       </p:sp>
       <p:sp>
         <p:nvSpPr>
-          <p:cNvPr id="15" name="TextBox 14"/>
+          <p:cNvPr id="20" name="TextBox 19"/>
           <p:cNvSpPr txBox="1"/>
           <p:nvPr/>
         </p:nvSpPr>
         <p:spPr>
           <a:xfrm>
-            <a:off x="8203996" y="3063240"/>
-            <a:ext cx="3210458" cy="2560320"/>
+            <a:off x="8203996" y="3246120"/>
+            <a:ext cx="3210458" cy="2331720"/>
           </a:xfrm>
           <a:prstGeom prst="rect">
             <a:avLst/>
@@ -9181,7 +9755,7 @@
             <a:r>
               <a:rPr sz="1500" b="0" i="0">
                 <a:solidFill>
-                  <a:srgbClr val="2B2B2B"/>
+                  <a:srgbClr val="26231F"/>
                 </a:solidFill>
               </a:rPr>
               <a:t>내용을 입력하세요</a:t>
@@ -9191,13 +9765,13 @@
       </p:sp>
       <p:sp>
         <p:nvSpPr>
-          <p:cNvPr id="16" name="안내 문구"/>
+          <p:cNvPr id="21" name="안내 문구"/>
           <p:cNvSpPr txBox="1"/>
           <p:nvPr/>
         </p:nvSpPr>
         <p:spPr>
           <a:xfrm>
-            <a:off x="640080" y="5852160"/>
+            <a:off x="640080" y="5806440"/>
             <a:ext cx="10911535" cy="548640"/>
           </a:xfrm>
           <a:prstGeom prst="rect">
@@ -9246,34 +9820,34 @@
         <a:sysClr val="window" lastClr="FFFFFF"/>
       </a:lt1>
       <a:dk2>
-        <a:srgbClr val="1D4072"/>
+        <a:srgbClr val="273549"/>
       </a:dk2>
       <a:lt2>
-        <a:srgbClr val="F3F7FC"/>
+        <a:srgbClr val="EAF2FD"/>
       </a:lt2>
       <a:accent1>
-        <a:srgbClr val="4981D0"/>
+        <a:srgbClr val="97BBED"/>
       </a:accent1>
       <a:accent2>
-        <a:srgbClr val="339941"/>
+        <a:srgbClr val="BCBAF3"/>
       </a:accent2>
       <a:accent3>
-        <a:srgbClr val="1D4072"/>
+        <a:srgbClr val="273549"/>
       </a:accent3>
       <a:accent4>
-        <a:srgbClr val="D4E3F7"/>
+        <a:srgbClr val="D1E2FA"/>
       </a:accent4>
       <a:accent5>
-        <a:srgbClr val="3E8D88"/>
+        <a:srgbClr val="AABAF0"/>
       </a:accent5>
       <a:accent6>
-        <a:srgbClr val="778CAA"/>
+        <a:srgbClr val="7D8692"/>
       </a:accent6>
       <a:hlink>
-        <a:srgbClr val="4981D0"/>
+        <a:srgbClr val="97BBED"/>
       </a:hlink>
       <a:folHlink>
-        <a:srgbClr val="1D4072"/>
+        <a:srgbClr val="273549"/>
       </a:folHlink>
     </a:clrScheme>
     <a:fontScheme name="Office">
